--- a/StudyMate_AI_Presentation.pptx
+++ b/StudyMate_AI_Presentation.pptx
@@ -17,6 +17,8 @@
     <p:sldId id="265" r:id="rId16"/>
     <p:sldId id="266" r:id="rId17"/>
     <p:sldId id="267" r:id="rId18"/>
+    <p:sldId id="268" r:id="rId19"/>
+    <p:sldId id="269" r:id="rId20"/>
   </p:sldIdLst>
   <p:sldSz cx="12191695" cy="6858000" type="screen4x3"/>
   <p:notesSz cx="6858000" cy="9144000"/>
@@ -3138,7 +3140,7 @@
               </a:defRPr>
             </a:pPr>
             <a:r>
-              <a:t>SHADOWFOX  AI  INTERNSHIP  •  BEGINNER  LEVEL  PROJECT</a:t>
+              <a:t>SHADOWFOX  AI  INTERNSHIP  •  BEGINNER  +  INTERMEDIATE  +  ADVANCED</a:t>
             </a:r>
           </a:p>
         </p:txBody>
@@ -3502,7 +3504,7 @@
               </a:defRPr>
             </a:pPr>
             <a:r>
-              <a:t>Challenges</a:t>
+              <a:t>Tech Stack</a:t>
             </a:r>
           </a:p>
         </p:txBody>
@@ -3558,8 +3560,8 @@
         </p:nvSpPr>
         <p:spPr>
           <a:xfrm>
-            <a:off x="731520" y="2011680"/>
-            <a:ext cx="10515600" cy="6350"/>
+            <a:off x="731520" y="1920240"/>
+            <a:ext cx="9144000" cy="6350"/>
           </a:xfrm>
           <a:prstGeom prst="rect">
             <a:avLst/>
@@ -3601,8 +3603,44 @@
         </p:nvSpPr>
         <p:spPr>
           <a:xfrm>
-            <a:off x="731520" y="2148840"/>
-            <a:ext cx="457200" cy="365760"/>
+            <a:off x="731520" y="1965960"/>
+            <a:ext cx="3200400" cy="320040"/>
+          </a:xfrm>
+          <a:prstGeom prst="rect">
+            <a:avLst/>
+          </a:prstGeom>
+          <a:noFill/>
+        </p:spPr>
+        <p:txBody>
+          <a:bodyPr wrap="square">
+            <a:spAutoFit/>
+          </a:bodyPr>
+          <a:lstStyle/>
+          <a:p>
+            <a:pPr algn="l">
+              <a:defRPr sz="1000" b="1" a:spc="200">
+                <a:solidFill>
+                  <a:srgbClr val="787878"/>
+                </a:solidFill>
+                <a:latin typeface="Open Sauce Sans"/>
+              </a:defRPr>
+            </a:pPr>
+            <a:r>
+              <a:t>LANGUAGE</a:t>
+            </a:r>
+          </a:p>
+        </p:txBody>
+      </p:sp>
+      <p:sp>
+        <p:nvSpPr>
+          <p:cNvPr id="9" name="TextBox 8"/>
+          <p:cNvSpPr txBox="1"/>
+          <p:nvPr/>
+        </p:nvSpPr>
+        <p:spPr>
+          <a:xfrm>
+            <a:off x="4389120" y="1965960"/>
+            <a:ext cx="5486400" cy="320040"/>
           </a:xfrm>
           <a:prstGeom prst="rect">
             <a:avLst/>
@@ -3618,135 +3656,27 @@
             <a:pPr algn="l">
               <a:defRPr sz="1200" b="0">
                 <a:solidFill>
-                  <a:srgbClr val="787878"/>
-                </a:solidFill>
-                <a:latin typeface="Open Sauce Sans"/>
-              </a:defRPr>
-            </a:pPr>
-            <a:r>
-              <a:t>01</a:t>
-            </a:r>
-          </a:p>
-        </p:txBody>
-      </p:sp>
-      <p:sp>
-        <p:nvSpPr>
-          <p:cNvPr id="9" name="TextBox 8"/>
-          <p:cNvSpPr txBox="1"/>
-          <p:nvPr/>
-        </p:nvSpPr>
-        <p:spPr>
-          <a:xfrm>
-            <a:off x="1371600" y="2148840"/>
-            <a:ext cx="2286000" cy="365760"/>
-          </a:xfrm>
-          <a:prstGeom prst="rect">
-            <a:avLst/>
-          </a:prstGeom>
-          <a:noFill/>
-        </p:spPr>
-        <p:txBody>
-          <a:bodyPr wrap="square">
-            <a:spAutoFit/>
-          </a:bodyPr>
-          <a:lstStyle/>
-          <a:p>
-            <a:pPr algn="l">
-              <a:defRPr sz="1100" b="1" a:spc="200">
-                <a:solidFill>
                   <a:srgbClr val="141414"/>
                 </a:solidFill>
                 <a:latin typeface="Open Sauce Sans"/>
               </a:defRPr>
             </a:pPr>
             <a:r>
-              <a:t>API FAILURES</a:t>
-            </a:r>
-          </a:p>
-        </p:txBody>
-      </p:sp>
-      <p:sp>
-        <p:nvSpPr>
-          <p:cNvPr id="10" name="TextBox 9"/>
-          <p:cNvSpPr txBox="1"/>
-          <p:nvPr/>
-        </p:nvSpPr>
-        <p:spPr>
-          <a:xfrm>
-            <a:off x="3840480" y="2148840"/>
-            <a:ext cx="3200400" cy="365760"/>
-          </a:xfrm>
-          <a:prstGeom prst="rect">
-            <a:avLst/>
-          </a:prstGeom>
-          <a:noFill/>
-        </p:spPr>
-        <p:txBody>
-          <a:bodyPr wrap="square">
-            <a:spAutoFit/>
-          </a:bodyPr>
-          <a:lstStyle/>
-          <a:p>
-            <a:pPr algn="l">
-              <a:defRPr sz="1200" b="0">
-                <a:solidFill>
-                  <a:srgbClr val="787878"/>
-                </a:solidFill>
-                <a:latin typeface="Open Sauce Sans"/>
-              </a:defRPr>
-            </a:pPr>
-            <a:r>
-              <a:t>Google's servers occasionally returned transient errors.</a:t>
-            </a:r>
-          </a:p>
-        </p:txBody>
-      </p:sp>
-      <p:sp>
-        <p:nvSpPr>
-          <p:cNvPr id="11" name="TextBox 10"/>
-          <p:cNvSpPr txBox="1"/>
-          <p:nvPr/>
-        </p:nvSpPr>
-        <p:spPr>
-          <a:xfrm>
-            <a:off x="7315200" y="2148840"/>
-            <a:ext cx="4114800" cy="365760"/>
-          </a:xfrm>
-          <a:prstGeom prst="rect">
-            <a:avLst/>
-          </a:prstGeom>
-          <a:noFill/>
-        </p:spPr>
-        <p:txBody>
-          <a:bodyPr wrap="square">
-            <a:spAutoFit/>
-          </a:bodyPr>
-          <a:lstStyle/>
-          <a:p>
-            <a:pPr algn="l">
-              <a:defRPr sz="1200" b="0">
-                <a:solidFill>
-                  <a:srgbClr val="141414"/>
-                </a:solidFill>
-                <a:latin typeface="Open Sauce Sans"/>
-              </a:defRPr>
-            </a:pPr>
-            <a:r>
-              <a:t>Added tenacity for automatic retry — 2 attempts, 1 second gap.</a:t>
-            </a:r>
-          </a:p>
-        </p:txBody>
-      </p:sp>
-      <p:sp>
-        <p:nvSpPr>
-          <p:cNvPr id="12" name="Rectangle 11"/>
+              <a:t>Python 3.10+</a:t>
+            </a:r>
+          </a:p>
+        </p:txBody>
+      </p:sp>
+      <p:sp>
+        <p:nvSpPr>
+          <p:cNvPr id="10" name="Rectangle 9"/>
           <p:cNvSpPr/>
           <p:nvPr/>
         </p:nvSpPr>
         <p:spPr>
           <a:xfrm>
-            <a:off x="731520" y="3017520"/>
-            <a:ext cx="10515600" cy="6350"/>
+            <a:off x="731520" y="2286000"/>
+            <a:ext cx="9144000" cy="6350"/>
           </a:xfrm>
           <a:prstGeom prst="rect">
             <a:avLst/>
@@ -3782,14 +3712,50 @@
       </p:sp>
       <p:sp>
         <p:nvSpPr>
-          <p:cNvPr id="13" name="TextBox 12"/>
-          <p:cNvSpPr txBox="1"/>
-          <p:nvPr/>
-        </p:nvSpPr>
-        <p:spPr>
-          <a:xfrm>
-            <a:off x="731520" y="3154680"/>
-            <a:ext cx="457200" cy="365760"/>
+          <p:cNvPr id="11" name="TextBox 10"/>
+          <p:cNvSpPr txBox="1"/>
+          <p:nvPr/>
+        </p:nvSpPr>
+        <p:spPr>
+          <a:xfrm>
+            <a:off x="731520" y="2331720"/>
+            <a:ext cx="3200400" cy="320040"/>
+          </a:xfrm>
+          <a:prstGeom prst="rect">
+            <a:avLst/>
+          </a:prstGeom>
+          <a:noFill/>
+        </p:spPr>
+        <p:txBody>
+          <a:bodyPr wrap="square">
+            <a:spAutoFit/>
+          </a:bodyPr>
+          <a:lstStyle/>
+          <a:p>
+            <a:pPr algn="l">
+              <a:defRPr sz="1000" b="1" a:spc="200">
+                <a:solidFill>
+                  <a:srgbClr val="787878"/>
+                </a:solidFill>
+                <a:latin typeface="Open Sauce Sans"/>
+              </a:defRPr>
+            </a:pPr>
+            <a:r>
+              <a:t>UI FRAMEWORK</a:t>
+            </a:r>
+          </a:p>
+        </p:txBody>
+      </p:sp>
+      <p:sp>
+        <p:nvSpPr>
+          <p:cNvPr id="12" name="TextBox 11"/>
+          <p:cNvSpPr txBox="1"/>
+          <p:nvPr/>
+        </p:nvSpPr>
+        <p:spPr>
+          <a:xfrm>
+            <a:off x="4389120" y="2331720"/>
+            <a:ext cx="5486400" cy="320040"/>
           </a:xfrm>
           <a:prstGeom prst="rect">
             <a:avLst/>
@@ -3805,135 +3771,27 @@
             <a:pPr algn="l">
               <a:defRPr sz="1200" b="0">
                 <a:solidFill>
-                  <a:srgbClr val="787878"/>
-                </a:solidFill>
-                <a:latin typeface="Open Sauce Sans"/>
-              </a:defRPr>
-            </a:pPr>
-            <a:r>
-              <a:t>02</a:t>
-            </a:r>
-          </a:p>
-        </p:txBody>
-      </p:sp>
-      <p:sp>
-        <p:nvSpPr>
-          <p:cNvPr id="14" name="TextBox 13"/>
-          <p:cNvSpPr txBox="1"/>
-          <p:nvPr/>
-        </p:nvSpPr>
-        <p:spPr>
-          <a:xfrm>
-            <a:off x="1371600" y="3154680"/>
-            <a:ext cx="2286000" cy="365760"/>
-          </a:xfrm>
-          <a:prstGeom prst="rect">
-            <a:avLst/>
-          </a:prstGeom>
-          <a:noFill/>
-        </p:spPr>
-        <p:txBody>
-          <a:bodyPr wrap="square">
-            <a:spAutoFit/>
-          </a:bodyPr>
-          <a:lstStyle/>
-          <a:p>
-            <a:pPr algn="l">
-              <a:defRPr sz="1100" b="1" a:spc="200">
-                <a:solidFill>
                   <a:srgbClr val="141414"/>
                 </a:solidFill>
                 <a:latin typeface="Open Sauce Sans"/>
               </a:defRPr>
             </a:pPr>
             <a:r>
-              <a:t>DATA LOSS ON TAB SWITCH</a:t>
-            </a:r>
-          </a:p>
-        </p:txBody>
-      </p:sp>
-      <p:sp>
-        <p:nvSpPr>
-          <p:cNvPr id="15" name="TextBox 14"/>
-          <p:cNvSpPr txBox="1"/>
-          <p:nvPr/>
-        </p:nvSpPr>
-        <p:spPr>
-          <a:xfrm>
-            <a:off x="3840480" y="3154680"/>
-            <a:ext cx="3200400" cy="365760"/>
-          </a:xfrm>
-          <a:prstGeom prst="rect">
-            <a:avLst/>
-          </a:prstGeom>
-          <a:noFill/>
-        </p:spPr>
-        <p:txBody>
-          <a:bodyPr wrap="square">
-            <a:spAutoFit/>
-          </a:bodyPr>
-          <a:lstStyle/>
-          <a:p>
-            <a:pPr algn="l">
-              <a:defRPr sz="1200" b="0">
-                <a:solidFill>
-                  <a:srgbClr val="787878"/>
-                </a:solidFill>
-                <a:latin typeface="Open Sauce Sans"/>
-              </a:defRPr>
-            </a:pPr>
-            <a:r>
-              <a:t>Streamlit re-runs the entire script on every interaction.</a:t>
-            </a:r>
-          </a:p>
-        </p:txBody>
-      </p:sp>
-      <p:sp>
-        <p:nvSpPr>
-          <p:cNvPr id="16" name="TextBox 15"/>
-          <p:cNvSpPr txBox="1"/>
-          <p:nvPr/>
-        </p:nvSpPr>
-        <p:spPr>
-          <a:xfrm>
-            <a:off x="7315200" y="3154680"/>
-            <a:ext cx="4114800" cy="365760"/>
-          </a:xfrm>
-          <a:prstGeom prst="rect">
-            <a:avLst/>
-          </a:prstGeom>
-          <a:noFill/>
-        </p:spPr>
-        <p:txBody>
-          <a:bodyPr wrap="square">
-            <a:spAutoFit/>
-          </a:bodyPr>
-          <a:lstStyle/>
-          <a:p>
-            <a:pPr algn="l">
-              <a:defRPr sz="1200" b="0">
-                <a:solidFill>
-                  <a:srgbClr val="141414"/>
-                </a:solidFill>
-                <a:latin typeface="Open Sauce Sans"/>
-              </a:defRPr>
-            </a:pPr>
-            <a:r>
-              <a:t>Stored results in st.session_state for persistence.</a:t>
-            </a:r>
-          </a:p>
-        </p:txBody>
-      </p:sp>
-      <p:sp>
-        <p:nvSpPr>
-          <p:cNvPr id="17" name="Rectangle 16"/>
+              <a:t>Streamlit</a:t>
+            </a:r>
+          </a:p>
+        </p:txBody>
+      </p:sp>
+      <p:sp>
+        <p:nvSpPr>
+          <p:cNvPr id="13" name="Rectangle 12"/>
           <p:cNvSpPr/>
           <p:nvPr/>
         </p:nvSpPr>
         <p:spPr>
           <a:xfrm>
-            <a:off x="731520" y="4023360"/>
-            <a:ext cx="10515600" cy="6350"/>
+            <a:off x="731520" y="2651760"/>
+            <a:ext cx="9144000" cy="6350"/>
           </a:xfrm>
           <a:prstGeom prst="rect">
             <a:avLst/>
@@ -3969,14 +3827,50 @@
       </p:sp>
       <p:sp>
         <p:nvSpPr>
-          <p:cNvPr id="18" name="TextBox 17"/>
-          <p:cNvSpPr txBox="1"/>
-          <p:nvPr/>
-        </p:nvSpPr>
-        <p:spPr>
-          <a:xfrm>
-            <a:off x="731520" y="4160520"/>
-            <a:ext cx="457200" cy="365760"/>
+          <p:cNvPr id="14" name="TextBox 13"/>
+          <p:cNvSpPr txBox="1"/>
+          <p:nvPr/>
+        </p:nvSpPr>
+        <p:spPr>
+          <a:xfrm>
+            <a:off x="731520" y="2697480"/>
+            <a:ext cx="3200400" cy="320040"/>
+          </a:xfrm>
+          <a:prstGeom prst="rect">
+            <a:avLst/>
+          </a:prstGeom>
+          <a:noFill/>
+        </p:spPr>
+        <p:txBody>
+          <a:bodyPr wrap="square">
+            <a:spAutoFit/>
+          </a:bodyPr>
+          <a:lstStyle/>
+          <a:p>
+            <a:pPr algn="l">
+              <a:defRPr sz="1000" b="1" a:spc="200">
+                <a:solidFill>
+                  <a:srgbClr val="787878"/>
+                </a:solidFill>
+                <a:latin typeface="Open Sauce Sans"/>
+              </a:defRPr>
+            </a:pPr>
+            <a:r>
+              <a:t>BACKEND API</a:t>
+            </a:r>
+          </a:p>
+        </p:txBody>
+      </p:sp>
+      <p:sp>
+        <p:nvSpPr>
+          <p:cNvPr id="15" name="TextBox 14"/>
+          <p:cNvSpPr txBox="1"/>
+          <p:nvPr/>
+        </p:nvSpPr>
+        <p:spPr>
+          <a:xfrm>
+            <a:off x="4389120" y="2697480"/>
+            <a:ext cx="5486400" cy="320040"/>
           </a:xfrm>
           <a:prstGeom prst="rect">
             <a:avLst/>
@@ -3992,135 +3886,27 @@
             <a:pPr algn="l">
               <a:defRPr sz="1200" b="0">
                 <a:solidFill>
-                  <a:srgbClr val="787878"/>
-                </a:solidFill>
-                <a:latin typeface="Open Sauce Sans"/>
-              </a:defRPr>
-            </a:pPr>
-            <a:r>
-              <a:t>03</a:t>
-            </a:r>
-          </a:p>
-        </p:txBody>
-      </p:sp>
-      <p:sp>
-        <p:nvSpPr>
-          <p:cNvPr id="19" name="TextBox 18"/>
-          <p:cNvSpPr txBox="1"/>
-          <p:nvPr/>
-        </p:nvSpPr>
-        <p:spPr>
-          <a:xfrm>
-            <a:off x="1371600" y="4160520"/>
-            <a:ext cx="2286000" cy="365760"/>
-          </a:xfrm>
-          <a:prstGeom prst="rect">
-            <a:avLst/>
-          </a:prstGeom>
-          <a:noFill/>
-        </p:spPr>
-        <p:txBody>
-          <a:bodyPr wrap="square">
-            <a:spAutoFit/>
-          </a:bodyPr>
-          <a:lstStyle/>
-          <a:p>
-            <a:pPr algn="l">
-              <a:defRPr sz="1100" b="1" a:spc="200">
-                <a:solidFill>
                   <a:srgbClr val="141414"/>
                 </a:solidFill>
                 <a:latin typeface="Open Sauce Sans"/>
               </a:defRPr>
             </a:pPr>
             <a:r>
-              <a:t>INCONSISTENT AI OUTPUT</a:t>
-            </a:r>
-          </a:p>
-        </p:txBody>
-      </p:sp>
-      <p:sp>
-        <p:nvSpPr>
-          <p:cNvPr id="20" name="TextBox 19"/>
-          <p:cNvSpPr txBox="1"/>
-          <p:nvPr/>
-        </p:nvSpPr>
-        <p:spPr>
-          <a:xfrm>
-            <a:off x="3840480" y="4160520"/>
-            <a:ext cx="3200400" cy="365760"/>
-          </a:xfrm>
-          <a:prstGeom prst="rect">
-            <a:avLst/>
-          </a:prstGeom>
-          <a:noFill/>
-        </p:spPr>
-        <p:txBody>
-          <a:bodyPr wrap="square">
-            <a:spAutoFit/>
-          </a:bodyPr>
-          <a:lstStyle/>
-          <a:p>
-            <a:pPr algn="l">
-              <a:defRPr sz="1200" b="0">
-                <a:solidFill>
-                  <a:srgbClr val="787878"/>
-                </a:solidFill>
-                <a:latin typeface="Open Sauce Sans"/>
-              </a:defRPr>
-            </a:pPr>
-            <a:r>
-              <a:t>Without structure, the LLM returned unpredictable formats.</a:t>
-            </a:r>
-          </a:p>
-        </p:txBody>
-      </p:sp>
-      <p:sp>
-        <p:nvSpPr>
-          <p:cNvPr id="21" name="TextBox 20"/>
-          <p:cNvSpPr txBox="1"/>
-          <p:nvPr/>
-        </p:nvSpPr>
-        <p:spPr>
-          <a:xfrm>
-            <a:off x="7315200" y="4160520"/>
-            <a:ext cx="4114800" cy="365760"/>
-          </a:xfrm>
-          <a:prstGeom prst="rect">
-            <a:avLst/>
-          </a:prstGeom>
-          <a:noFill/>
-        </p:spPr>
-        <p:txBody>
-          <a:bodyPr wrap="square">
-            <a:spAutoFit/>
-          </a:bodyPr>
-          <a:lstStyle/>
-          <a:p>
-            <a:pPr algn="l">
-              <a:defRPr sz="1200" b="0">
-                <a:solidFill>
-                  <a:srgbClr val="141414"/>
-                </a:solidFill>
-                <a:latin typeface="Open Sauce Sans"/>
-              </a:defRPr>
-            </a:pPr>
-            <a:r>
-              <a:t>Built strict prompt templates with persona, directives, and delimiters.</a:t>
-            </a:r>
-          </a:p>
-        </p:txBody>
-      </p:sp>
-      <p:sp>
-        <p:nvSpPr>
-          <p:cNvPr id="22" name="Rectangle 21"/>
+              <a:t>FastAPI + Uvicorn</a:t>
+            </a:r>
+          </a:p>
+        </p:txBody>
+      </p:sp>
+      <p:sp>
+        <p:nvSpPr>
+          <p:cNvPr id="16" name="Rectangle 15"/>
           <p:cNvSpPr/>
           <p:nvPr/>
         </p:nvSpPr>
         <p:spPr>
           <a:xfrm>
-            <a:off x="731520" y="5029200"/>
-            <a:ext cx="10515600" cy="6350"/>
+            <a:off x="731520" y="3017520"/>
+            <a:ext cx="9144000" cy="6350"/>
           </a:xfrm>
           <a:prstGeom prst="rect">
             <a:avLst/>
@@ -4156,14 +3942,50 @@
       </p:sp>
       <p:sp>
         <p:nvSpPr>
-          <p:cNvPr id="23" name="TextBox 22"/>
-          <p:cNvSpPr txBox="1"/>
-          <p:nvPr/>
-        </p:nvSpPr>
-        <p:spPr>
-          <a:xfrm>
-            <a:off x="731520" y="5166360"/>
-            <a:ext cx="457200" cy="365760"/>
+          <p:cNvPr id="17" name="TextBox 16"/>
+          <p:cNvSpPr txBox="1"/>
+          <p:nvPr/>
+        </p:nvSpPr>
+        <p:spPr>
+          <a:xfrm>
+            <a:off x="731520" y="3063240"/>
+            <a:ext cx="3200400" cy="320040"/>
+          </a:xfrm>
+          <a:prstGeom prst="rect">
+            <a:avLst/>
+          </a:prstGeom>
+          <a:noFill/>
+        </p:spPr>
+        <p:txBody>
+          <a:bodyPr wrap="square">
+            <a:spAutoFit/>
+          </a:bodyPr>
+          <a:lstStyle/>
+          <a:p>
+            <a:pPr algn="l">
+              <a:defRPr sz="1000" b="1" a:spc="200">
+                <a:solidFill>
+                  <a:srgbClr val="787878"/>
+                </a:solidFill>
+                <a:latin typeface="Open Sauce Sans"/>
+              </a:defRPr>
+            </a:pPr>
+            <a:r>
+              <a:t>VALIDATION</a:t>
+            </a:r>
+          </a:p>
+        </p:txBody>
+      </p:sp>
+      <p:sp>
+        <p:nvSpPr>
+          <p:cNvPr id="18" name="TextBox 17"/>
+          <p:cNvSpPr txBox="1"/>
+          <p:nvPr/>
+        </p:nvSpPr>
+        <p:spPr>
+          <a:xfrm>
+            <a:off x="4389120" y="3063240"/>
+            <a:ext cx="5486400" cy="320040"/>
           </a:xfrm>
           <a:prstGeom prst="rect">
             <a:avLst/>
@@ -4179,63 +4001,106 @@
             <a:pPr algn="l">
               <a:defRPr sz="1200" b="0">
                 <a:solidFill>
+                  <a:srgbClr val="141414"/>
+                </a:solidFill>
+                <a:latin typeface="Open Sauce Sans"/>
+              </a:defRPr>
+            </a:pPr>
+            <a:r>
+              <a:t>Pydantic v2</a:t>
+            </a:r>
+          </a:p>
+        </p:txBody>
+      </p:sp>
+      <p:sp>
+        <p:nvSpPr>
+          <p:cNvPr id="19" name="Rectangle 18"/>
+          <p:cNvSpPr/>
+          <p:nvPr/>
+        </p:nvSpPr>
+        <p:spPr>
+          <a:xfrm>
+            <a:off x="731520" y="3383280"/>
+            <a:ext cx="9144000" cy="6350"/>
+          </a:xfrm>
+          <a:prstGeom prst="rect">
+            <a:avLst/>
+          </a:prstGeom>
+          <a:solidFill>
+            <a:srgbClr val="D2D2D2"/>
+          </a:solidFill>
+          <a:ln>
+            <a:noFill/>
+          </a:ln>
+        </p:spPr>
+        <p:style>
+          <a:lnRef idx="1">
+            <a:schemeClr val="accent1"/>
+          </a:lnRef>
+          <a:fillRef idx="3">
+            <a:schemeClr val="accent1"/>
+          </a:fillRef>
+          <a:effectRef idx="2">
+            <a:schemeClr val="accent1"/>
+          </a:effectRef>
+          <a:fontRef idx="minor">
+            <a:schemeClr val="lt1"/>
+          </a:fontRef>
+        </p:style>
+        <p:txBody>
+          <a:bodyPr rtlCol="0" anchor="ctr"/>
+          <a:lstStyle/>
+          <a:p>
+            <a:pPr algn="ctr"/>
+          </a:p>
+        </p:txBody>
+      </p:sp>
+      <p:sp>
+        <p:nvSpPr>
+          <p:cNvPr id="20" name="TextBox 19"/>
+          <p:cNvSpPr txBox="1"/>
+          <p:nvPr/>
+        </p:nvSpPr>
+        <p:spPr>
+          <a:xfrm>
+            <a:off x="731520" y="3429000"/>
+            <a:ext cx="3200400" cy="320040"/>
+          </a:xfrm>
+          <a:prstGeom prst="rect">
+            <a:avLst/>
+          </a:prstGeom>
+          <a:noFill/>
+        </p:spPr>
+        <p:txBody>
+          <a:bodyPr wrap="square">
+            <a:spAutoFit/>
+          </a:bodyPr>
+          <a:lstStyle/>
+          <a:p>
+            <a:pPr algn="l">
+              <a:defRPr sz="1000" b="1" a:spc="200">
+                <a:solidFill>
                   <a:srgbClr val="787878"/>
                 </a:solidFill>
                 <a:latin typeface="Open Sauce Sans"/>
               </a:defRPr>
             </a:pPr>
             <a:r>
-              <a:t>04</a:t>
-            </a:r>
-          </a:p>
-        </p:txBody>
-      </p:sp>
-      <p:sp>
-        <p:nvSpPr>
-          <p:cNvPr id="24" name="TextBox 23"/>
-          <p:cNvSpPr txBox="1"/>
-          <p:nvPr/>
-        </p:nvSpPr>
-        <p:spPr>
-          <a:xfrm>
-            <a:off x="1371600" y="5166360"/>
-            <a:ext cx="2286000" cy="365760"/>
-          </a:xfrm>
-          <a:prstGeom prst="rect">
-            <a:avLst/>
-          </a:prstGeom>
-          <a:noFill/>
-        </p:spPr>
-        <p:txBody>
-          <a:bodyPr wrap="square">
-            <a:spAutoFit/>
-          </a:bodyPr>
-          <a:lstStyle/>
-          <a:p>
-            <a:pPr algn="l">
-              <a:defRPr sz="1100" b="1" a:spc="200">
-                <a:solidFill>
-                  <a:srgbClr val="141414"/>
-                </a:solidFill>
-                <a:latin typeface="Open Sauce Sans"/>
-              </a:defRPr>
-            </a:pPr>
-            <a:r>
-              <a:t>DEPRECATED SDK</a:t>
-            </a:r>
-          </a:p>
-        </p:txBody>
-      </p:sp>
-      <p:sp>
-        <p:nvSpPr>
-          <p:cNvPr id="25" name="TextBox 24"/>
-          <p:cNvSpPr txBox="1"/>
-          <p:nvPr/>
-        </p:nvSpPr>
-        <p:spPr>
-          <a:xfrm>
-            <a:off x="3840480" y="5166360"/>
-            <a:ext cx="3200400" cy="365760"/>
+              <a:t>AI ENGINE</a:t>
+            </a:r>
+          </a:p>
+        </p:txBody>
+      </p:sp>
+      <p:sp>
+        <p:nvSpPr>
+          <p:cNvPr id="21" name="TextBox 20"/>
+          <p:cNvSpPr txBox="1"/>
+          <p:nvPr/>
+        </p:nvSpPr>
+        <p:spPr>
+          <a:xfrm>
+            <a:off x="4389120" y="3429000"/>
+            <a:ext cx="5486400" cy="320040"/>
           </a:xfrm>
           <a:prstGeom prst="rect">
             <a:avLst/>
@@ -4251,27 +4116,106 @@
             <a:pPr algn="l">
               <a:defRPr sz="1200" b="0">
                 <a:solidFill>
+                  <a:srgbClr val="141414"/>
+                </a:solidFill>
+                <a:latin typeface="Open Sauce Sans"/>
+              </a:defRPr>
+            </a:pPr>
+            <a:r>
+              <a:t>Google Gemini 3.6 Flash</a:t>
+            </a:r>
+          </a:p>
+        </p:txBody>
+      </p:sp>
+      <p:sp>
+        <p:nvSpPr>
+          <p:cNvPr id="22" name="Rectangle 21"/>
+          <p:cNvSpPr/>
+          <p:nvPr/>
+        </p:nvSpPr>
+        <p:spPr>
+          <a:xfrm>
+            <a:off x="731520" y="3749040"/>
+            <a:ext cx="9144000" cy="6350"/>
+          </a:xfrm>
+          <a:prstGeom prst="rect">
+            <a:avLst/>
+          </a:prstGeom>
+          <a:solidFill>
+            <a:srgbClr val="D2D2D2"/>
+          </a:solidFill>
+          <a:ln>
+            <a:noFill/>
+          </a:ln>
+        </p:spPr>
+        <p:style>
+          <a:lnRef idx="1">
+            <a:schemeClr val="accent1"/>
+          </a:lnRef>
+          <a:fillRef idx="3">
+            <a:schemeClr val="accent1"/>
+          </a:fillRef>
+          <a:effectRef idx="2">
+            <a:schemeClr val="accent1"/>
+          </a:effectRef>
+          <a:fontRef idx="minor">
+            <a:schemeClr val="lt1"/>
+          </a:fontRef>
+        </p:style>
+        <p:txBody>
+          <a:bodyPr rtlCol="0" anchor="ctr"/>
+          <a:lstStyle/>
+          <a:p>
+            <a:pPr algn="ctr"/>
+          </a:p>
+        </p:txBody>
+      </p:sp>
+      <p:sp>
+        <p:nvSpPr>
+          <p:cNvPr id="23" name="TextBox 22"/>
+          <p:cNvSpPr txBox="1"/>
+          <p:nvPr/>
+        </p:nvSpPr>
+        <p:spPr>
+          <a:xfrm>
+            <a:off x="731520" y="3794760"/>
+            <a:ext cx="3200400" cy="320040"/>
+          </a:xfrm>
+          <a:prstGeom prst="rect">
+            <a:avLst/>
+          </a:prstGeom>
+          <a:noFill/>
+        </p:spPr>
+        <p:txBody>
+          <a:bodyPr wrap="square">
+            <a:spAutoFit/>
+          </a:bodyPr>
+          <a:lstStyle/>
+          <a:p>
+            <a:pPr algn="l">
+              <a:defRPr sz="1000" b="1" a:spc="200">
+                <a:solidFill>
                   <a:srgbClr val="787878"/>
                 </a:solidFill>
                 <a:latin typeface="Open Sauce Sans"/>
               </a:defRPr>
             </a:pPr>
             <a:r>
-              <a:t>Google deprecated google-generativeai during development.</a:t>
-            </a:r>
-          </a:p>
-        </p:txBody>
-      </p:sp>
-      <p:sp>
-        <p:nvSpPr>
-          <p:cNvPr id="26" name="TextBox 25"/>
-          <p:cNvSpPr txBox="1"/>
-          <p:nvPr/>
-        </p:nvSpPr>
-        <p:spPr>
-          <a:xfrm>
-            <a:off x="7315200" y="5166360"/>
-            <a:ext cx="4114800" cy="365760"/>
+              <a:t>EMBEDDINGS</a:t>
+            </a:r>
+          </a:p>
+        </p:txBody>
+      </p:sp>
+      <p:sp>
+        <p:nvSpPr>
+          <p:cNvPr id="24" name="TextBox 23"/>
+          <p:cNvSpPr txBox="1"/>
+          <p:nvPr/>
+        </p:nvSpPr>
+        <p:spPr>
+          <a:xfrm>
+            <a:off x="4389120" y="3794760"/>
+            <a:ext cx="5486400" cy="320040"/>
           </a:xfrm>
           <a:prstGeom prst="rect">
             <a:avLst/>
@@ -4293,21 +4237,711 @@
               </a:defRPr>
             </a:pPr>
             <a:r>
-              <a:t>Migrated to google-genai — only changed one file.</a:t>
-            </a:r>
-          </a:p>
-        </p:txBody>
-      </p:sp>
-      <p:sp>
-        <p:nvSpPr>
-          <p:cNvPr id="27" name="Rectangle 26"/>
+              <a:t>Gemini Embedding 2 (3072-dim)</a:t>
+            </a:r>
+          </a:p>
+        </p:txBody>
+      </p:sp>
+      <p:sp>
+        <p:nvSpPr>
+          <p:cNvPr id="25" name="Rectangle 24"/>
           <p:cNvSpPr/>
           <p:nvPr/>
         </p:nvSpPr>
         <p:spPr>
           <a:xfrm>
-            <a:off x="731520" y="6035040"/>
-            <a:ext cx="10515600" cy="6350"/>
+            <a:off x="731520" y="4114800"/>
+            <a:ext cx="9144000" cy="6350"/>
+          </a:xfrm>
+          <a:prstGeom prst="rect">
+            <a:avLst/>
+          </a:prstGeom>
+          <a:solidFill>
+            <a:srgbClr val="D2D2D2"/>
+          </a:solidFill>
+          <a:ln>
+            <a:noFill/>
+          </a:ln>
+        </p:spPr>
+        <p:style>
+          <a:lnRef idx="1">
+            <a:schemeClr val="accent1"/>
+          </a:lnRef>
+          <a:fillRef idx="3">
+            <a:schemeClr val="accent1"/>
+          </a:fillRef>
+          <a:effectRef idx="2">
+            <a:schemeClr val="accent1"/>
+          </a:effectRef>
+          <a:fontRef idx="minor">
+            <a:schemeClr val="lt1"/>
+          </a:fontRef>
+        </p:style>
+        <p:txBody>
+          <a:bodyPr rtlCol="0" anchor="ctr"/>
+          <a:lstStyle/>
+          <a:p>
+            <a:pPr algn="ctr"/>
+          </a:p>
+        </p:txBody>
+      </p:sp>
+      <p:sp>
+        <p:nvSpPr>
+          <p:cNvPr id="26" name="TextBox 25"/>
+          <p:cNvSpPr txBox="1"/>
+          <p:nvPr/>
+        </p:nvSpPr>
+        <p:spPr>
+          <a:xfrm>
+            <a:off x="731520" y="4160520"/>
+            <a:ext cx="3200400" cy="320040"/>
+          </a:xfrm>
+          <a:prstGeom prst="rect">
+            <a:avLst/>
+          </a:prstGeom>
+          <a:noFill/>
+        </p:spPr>
+        <p:txBody>
+          <a:bodyPr wrap="square">
+            <a:spAutoFit/>
+          </a:bodyPr>
+          <a:lstStyle/>
+          <a:p>
+            <a:pPr algn="l">
+              <a:defRPr sz="1000" b="1" a:spc="200">
+                <a:solidFill>
+                  <a:srgbClr val="787878"/>
+                </a:solidFill>
+                <a:latin typeface="Open Sauce Sans"/>
+              </a:defRPr>
+            </a:pPr>
+            <a:r>
+              <a:t>VECTOR DB</a:t>
+            </a:r>
+          </a:p>
+        </p:txBody>
+      </p:sp>
+      <p:sp>
+        <p:nvSpPr>
+          <p:cNvPr id="27" name="TextBox 26"/>
+          <p:cNvSpPr txBox="1"/>
+          <p:nvPr/>
+        </p:nvSpPr>
+        <p:spPr>
+          <a:xfrm>
+            <a:off x="4389120" y="4160520"/>
+            <a:ext cx="5486400" cy="320040"/>
+          </a:xfrm>
+          <a:prstGeom prst="rect">
+            <a:avLst/>
+          </a:prstGeom>
+          <a:noFill/>
+        </p:spPr>
+        <p:txBody>
+          <a:bodyPr wrap="square">
+            <a:spAutoFit/>
+          </a:bodyPr>
+          <a:lstStyle/>
+          <a:p>
+            <a:pPr algn="l">
+              <a:defRPr sz="1200" b="0">
+                <a:solidFill>
+                  <a:srgbClr val="141414"/>
+                </a:solidFill>
+                <a:latin typeface="Open Sauce Sans"/>
+              </a:defRPr>
+            </a:pPr>
+            <a:r>
+              <a:t>FAISS (Facebook AI Similarity Search)</a:t>
+            </a:r>
+          </a:p>
+        </p:txBody>
+      </p:sp>
+      <p:sp>
+        <p:nvSpPr>
+          <p:cNvPr id="28" name="Rectangle 27"/>
+          <p:cNvSpPr/>
+          <p:nvPr/>
+        </p:nvSpPr>
+        <p:spPr>
+          <a:xfrm>
+            <a:off x="731520" y="4480560"/>
+            <a:ext cx="9144000" cy="6350"/>
+          </a:xfrm>
+          <a:prstGeom prst="rect">
+            <a:avLst/>
+          </a:prstGeom>
+          <a:solidFill>
+            <a:srgbClr val="D2D2D2"/>
+          </a:solidFill>
+          <a:ln>
+            <a:noFill/>
+          </a:ln>
+        </p:spPr>
+        <p:style>
+          <a:lnRef idx="1">
+            <a:schemeClr val="accent1"/>
+          </a:lnRef>
+          <a:fillRef idx="3">
+            <a:schemeClr val="accent1"/>
+          </a:fillRef>
+          <a:effectRef idx="2">
+            <a:schemeClr val="accent1"/>
+          </a:effectRef>
+          <a:fontRef idx="minor">
+            <a:schemeClr val="lt1"/>
+          </a:fontRef>
+        </p:style>
+        <p:txBody>
+          <a:bodyPr rtlCol="0" anchor="ctr"/>
+          <a:lstStyle/>
+          <a:p>
+            <a:pPr algn="ctr"/>
+          </a:p>
+        </p:txBody>
+      </p:sp>
+      <p:sp>
+        <p:nvSpPr>
+          <p:cNvPr id="29" name="TextBox 28"/>
+          <p:cNvSpPr txBox="1"/>
+          <p:nvPr/>
+        </p:nvSpPr>
+        <p:spPr>
+          <a:xfrm>
+            <a:off x="731520" y="4526280"/>
+            <a:ext cx="3200400" cy="320040"/>
+          </a:xfrm>
+          <a:prstGeom prst="rect">
+            <a:avLst/>
+          </a:prstGeom>
+          <a:noFill/>
+        </p:spPr>
+        <p:txBody>
+          <a:bodyPr wrap="square">
+            <a:spAutoFit/>
+          </a:bodyPr>
+          <a:lstStyle/>
+          <a:p>
+            <a:pPr algn="l">
+              <a:defRPr sz="1000" b="1" a:spc="200">
+                <a:solidFill>
+                  <a:srgbClr val="787878"/>
+                </a:solidFill>
+                <a:latin typeface="Open Sauce Sans"/>
+              </a:defRPr>
+            </a:pPr>
+            <a:r>
+              <a:t>AGENTIC FRAMEWORK</a:t>
+            </a:r>
+          </a:p>
+        </p:txBody>
+      </p:sp>
+      <p:sp>
+        <p:nvSpPr>
+          <p:cNvPr id="30" name="TextBox 29"/>
+          <p:cNvSpPr txBox="1"/>
+          <p:nvPr/>
+        </p:nvSpPr>
+        <p:spPr>
+          <a:xfrm>
+            <a:off x="4389120" y="4526280"/>
+            <a:ext cx="5486400" cy="320040"/>
+          </a:xfrm>
+          <a:prstGeom prst="rect">
+            <a:avLst/>
+          </a:prstGeom>
+          <a:noFill/>
+        </p:spPr>
+        <p:txBody>
+          <a:bodyPr wrap="square">
+            <a:spAutoFit/>
+          </a:bodyPr>
+          <a:lstStyle/>
+          <a:p>
+            <a:pPr algn="l">
+              <a:defRPr sz="1200" b="0">
+                <a:solidFill>
+                  <a:srgbClr val="141414"/>
+                </a:solidFill>
+                <a:latin typeface="Open Sauce Sans"/>
+              </a:defRPr>
+            </a:pPr>
+            <a:r>
+              <a:t>LangGraph (multi-step workflows)</a:t>
+            </a:r>
+          </a:p>
+        </p:txBody>
+      </p:sp>
+      <p:sp>
+        <p:nvSpPr>
+          <p:cNvPr id="31" name="Rectangle 30"/>
+          <p:cNvSpPr/>
+          <p:nvPr/>
+        </p:nvSpPr>
+        <p:spPr>
+          <a:xfrm>
+            <a:off x="731520" y="4846320"/>
+            <a:ext cx="9144000" cy="6350"/>
+          </a:xfrm>
+          <a:prstGeom prst="rect">
+            <a:avLst/>
+          </a:prstGeom>
+          <a:solidFill>
+            <a:srgbClr val="D2D2D2"/>
+          </a:solidFill>
+          <a:ln>
+            <a:noFill/>
+          </a:ln>
+        </p:spPr>
+        <p:style>
+          <a:lnRef idx="1">
+            <a:schemeClr val="accent1"/>
+          </a:lnRef>
+          <a:fillRef idx="3">
+            <a:schemeClr val="accent1"/>
+          </a:fillRef>
+          <a:effectRef idx="2">
+            <a:schemeClr val="accent1"/>
+          </a:effectRef>
+          <a:fontRef idx="minor">
+            <a:schemeClr val="lt1"/>
+          </a:fontRef>
+        </p:style>
+        <p:txBody>
+          <a:bodyPr rtlCol="0" anchor="ctr"/>
+          <a:lstStyle/>
+          <a:p>
+            <a:pPr algn="ctr"/>
+          </a:p>
+        </p:txBody>
+      </p:sp>
+      <p:sp>
+        <p:nvSpPr>
+          <p:cNvPr id="32" name="TextBox 31"/>
+          <p:cNvSpPr txBox="1"/>
+          <p:nvPr/>
+        </p:nvSpPr>
+        <p:spPr>
+          <a:xfrm>
+            <a:off x="731520" y="4892040"/>
+            <a:ext cx="3200400" cy="320040"/>
+          </a:xfrm>
+          <a:prstGeom prst="rect">
+            <a:avLst/>
+          </a:prstGeom>
+          <a:noFill/>
+        </p:spPr>
+        <p:txBody>
+          <a:bodyPr wrap="square">
+            <a:spAutoFit/>
+          </a:bodyPr>
+          <a:lstStyle/>
+          <a:p>
+            <a:pPr algn="l">
+              <a:defRPr sz="1000" b="1" a:spc="200">
+                <a:solidFill>
+                  <a:srgbClr val="787878"/>
+                </a:solidFill>
+                <a:latin typeface="Open Sauce Sans"/>
+              </a:defRPr>
+            </a:pPr>
+            <a:r>
+              <a:t>PDF PARSING</a:t>
+            </a:r>
+          </a:p>
+        </p:txBody>
+      </p:sp>
+      <p:sp>
+        <p:nvSpPr>
+          <p:cNvPr id="33" name="TextBox 32"/>
+          <p:cNvSpPr txBox="1"/>
+          <p:nvPr/>
+        </p:nvSpPr>
+        <p:spPr>
+          <a:xfrm>
+            <a:off x="4389120" y="4892040"/>
+            <a:ext cx="5486400" cy="320040"/>
+          </a:xfrm>
+          <a:prstGeom prst="rect">
+            <a:avLst/>
+          </a:prstGeom>
+          <a:noFill/>
+        </p:spPr>
+        <p:txBody>
+          <a:bodyPr wrap="square">
+            <a:spAutoFit/>
+          </a:bodyPr>
+          <a:lstStyle/>
+          <a:p>
+            <a:pPr algn="l">
+              <a:defRPr sz="1200" b="0">
+                <a:solidFill>
+                  <a:srgbClr val="141414"/>
+                </a:solidFill>
+                <a:latin typeface="Open Sauce Sans"/>
+              </a:defRPr>
+            </a:pPr>
+            <a:r>
+              <a:t>PyPDF2</a:t>
+            </a:r>
+          </a:p>
+        </p:txBody>
+      </p:sp>
+      <p:sp>
+        <p:nvSpPr>
+          <p:cNvPr id="34" name="Rectangle 33"/>
+          <p:cNvSpPr/>
+          <p:nvPr/>
+        </p:nvSpPr>
+        <p:spPr>
+          <a:xfrm>
+            <a:off x="731520" y="5212080"/>
+            <a:ext cx="9144000" cy="6350"/>
+          </a:xfrm>
+          <a:prstGeom prst="rect">
+            <a:avLst/>
+          </a:prstGeom>
+          <a:solidFill>
+            <a:srgbClr val="D2D2D2"/>
+          </a:solidFill>
+          <a:ln>
+            <a:noFill/>
+          </a:ln>
+        </p:spPr>
+        <p:style>
+          <a:lnRef idx="1">
+            <a:schemeClr val="accent1"/>
+          </a:lnRef>
+          <a:fillRef idx="3">
+            <a:schemeClr val="accent1"/>
+          </a:fillRef>
+          <a:effectRef idx="2">
+            <a:schemeClr val="accent1"/>
+          </a:effectRef>
+          <a:fontRef idx="minor">
+            <a:schemeClr val="lt1"/>
+          </a:fontRef>
+        </p:style>
+        <p:txBody>
+          <a:bodyPr rtlCol="0" anchor="ctr"/>
+          <a:lstStyle/>
+          <a:p>
+            <a:pPr algn="ctr"/>
+          </a:p>
+        </p:txBody>
+      </p:sp>
+      <p:sp>
+        <p:nvSpPr>
+          <p:cNvPr id="35" name="TextBox 34"/>
+          <p:cNvSpPr txBox="1"/>
+          <p:nvPr/>
+        </p:nvSpPr>
+        <p:spPr>
+          <a:xfrm>
+            <a:off x="731520" y="5257800"/>
+            <a:ext cx="3200400" cy="320040"/>
+          </a:xfrm>
+          <a:prstGeom prst="rect">
+            <a:avLst/>
+          </a:prstGeom>
+          <a:noFill/>
+        </p:spPr>
+        <p:txBody>
+          <a:bodyPr wrap="square">
+            <a:spAutoFit/>
+          </a:bodyPr>
+          <a:lstStyle/>
+          <a:p>
+            <a:pPr algn="l">
+              <a:defRPr sz="1000" b="1" a:spc="200">
+                <a:solidFill>
+                  <a:srgbClr val="787878"/>
+                </a:solidFill>
+                <a:latin typeface="Open Sauce Sans"/>
+              </a:defRPr>
+            </a:pPr>
+            <a:r>
+              <a:t>RESILIENCE</a:t>
+            </a:r>
+          </a:p>
+        </p:txBody>
+      </p:sp>
+      <p:sp>
+        <p:nvSpPr>
+          <p:cNvPr id="36" name="TextBox 35"/>
+          <p:cNvSpPr txBox="1"/>
+          <p:nvPr/>
+        </p:nvSpPr>
+        <p:spPr>
+          <a:xfrm>
+            <a:off x="4389120" y="5257800"/>
+            <a:ext cx="5486400" cy="320040"/>
+          </a:xfrm>
+          <a:prstGeom prst="rect">
+            <a:avLst/>
+          </a:prstGeom>
+          <a:noFill/>
+        </p:spPr>
+        <p:txBody>
+          <a:bodyPr wrap="square">
+            <a:spAutoFit/>
+          </a:bodyPr>
+          <a:lstStyle/>
+          <a:p>
+            <a:pPr algn="l">
+              <a:defRPr sz="1200" b="0">
+                <a:solidFill>
+                  <a:srgbClr val="141414"/>
+                </a:solidFill>
+                <a:latin typeface="Open Sauce Sans"/>
+              </a:defRPr>
+            </a:pPr>
+            <a:r>
+              <a:t>tenacity (auto-retry)</a:t>
+            </a:r>
+          </a:p>
+        </p:txBody>
+      </p:sp>
+      <p:sp>
+        <p:nvSpPr>
+          <p:cNvPr id="37" name="Rectangle 36"/>
+          <p:cNvSpPr/>
+          <p:nvPr/>
+        </p:nvSpPr>
+        <p:spPr>
+          <a:xfrm>
+            <a:off x="731520" y="5577840"/>
+            <a:ext cx="9144000" cy="6350"/>
+          </a:xfrm>
+          <a:prstGeom prst="rect">
+            <a:avLst/>
+          </a:prstGeom>
+          <a:solidFill>
+            <a:srgbClr val="D2D2D2"/>
+          </a:solidFill>
+          <a:ln>
+            <a:noFill/>
+          </a:ln>
+        </p:spPr>
+        <p:style>
+          <a:lnRef idx="1">
+            <a:schemeClr val="accent1"/>
+          </a:lnRef>
+          <a:fillRef idx="3">
+            <a:schemeClr val="accent1"/>
+          </a:fillRef>
+          <a:effectRef idx="2">
+            <a:schemeClr val="accent1"/>
+          </a:effectRef>
+          <a:fontRef idx="minor">
+            <a:schemeClr val="lt1"/>
+          </a:fontRef>
+        </p:style>
+        <p:txBody>
+          <a:bodyPr rtlCol="0" anchor="ctr"/>
+          <a:lstStyle/>
+          <a:p>
+            <a:pPr algn="ctr"/>
+          </a:p>
+        </p:txBody>
+      </p:sp>
+      <p:sp>
+        <p:nvSpPr>
+          <p:cNvPr id="38" name="TextBox 37"/>
+          <p:cNvSpPr txBox="1"/>
+          <p:nvPr/>
+        </p:nvSpPr>
+        <p:spPr>
+          <a:xfrm>
+            <a:off x="731520" y="5623560"/>
+            <a:ext cx="3200400" cy="320040"/>
+          </a:xfrm>
+          <a:prstGeom prst="rect">
+            <a:avLst/>
+          </a:prstGeom>
+          <a:noFill/>
+        </p:spPr>
+        <p:txBody>
+          <a:bodyPr wrap="square">
+            <a:spAutoFit/>
+          </a:bodyPr>
+          <a:lstStyle/>
+          <a:p>
+            <a:pPr algn="l">
+              <a:defRPr sz="1000" b="1" a:spc="200">
+                <a:solidFill>
+                  <a:srgbClr val="787878"/>
+                </a:solidFill>
+                <a:latin typeface="Open Sauce Sans"/>
+              </a:defRPr>
+            </a:pPr>
+            <a:r>
+              <a:t>CONTAINERIZATION</a:t>
+            </a:r>
+          </a:p>
+        </p:txBody>
+      </p:sp>
+      <p:sp>
+        <p:nvSpPr>
+          <p:cNvPr id="39" name="TextBox 38"/>
+          <p:cNvSpPr txBox="1"/>
+          <p:nvPr/>
+        </p:nvSpPr>
+        <p:spPr>
+          <a:xfrm>
+            <a:off x="4389120" y="5623560"/>
+            <a:ext cx="5486400" cy="320040"/>
+          </a:xfrm>
+          <a:prstGeom prst="rect">
+            <a:avLst/>
+          </a:prstGeom>
+          <a:noFill/>
+        </p:spPr>
+        <p:txBody>
+          <a:bodyPr wrap="square">
+            <a:spAutoFit/>
+          </a:bodyPr>
+          <a:lstStyle/>
+          <a:p>
+            <a:pPr algn="l">
+              <a:defRPr sz="1200" b="0">
+                <a:solidFill>
+                  <a:srgbClr val="141414"/>
+                </a:solidFill>
+                <a:latin typeface="Open Sauce Sans"/>
+              </a:defRPr>
+            </a:pPr>
+            <a:r>
+              <a:t>Docker + Docker Compose</a:t>
+            </a:r>
+          </a:p>
+        </p:txBody>
+      </p:sp>
+      <p:sp>
+        <p:nvSpPr>
+          <p:cNvPr id="40" name="Rectangle 39"/>
+          <p:cNvSpPr/>
+          <p:nvPr/>
+        </p:nvSpPr>
+        <p:spPr>
+          <a:xfrm>
+            <a:off x="731520" y="5943600"/>
+            <a:ext cx="9144000" cy="6350"/>
+          </a:xfrm>
+          <a:prstGeom prst="rect">
+            <a:avLst/>
+          </a:prstGeom>
+          <a:solidFill>
+            <a:srgbClr val="D2D2D2"/>
+          </a:solidFill>
+          <a:ln>
+            <a:noFill/>
+          </a:ln>
+        </p:spPr>
+        <p:style>
+          <a:lnRef idx="1">
+            <a:schemeClr val="accent1"/>
+          </a:lnRef>
+          <a:fillRef idx="3">
+            <a:schemeClr val="accent1"/>
+          </a:fillRef>
+          <a:effectRef idx="2">
+            <a:schemeClr val="accent1"/>
+          </a:effectRef>
+          <a:fontRef idx="minor">
+            <a:schemeClr val="lt1"/>
+          </a:fontRef>
+        </p:style>
+        <p:txBody>
+          <a:bodyPr rtlCol="0" anchor="ctr"/>
+          <a:lstStyle/>
+          <a:p>
+            <a:pPr algn="ctr"/>
+          </a:p>
+        </p:txBody>
+      </p:sp>
+      <p:sp>
+        <p:nvSpPr>
+          <p:cNvPr id="41" name="TextBox 40"/>
+          <p:cNvSpPr txBox="1"/>
+          <p:nvPr/>
+        </p:nvSpPr>
+        <p:spPr>
+          <a:xfrm>
+            <a:off x="731520" y="5989320"/>
+            <a:ext cx="3200400" cy="320040"/>
+          </a:xfrm>
+          <a:prstGeom prst="rect">
+            <a:avLst/>
+          </a:prstGeom>
+          <a:noFill/>
+        </p:spPr>
+        <p:txBody>
+          <a:bodyPr wrap="square">
+            <a:spAutoFit/>
+          </a:bodyPr>
+          <a:lstStyle/>
+          <a:p>
+            <a:pPr algn="l">
+              <a:defRPr sz="1000" b="1" a:spc="200">
+                <a:solidFill>
+                  <a:srgbClr val="787878"/>
+                </a:solidFill>
+                <a:latin typeface="Open Sauce Sans"/>
+              </a:defRPr>
+            </a:pPr>
+            <a:r>
+              <a:t>TESTING</a:t>
+            </a:r>
+          </a:p>
+        </p:txBody>
+      </p:sp>
+      <p:sp>
+        <p:nvSpPr>
+          <p:cNvPr id="42" name="TextBox 41"/>
+          <p:cNvSpPr txBox="1"/>
+          <p:nvPr/>
+        </p:nvSpPr>
+        <p:spPr>
+          <a:xfrm>
+            <a:off x="4389120" y="5989320"/>
+            <a:ext cx="5486400" cy="320040"/>
+          </a:xfrm>
+          <a:prstGeom prst="rect">
+            <a:avLst/>
+          </a:prstGeom>
+          <a:noFill/>
+        </p:spPr>
+        <p:txBody>
+          <a:bodyPr wrap="square">
+            <a:spAutoFit/>
+          </a:bodyPr>
+          <a:lstStyle/>
+          <a:p>
+            <a:pPr algn="l">
+              <a:defRPr sz="1200" b="0">
+                <a:solidFill>
+                  <a:srgbClr val="141414"/>
+                </a:solidFill>
+                <a:latin typeface="Open Sauce Sans"/>
+              </a:defRPr>
+            </a:pPr>
+            <a:r>
+              <a:t>pytest + unittest.mock (44 tests)</a:t>
+            </a:r>
+          </a:p>
+        </p:txBody>
+      </p:sp>
+      <p:sp>
+        <p:nvSpPr>
+          <p:cNvPr id="43" name="Rectangle 42"/>
+          <p:cNvSpPr/>
+          <p:nvPr/>
+        </p:nvSpPr>
+        <p:spPr>
+          <a:xfrm>
+            <a:off x="731520" y="6309360"/>
+            <a:ext cx="9144000" cy="6350"/>
           </a:xfrm>
           <a:prstGeom prst="rect">
             <a:avLst/>
@@ -4513,7 +5147,7 @@
               </a:defRPr>
             </a:pPr>
             <a:r>
-              <a:t>Conclusion</a:t>
+              <a:t>Testing</a:t>
             </a:r>
           </a:p>
         </p:txBody>
@@ -4527,7 +5161,7 @@
         <p:spPr>
           <a:xfrm>
             <a:off x="731520" y="1417320"/>
-            <a:ext cx="1371600" cy="9525"/>
+            <a:ext cx="914400" cy="9525"/>
           </a:xfrm>
           <a:prstGeom prst="rect">
             <a:avLst/>
@@ -4570,24 +5204,21 @@
         <p:spPr>
           <a:xfrm>
             <a:off x="731520" y="2011680"/>
-            <a:ext cx="6400800" cy="1371600"/>
-          </a:xfrm>
-          <a:prstGeom prst="rect">
-            <a:avLst/>
-          </a:prstGeom>
-          <a:noFill/>
-        </p:spPr>
-        <p:txBody>
-          <a:bodyPr wrap="square">
-            <a:spAutoFit/>
-          </a:bodyPr>
-          <a:lstStyle/>
-          <a:p>
-            <a:pPr>
-              <a:spcAft>
-                <a:spcPts val="2000"/>
-              </a:spcAft>
-              <a:defRPr sz="1500">
+            <a:ext cx="3657600" cy="914400"/>
+          </a:xfrm>
+          <a:prstGeom prst="rect">
+            <a:avLst/>
+          </a:prstGeom>
+          <a:noFill/>
+        </p:spPr>
+        <p:txBody>
+          <a:bodyPr wrap="square">
+            <a:spAutoFit/>
+          </a:bodyPr>
+          <a:lstStyle/>
+          <a:p>
+            <a:pPr algn="l">
+              <a:defRPr sz="8000" b="0">
                 <a:solidFill>
                   <a:srgbClr val="141414"/>
                 </a:solidFill>
@@ -4595,15 +5226,35 @@
               </a:defRPr>
             </a:pPr>
             <a:r>
-              <a:t>This internship gave me hands-on experience building a real AI application from scratch — not just calling an API, but architecting a complete product around it.</a:t>
-            </a:r>
-          </a:p>
-          <a:p>
-            <a:pPr>
-              <a:spcAft>
-                <a:spcPts val="2000"/>
-              </a:spcAft>
-              <a:defRPr sz="1500">
+              <a:t>44</a:t>
+            </a:r>
+          </a:p>
+        </p:txBody>
+      </p:sp>
+      <p:sp>
+        <p:nvSpPr>
+          <p:cNvPr id="8" name="TextBox 7"/>
+          <p:cNvSpPr txBox="1"/>
+          <p:nvPr/>
+        </p:nvSpPr>
+        <p:spPr>
+          <a:xfrm>
+            <a:off x="731520" y="3291840"/>
+            <a:ext cx="3657600" cy="365760"/>
+          </a:xfrm>
+          <a:prstGeom prst="rect">
+            <a:avLst/>
+          </a:prstGeom>
+          <a:noFill/>
+        </p:spPr>
+        <p:txBody>
+          <a:bodyPr wrap="square">
+            <a:spAutoFit/>
+          </a:bodyPr>
+          <a:lstStyle/>
+          <a:p>
+            <a:pPr algn="l">
+              <a:defRPr sz="1100" b="1" a:spc="300">
                 <a:solidFill>
                   <a:srgbClr val="141414"/>
                 </a:solidFill>
@@ -4611,21 +5262,21 @@
               </a:defRPr>
             </a:pPr>
             <a:r>
-              <a:t>StudyMate AI was developed into a fully working web application with four features, a polished UI, and comprehensive automated testing.</a:t>
-            </a:r>
-          </a:p>
-        </p:txBody>
-      </p:sp>
-      <p:sp>
-        <p:nvSpPr>
-          <p:cNvPr id="8" name="TextBox 7"/>
-          <p:cNvSpPr txBox="1"/>
-          <p:nvPr/>
-        </p:nvSpPr>
-        <p:spPr>
-          <a:xfrm>
-            <a:off x="731520" y="3840480"/>
-            <a:ext cx="4572000" cy="365760"/>
+              <a:t>AUTOMATED UNIT TESTS</a:t>
+            </a:r>
+          </a:p>
+        </p:txBody>
+      </p:sp>
+      <p:sp>
+        <p:nvSpPr>
+          <p:cNvPr id="9" name="TextBox 8"/>
+          <p:cNvSpPr txBox="1"/>
+          <p:nvPr/>
+        </p:nvSpPr>
+        <p:spPr>
+          <a:xfrm>
+            <a:off x="731520" y="3749039"/>
+            <a:ext cx="3657600" cy="365760"/>
           </a:xfrm>
           <a:prstGeom prst="rect">
             <a:avLst/>
@@ -4639,7 +5290,86 @@
           <a:lstStyle/>
           <a:p>
             <a:pPr algn="l">
-              <a:defRPr sz="1000" b="1" a:spc="300">
+              <a:defRPr sz="1000" b="0" a:spc="200">
+                <a:solidFill>
+                  <a:srgbClr val="787878"/>
+                </a:solidFill>
+                <a:latin typeface="Open Sauce Sans"/>
+              </a:defRPr>
+            </a:pPr>
+            <a:r>
+              <a:t>ALL PASSING  •  UNDER 1 SECOND</a:t>
+            </a:r>
+          </a:p>
+        </p:txBody>
+      </p:sp>
+      <p:sp>
+        <p:nvSpPr>
+          <p:cNvPr id="10" name="Rectangle 9"/>
+          <p:cNvSpPr/>
+          <p:nvPr/>
+        </p:nvSpPr>
+        <p:spPr>
+          <a:xfrm>
+            <a:off x="5486400" y="2103120"/>
+            <a:ext cx="5486400" cy="6350"/>
+          </a:xfrm>
+          <a:prstGeom prst="rect">
+            <a:avLst/>
+          </a:prstGeom>
+          <a:solidFill>
+            <a:srgbClr val="D2D2D2"/>
+          </a:solidFill>
+          <a:ln>
+            <a:noFill/>
+          </a:ln>
+        </p:spPr>
+        <p:style>
+          <a:lnRef idx="1">
+            <a:schemeClr val="accent1"/>
+          </a:lnRef>
+          <a:fillRef idx="3">
+            <a:schemeClr val="accent1"/>
+          </a:fillRef>
+          <a:effectRef idx="2">
+            <a:schemeClr val="accent1"/>
+          </a:effectRef>
+          <a:fontRef idx="minor">
+            <a:schemeClr val="lt1"/>
+          </a:fontRef>
+        </p:style>
+        <p:txBody>
+          <a:bodyPr rtlCol="0" anchor="ctr"/>
+          <a:lstStyle/>
+          <a:p>
+            <a:pPr algn="ctr"/>
+          </a:p>
+        </p:txBody>
+      </p:sp>
+      <p:sp>
+        <p:nvSpPr>
+          <p:cNvPr id="11" name="TextBox 10"/>
+          <p:cNvSpPr txBox="1"/>
+          <p:nvPr/>
+        </p:nvSpPr>
+        <p:spPr>
+          <a:xfrm>
+            <a:off x="5486400" y="2377440"/>
+            <a:ext cx="3200400" cy="365760"/>
+          </a:xfrm>
+          <a:prstGeom prst="rect">
+            <a:avLst/>
+          </a:prstGeom>
+          <a:noFill/>
+        </p:spPr>
+        <p:txBody>
+          <a:bodyPr wrap="square">
+            <a:spAutoFit/>
+          </a:bodyPr>
+          <a:lstStyle/>
+          <a:p>
+            <a:pPr algn="l">
+              <a:defRPr sz="1400" b="1">
                 <a:solidFill>
                   <a:srgbClr val="141414"/>
                 </a:solidFill>
@@ -4647,38 +5377,35 @@
               </a:defRPr>
             </a:pPr>
             <a:r>
-              <a:t>WHAT I DELIVERED BEYOND THE BASICS</a:t>
-            </a:r>
-          </a:p>
-        </p:txBody>
-      </p:sp>
-      <p:sp>
-        <p:nvSpPr>
-          <p:cNvPr id="9" name="TextBox 8"/>
-          <p:cNvSpPr txBox="1"/>
-          <p:nvPr/>
-        </p:nvSpPr>
-        <p:spPr>
-          <a:xfrm>
-            <a:off x="731520" y="4297680"/>
-            <a:ext cx="7315200" cy="2286000"/>
-          </a:xfrm>
-          <a:prstGeom prst="rect">
-            <a:avLst/>
-          </a:prstGeom>
-          <a:noFill/>
-        </p:spPr>
-        <p:txBody>
-          <a:bodyPr wrap="square">
-            <a:spAutoFit/>
-          </a:bodyPr>
-          <a:lstStyle/>
-          <a:p>
-            <a:pPr>
-              <a:spcAft>
-                <a:spcPts val="800"/>
-              </a:spcAft>
-              <a:defRPr sz="1300">
+              <a:t>test_validation.py</a:t>
+            </a:r>
+          </a:p>
+        </p:txBody>
+      </p:sp>
+      <p:sp>
+        <p:nvSpPr>
+          <p:cNvPr id="12" name="TextBox 11"/>
+          <p:cNvSpPr txBox="1"/>
+          <p:nvPr/>
+        </p:nvSpPr>
+        <p:spPr>
+          <a:xfrm>
+            <a:off x="9144000" y="2377440"/>
+            <a:ext cx="2286000" cy="365760"/>
+          </a:xfrm>
+          <a:prstGeom prst="rect">
+            <a:avLst/>
+          </a:prstGeom>
+          <a:noFill/>
+        </p:spPr>
+        <p:txBody>
+          <a:bodyPr wrap="square">
+            <a:spAutoFit/>
+          </a:bodyPr>
+          <a:lstStyle/>
+          <a:p>
+            <a:pPr algn="r">
+              <a:defRPr sz="1300" b="0">
                 <a:solidFill>
                   <a:srgbClr val="787878"/>
                 </a:solidFill>
@@ -4686,15 +5413,35 @@
               </a:defRPr>
             </a:pPr>
             <a:r>
-              <a:t>—   4 AI features (requirement was at least 1)</a:t>
-            </a:r>
-          </a:p>
-          <a:p>
-            <a:pPr>
-              <a:spcAft>
-                <a:spcPts val="800"/>
-              </a:spcAft>
-              <a:defRPr sz="1300">
+              <a:t>14 tests</a:t>
+            </a:r>
+          </a:p>
+        </p:txBody>
+      </p:sp>
+      <p:sp>
+        <p:nvSpPr>
+          <p:cNvPr id="13" name="TextBox 12"/>
+          <p:cNvSpPr txBox="1"/>
+          <p:nvPr/>
+        </p:nvSpPr>
+        <p:spPr>
+          <a:xfrm>
+            <a:off x="5486400" y="2788920"/>
+            <a:ext cx="5486400" cy="457200"/>
+          </a:xfrm>
+          <a:prstGeom prst="rect">
+            <a:avLst/>
+          </a:prstGeom>
+          <a:noFill/>
+        </p:spPr>
+        <p:txBody>
+          <a:bodyPr wrap="square">
+            <a:spAutoFit/>
+          </a:bodyPr>
+          <a:lstStyle/>
+          <a:p>
+            <a:pPr algn="l">
+              <a:defRPr sz="1200" b="0">
                 <a:solidFill>
                   <a:srgbClr val="787878"/>
                 </a:solidFill>
@@ -4702,15 +5449,114 @@
               </a:defRPr>
             </a:pPr>
             <a:r>
-              <a:t>—   44 automated tests using pytest</a:t>
-            </a:r>
-          </a:p>
-          <a:p>
-            <a:pPr>
-              <a:spcAft>
-                <a:spcPts val="800"/>
-              </a:spcAft>
-              <a:defRPr sz="1300">
+              <a:t>Empty inputs, whitespace, length boundaries, return types</a:t>
+            </a:r>
+          </a:p>
+        </p:txBody>
+      </p:sp>
+      <p:sp>
+        <p:nvSpPr>
+          <p:cNvPr id="14" name="Rectangle 13"/>
+          <p:cNvSpPr/>
+          <p:nvPr/>
+        </p:nvSpPr>
+        <p:spPr>
+          <a:xfrm>
+            <a:off x="5486400" y="3337560"/>
+            <a:ext cx="5486400" cy="6350"/>
+          </a:xfrm>
+          <a:prstGeom prst="rect">
+            <a:avLst/>
+          </a:prstGeom>
+          <a:solidFill>
+            <a:srgbClr val="D2D2D2"/>
+          </a:solidFill>
+          <a:ln>
+            <a:noFill/>
+          </a:ln>
+        </p:spPr>
+        <p:style>
+          <a:lnRef idx="1">
+            <a:schemeClr val="accent1"/>
+          </a:lnRef>
+          <a:fillRef idx="3">
+            <a:schemeClr val="accent1"/>
+          </a:fillRef>
+          <a:effectRef idx="2">
+            <a:schemeClr val="accent1"/>
+          </a:effectRef>
+          <a:fontRef idx="minor">
+            <a:schemeClr val="lt1"/>
+          </a:fontRef>
+        </p:style>
+        <p:txBody>
+          <a:bodyPr rtlCol="0" anchor="ctr"/>
+          <a:lstStyle/>
+          <a:p>
+            <a:pPr algn="ctr"/>
+          </a:p>
+        </p:txBody>
+      </p:sp>
+      <p:sp>
+        <p:nvSpPr>
+          <p:cNvPr id="15" name="TextBox 14"/>
+          <p:cNvSpPr txBox="1"/>
+          <p:nvPr/>
+        </p:nvSpPr>
+        <p:spPr>
+          <a:xfrm>
+            <a:off x="5486400" y="3566160"/>
+            <a:ext cx="3200400" cy="365760"/>
+          </a:xfrm>
+          <a:prstGeom prst="rect">
+            <a:avLst/>
+          </a:prstGeom>
+          <a:noFill/>
+        </p:spPr>
+        <p:txBody>
+          <a:bodyPr wrap="square">
+            <a:spAutoFit/>
+          </a:bodyPr>
+          <a:lstStyle/>
+          <a:p>
+            <a:pPr algn="l">
+              <a:defRPr sz="1400" b="1">
+                <a:solidFill>
+                  <a:srgbClr val="141414"/>
+                </a:solidFill>
+                <a:latin typeface="Open Sauce Sans"/>
+              </a:defRPr>
+            </a:pPr>
+            <a:r>
+              <a:t>test_prompts.py</a:t>
+            </a:r>
+          </a:p>
+        </p:txBody>
+      </p:sp>
+      <p:sp>
+        <p:nvSpPr>
+          <p:cNvPr id="16" name="TextBox 15"/>
+          <p:cNvSpPr txBox="1"/>
+          <p:nvPr/>
+        </p:nvSpPr>
+        <p:spPr>
+          <a:xfrm>
+            <a:off x="9144000" y="3566160"/>
+            <a:ext cx="2286000" cy="365760"/>
+          </a:xfrm>
+          <a:prstGeom prst="rect">
+            <a:avLst/>
+          </a:prstGeom>
+          <a:noFill/>
+        </p:spPr>
+        <p:txBody>
+          <a:bodyPr wrap="square">
+            <a:spAutoFit/>
+          </a:bodyPr>
+          <a:lstStyle/>
+          <a:p>
+            <a:pPr algn="r">
+              <a:defRPr sz="1300" b="0">
                 <a:solidFill>
                   <a:srgbClr val="787878"/>
                 </a:solidFill>
@@ -4718,15 +5564,35 @@
               </a:defRPr>
             </a:pPr>
             <a:r>
-              <a:t>—   Automatic API retry with tenacity</a:t>
-            </a:r>
-          </a:p>
-          <a:p>
-            <a:pPr>
-              <a:spcAft>
-                <a:spcPts val="800"/>
-              </a:spcAft>
-              <a:defRPr sz="1300">
+              <a:t>23 tests</a:t>
+            </a:r>
+          </a:p>
+        </p:txBody>
+      </p:sp>
+      <p:sp>
+        <p:nvSpPr>
+          <p:cNvPr id="17" name="TextBox 16"/>
+          <p:cNvSpPr txBox="1"/>
+          <p:nvPr/>
+        </p:nvSpPr>
+        <p:spPr>
+          <a:xfrm>
+            <a:off x="5486400" y="3977640"/>
+            <a:ext cx="5486400" cy="457200"/>
+          </a:xfrm>
+          <a:prstGeom prst="rect">
+            <a:avLst/>
+          </a:prstGeom>
+          <a:noFill/>
+        </p:spPr>
+        <p:txBody>
+          <a:bodyPr wrap="square">
+            <a:spAutoFit/>
+          </a:bodyPr>
+          <a:lstStyle/>
+          <a:p>
+            <a:pPr algn="l">
+              <a:defRPr sz="1200" b="0">
                 <a:solidFill>
                   <a:srgbClr val="787878"/>
                 </a:solidFill>
@@ -4734,15 +5600,114 @@
               </a:defRPr>
             </a:pPr>
             <a:r>
-              <a:t>—   Session state so results persist across tabs</a:t>
-            </a:r>
-          </a:p>
-          <a:p>
-            <a:pPr>
-              <a:spcAft>
-                <a:spcPts val="800"/>
-              </a:spcAft>
-              <a:defRPr sz="1300">
+              <a:t>All 4 prompt templates — content, format, instructions</a:t>
+            </a:r>
+          </a:p>
+        </p:txBody>
+      </p:sp>
+      <p:sp>
+        <p:nvSpPr>
+          <p:cNvPr id="18" name="Rectangle 17"/>
+          <p:cNvSpPr/>
+          <p:nvPr/>
+        </p:nvSpPr>
+        <p:spPr>
+          <a:xfrm>
+            <a:off x="5486400" y="4526280"/>
+            <a:ext cx="5486400" cy="6350"/>
+          </a:xfrm>
+          <a:prstGeom prst="rect">
+            <a:avLst/>
+          </a:prstGeom>
+          <a:solidFill>
+            <a:srgbClr val="D2D2D2"/>
+          </a:solidFill>
+          <a:ln>
+            <a:noFill/>
+          </a:ln>
+        </p:spPr>
+        <p:style>
+          <a:lnRef idx="1">
+            <a:schemeClr val="accent1"/>
+          </a:lnRef>
+          <a:fillRef idx="3">
+            <a:schemeClr val="accent1"/>
+          </a:fillRef>
+          <a:effectRef idx="2">
+            <a:schemeClr val="accent1"/>
+          </a:effectRef>
+          <a:fontRef idx="minor">
+            <a:schemeClr val="lt1"/>
+          </a:fontRef>
+        </p:style>
+        <p:txBody>
+          <a:bodyPr rtlCol="0" anchor="ctr"/>
+          <a:lstStyle/>
+          <a:p>
+            <a:pPr algn="ctr"/>
+          </a:p>
+        </p:txBody>
+      </p:sp>
+      <p:sp>
+        <p:nvSpPr>
+          <p:cNvPr id="19" name="TextBox 18"/>
+          <p:cNvSpPr txBox="1"/>
+          <p:nvPr/>
+        </p:nvSpPr>
+        <p:spPr>
+          <a:xfrm>
+            <a:off x="5486400" y="4754880"/>
+            <a:ext cx="3200400" cy="365760"/>
+          </a:xfrm>
+          <a:prstGeom prst="rect">
+            <a:avLst/>
+          </a:prstGeom>
+          <a:noFill/>
+        </p:spPr>
+        <p:txBody>
+          <a:bodyPr wrap="square">
+            <a:spAutoFit/>
+          </a:bodyPr>
+          <a:lstStyle/>
+          <a:p>
+            <a:pPr algn="l">
+              <a:defRPr sz="1400" b="1">
+                <a:solidFill>
+                  <a:srgbClr val="141414"/>
+                </a:solidFill>
+                <a:latin typeface="Open Sauce Sans"/>
+              </a:defRPr>
+            </a:pPr>
+            <a:r>
+              <a:t>test_llm.py</a:t>
+            </a:r>
+          </a:p>
+        </p:txBody>
+      </p:sp>
+      <p:sp>
+        <p:nvSpPr>
+          <p:cNvPr id="20" name="TextBox 19"/>
+          <p:cNvSpPr txBox="1"/>
+          <p:nvPr/>
+        </p:nvSpPr>
+        <p:spPr>
+          <a:xfrm>
+            <a:off x="9144000" y="4754880"/>
+            <a:ext cx="2286000" cy="365760"/>
+          </a:xfrm>
+          <a:prstGeom prst="rect">
+            <a:avLst/>
+          </a:prstGeom>
+          <a:noFill/>
+        </p:spPr>
+        <p:txBody>
+          <a:bodyPr wrap="square">
+            <a:spAutoFit/>
+          </a:bodyPr>
+          <a:lstStyle/>
+          <a:p>
+            <a:pPr algn="r">
+              <a:defRPr sz="1300" b="0">
                 <a:solidFill>
                   <a:srgbClr val="787878"/>
                 </a:solidFill>
@@ -4750,15 +5715,35 @@
               </a:defRPr>
             </a:pPr>
             <a:r>
-              <a:t>—   Copy-to-clipboard and download buttons</a:t>
-            </a:r>
-          </a:p>
-          <a:p>
-            <a:pPr>
-              <a:spcAft>
-                <a:spcPts val="800"/>
-              </a:spcAft>
-              <a:defRPr sz="1300">
+              <a:t>7 tests</a:t>
+            </a:r>
+          </a:p>
+        </p:txBody>
+      </p:sp>
+      <p:sp>
+        <p:nvSpPr>
+          <p:cNvPr id="21" name="TextBox 20"/>
+          <p:cNvSpPr txBox="1"/>
+          <p:nvPr/>
+        </p:nvSpPr>
+        <p:spPr>
+          <a:xfrm>
+            <a:off x="5486400" y="5166360"/>
+            <a:ext cx="5486400" cy="457200"/>
+          </a:xfrm>
+          <a:prstGeom prst="rect">
+            <a:avLst/>
+          </a:prstGeom>
+          <a:noFill/>
+        </p:spPr>
+        <p:txBody>
+          <a:bodyPr wrap="square">
+            <a:spAutoFit/>
+          </a:bodyPr>
+          <a:lstStyle/>
+          <a:p>
+            <a:pPr algn="l">
+              <a:defRPr sz="1200" b="0">
                 <a:solidFill>
                   <a:srgbClr val="787878"/>
                 </a:solidFill>
@@ -4766,7 +5751,94 @@
               </a:defRPr>
             </a:pPr>
             <a:r>
-              <a:t>—   Custom dark-mode UI with CSS animations</a:t>
+              <a:t>API key validation, mocked Gemini calls, error handling</a:t>
+            </a:r>
+          </a:p>
+        </p:txBody>
+      </p:sp>
+      <p:sp>
+        <p:nvSpPr>
+          <p:cNvPr id="22" name="Rectangle 21"/>
+          <p:cNvSpPr/>
+          <p:nvPr/>
+        </p:nvSpPr>
+        <p:spPr>
+          <a:xfrm>
+            <a:off x="5486400" y="5715000"/>
+            <a:ext cx="5486400" cy="6350"/>
+          </a:xfrm>
+          <a:prstGeom prst="rect">
+            <a:avLst/>
+          </a:prstGeom>
+          <a:solidFill>
+            <a:srgbClr val="D2D2D2"/>
+          </a:solidFill>
+          <a:ln>
+            <a:noFill/>
+          </a:ln>
+        </p:spPr>
+        <p:style>
+          <a:lnRef idx="1">
+            <a:schemeClr val="accent1"/>
+          </a:lnRef>
+          <a:fillRef idx="3">
+            <a:schemeClr val="accent1"/>
+          </a:fillRef>
+          <a:effectRef idx="2">
+            <a:schemeClr val="accent1"/>
+          </a:effectRef>
+          <a:fontRef idx="minor">
+            <a:schemeClr val="lt1"/>
+          </a:fontRef>
+        </p:style>
+        <p:txBody>
+          <a:bodyPr rtlCol="0" anchor="ctr"/>
+          <a:lstStyle/>
+          <a:p>
+            <a:pPr algn="ctr"/>
+          </a:p>
+        </p:txBody>
+      </p:sp>
+      <p:sp>
+        <p:nvSpPr>
+          <p:cNvPr id="23" name="TextBox 22"/>
+          <p:cNvSpPr txBox="1"/>
+          <p:nvPr/>
+        </p:nvSpPr>
+        <p:spPr>
+          <a:xfrm>
+            <a:off x="731520" y="4572000"/>
+            <a:ext cx="4114800" cy="1097280"/>
+          </a:xfrm>
+          <a:prstGeom prst="rect">
+            <a:avLst/>
+          </a:prstGeom>
+          <a:noFill/>
+        </p:spPr>
+        <p:txBody>
+          <a:bodyPr wrap="square">
+            <a:spAutoFit/>
+          </a:bodyPr>
+          <a:lstStyle/>
+          <a:p>
+            <a:pPr algn="l">
+              <a:defRPr sz="1300" b="0">
+                <a:solidFill>
+                  <a:srgbClr val="787878"/>
+                </a:solidFill>
+                <a:latin typeface="Open Sauce Sans"/>
+              </a:defRPr>
+            </a:pPr>
+            <a:r>
+              <a:t>All tests use unittest.mock to simulate</a:t>
+            </a:r>
+            <a:br/>
+            <a:r>
+              <a:t>the Gemini API. No real API calls.</a:t>
+            </a:r>
+            <a:br/>
+            <a:r>
+              <a:t>No cost. Instant feedback.</a:t>
             </a:r>
           </a:p>
         </p:txBody>
@@ -4799,28 +5871,143 @@
       <p:grpSpPr/>
       <p:sp>
         <p:nvSpPr>
-          <p:cNvPr id="2" name="TextBox 1"/>
-          <p:cNvSpPr txBox="1"/>
-          <p:nvPr/>
-        </p:nvSpPr>
-        <p:spPr>
-          <a:xfrm>
-            <a:off x="0" y="2011680"/>
-            <a:ext cx="12191695" cy="914400"/>
-          </a:xfrm>
-          <a:prstGeom prst="rect">
-            <a:avLst/>
-          </a:prstGeom>
-          <a:noFill/>
-        </p:spPr>
-        <p:txBody>
-          <a:bodyPr wrap="square">
-            <a:spAutoFit/>
-          </a:bodyPr>
-          <a:lstStyle/>
-          <a:p>
-            <a:pPr algn="ctr">
-              <a:defRPr sz="6000" b="0">
+          <p:cNvPr id="2" name="Rectangle 1"/>
+          <p:cNvSpPr/>
+          <p:nvPr/>
+        </p:nvSpPr>
+        <p:spPr>
+          <a:xfrm>
+            <a:off x="731520" y="6263640"/>
+            <a:ext cx="10728655" cy="6350"/>
+          </a:xfrm>
+          <a:prstGeom prst="rect">
+            <a:avLst/>
+          </a:prstGeom>
+          <a:solidFill>
+            <a:srgbClr val="D2D2D2"/>
+          </a:solidFill>
+          <a:ln>
+            <a:noFill/>
+          </a:ln>
+        </p:spPr>
+        <p:style>
+          <a:lnRef idx="1">
+            <a:schemeClr val="accent1"/>
+          </a:lnRef>
+          <a:fillRef idx="3">
+            <a:schemeClr val="accent1"/>
+          </a:fillRef>
+          <a:effectRef idx="2">
+            <a:schemeClr val="accent1"/>
+          </a:effectRef>
+          <a:fontRef idx="minor">
+            <a:schemeClr val="lt1"/>
+          </a:fontRef>
+        </p:style>
+        <p:txBody>
+          <a:bodyPr rtlCol="0" anchor="ctr"/>
+          <a:lstStyle/>
+          <a:p>
+            <a:pPr algn="ctr"/>
+          </a:p>
+        </p:txBody>
+      </p:sp>
+      <p:sp>
+        <p:nvSpPr>
+          <p:cNvPr id="3" name="TextBox 2"/>
+          <p:cNvSpPr txBox="1"/>
+          <p:nvPr/>
+        </p:nvSpPr>
+        <p:spPr>
+          <a:xfrm>
+            <a:off x="731520" y="6355080"/>
+            <a:ext cx="2743200" cy="274320"/>
+          </a:xfrm>
+          <a:prstGeom prst="rect">
+            <a:avLst/>
+          </a:prstGeom>
+          <a:noFill/>
+        </p:spPr>
+        <p:txBody>
+          <a:bodyPr wrap="square">
+            <a:spAutoFit/>
+          </a:bodyPr>
+          <a:lstStyle/>
+          <a:p>
+            <a:pPr algn="l">
+              <a:defRPr sz="800" b="1" a:spc="300">
+                <a:solidFill>
+                  <a:srgbClr val="787878"/>
+                </a:solidFill>
+                <a:latin typeface="Open Sauce Sans"/>
+              </a:defRPr>
+            </a:pPr>
+            <a:r>
+              <a:t>STUDYMATE AI</a:t>
+            </a:r>
+          </a:p>
+        </p:txBody>
+      </p:sp>
+      <p:sp>
+        <p:nvSpPr>
+          <p:cNvPr id="4" name="TextBox 3"/>
+          <p:cNvSpPr txBox="1"/>
+          <p:nvPr/>
+        </p:nvSpPr>
+        <p:spPr>
+          <a:xfrm>
+            <a:off x="10789920" y="6355080"/>
+            <a:ext cx="731520" cy="274320"/>
+          </a:xfrm>
+          <a:prstGeom prst="rect">
+            <a:avLst/>
+          </a:prstGeom>
+          <a:noFill/>
+        </p:spPr>
+        <p:txBody>
+          <a:bodyPr wrap="square">
+            <a:spAutoFit/>
+          </a:bodyPr>
+          <a:lstStyle/>
+          <a:p>
+            <a:pPr algn="r">
+              <a:defRPr sz="800" b="0">
+                <a:solidFill>
+                  <a:srgbClr val="787878"/>
+                </a:solidFill>
+                <a:latin typeface="Open Sauce Sans"/>
+              </a:defRPr>
+            </a:pPr>
+            <a:r>
+              <a:t>12</a:t>
+            </a:r>
+          </a:p>
+        </p:txBody>
+      </p:sp>
+      <p:sp>
+        <p:nvSpPr>
+          <p:cNvPr id="5" name="TextBox 4"/>
+          <p:cNvSpPr txBox="1"/>
+          <p:nvPr/>
+        </p:nvSpPr>
+        <p:spPr>
+          <a:xfrm>
+            <a:off x="731520" y="731520"/>
+            <a:ext cx="9144000" cy="731520"/>
+          </a:xfrm>
+          <a:prstGeom prst="rect">
+            <a:avLst/>
+          </a:prstGeom>
+          <a:noFill/>
+        </p:spPr>
+        <p:txBody>
+          <a:bodyPr wrap="square">
+            <a:spAutoFit/>
+          </a:bodyPr>
+          <a:lstStyle/>
+          <a:p>
+            <a:pPr algn="l">
+              <a:defRPr sz="4000" b="0">
                 <a:solidFill>
                   <a:srgbClr val="141414"/>
                 </a:solidFill>
@@ -4828,21 +6015,21 @@
               </a:defRPr>
             </a:pPr>
             <a:r>
-              <a:t>Thank you</a:t>
-            </a:r>
-          </a:p>
-        </p:txBody>
-      </p:sp>
-      <p:sp>
-        <p:nvSpPr>
-          <p:cNvPr id="3" name="Rectangle 2"/>
+              <a:t>Challenges</a:t>
+            </a:r>
+          </a:p>
+        </p:txBody>
+      </p:sp>
+      <p:sp>
+        <p:nvSpPr>
+          <p:cNvPr id="6" name="Rectangle 5"/>
           <p:cNvSpPr/>
           <p:nvPr/>
         </p:nvSpPr>
         <p:spPr>
           <a:xfrm>
-            <a:off x="5303520" y="3200400"/>
-            <a:ext cx="1584655" cy="9525"/>
+            <a:off x="731520" y="1417320"/>
+            <a:ext cx="1371600" cy="9525"/>
           </a:xfrm>
           <a:prstGeom prst="rect">
             <a:avLst/>
@@ -4878,6 +6065,1535 @@
       </p:sp>
       <p:sp>
         <p:nvSpPr>
+          <p:cNvPr id="7" name="Rectangle 6"/>
+          <p:cNvSpPr/>
+          <p:nvPr/>
+        </p:nvSpPr>
+        <p:spPr>
+          <a:xfrm>
+            <a:off x="731520" y="1920240"/>
+            <a:ext cx="10515600" cy="6350"/>
+          </a:xfrm>
+          <a:prstGeom prst="rect">
+            <a:avLst/>
+          </a:prstGeom>
+          <a:solidFill>
+            <a:srgbClr val="D2D2D2"/>
+          </a:solidFill>
+          <a:ln>
+            <a:noFill/>
+          </a:ln>
+        </p:spPr>
+        <p:style>
+          <a:lnRef idx="1">
+            <a:schemeClr val="accent1"/>
+          </a:lnRef>
+          <a:fillRef idx="3">
+            <a:schemeClr val="accent1"/>
+          </a:fillRef>
+          <a:effectRef idx="2">
+            <a:schemeClr val="accent1"/>
+          </a:effectRef>
+          <a:fontRef idx="minor">
+            <a:schemeClr val="lt1"/>
+          </a:fontRef>
+        </p:style>
+        <p:txBody>
+          <a:bodyPr rtlCol="0" anchor="ctr"/>
+          <a:lstStyle/>
+          <a:p>
+            <a:pPr algn="ctr"/>
+          </a:p>
+        </p:txBody>
+      </p:sp>
+      <p:sp>
+        <p:nvSpPr>
+          <p:cNvPr id="8" name="TextBox 7"/>
+          <p:cNvSpPr txBox="1"/>
+          <p:nvPr/>
+        </p:nvSpPr>
+        <p:spPr>
+          <a:xfrm>
+            <a:off x="731520" y="2029968"/>
+            <a:ext cx="457200" cy="365760"/>
+          </a:xfrm>
+          <a:prstGeom prst="rect">
+            <a:avLst/>
+          </a:prstGeom>
+          <a:noFill/>
+        </p:spPr>
+        <p:txBody>
+          <a:bodyPr wrap="square">
+            <a:spAutoFit/>
+          </a:bodyPr>
+          <a:lstStyle/>
+          <a:p>
+            <a:pPr algn="l">
+              <a:defRPr sz="1200" b="0">
+                <a:solidFill>
+                  <a:srgbClr val="787878"/>
+                </a:solidFill>
+                <a:latin typeface="Open Sauce Sans"/>
+              </a:defRPr>
+            </a:pPr>
+            <a:r>
+              <a:t>01</a:t>
+            </a:r>
+          </a:p>
+        </p:txBody>
+      </p:sp>
+      <p:sp>
+        <p:nvSpPr>
+          <p:cNvPr id="9" name="TextBox 8"/>
+          <p:cNvSpPr txBox="1"/>
+          <p:nvPr/>
+        </p:nvSpPr>
+        <p:spPr>
+          <a:xfrm>
+            <a:off x="1371600" y="2029968"/>
+            <a:ext cx="2286000" cy="365760"/>
+          </a:xfrm>
+          <a:prstGeom prst="rect">
+            <a:avLst/>
+          </a:prstGeom>
+          <a:noFill/>
+        </p:spPr>
+        <p:txBody>
+          <a:bodyPr wrap="square">
+            <a:spAutoFit/>
+          </a:bodyPr>
+          <a:lstStyle/>
+          <a:p>
+            <a:pPr algn="l">
+              <a:defRPr sz="1100" b="1" a:spc="200">
+                <a:solidFill>
+                  <a:srgbClr val="141414"/>
+                </a:solidFill>
+                <a:latin typeface="Open Sauce Sans"/>
+              </a:defRPr>
+            </a:pPr>
+            <a:r>
+              <a:t>API FAILURES</a:t>
+            </a:r>
+          </a:p>
+        </p:txBody>
+      </p:sp>
+      <p:sp>
+        <p:nvSpPr>
+          <p:cNvPr id="10" name="TextBox 9"/>
+          <p:cNvSpPr txBox="1"/>
+          <p:nvPr/>
+        </p:nvSpPr>
+        <p:spPr>
+          <a:xfrm>
+            <a:off x="3840480" y="2029968"/>
+            <a:ext cx="3200400" cy="365760"/>
+          </a:xfrm>
+          <a:prstGeom prst="rect">
+            <a:avLst/>
+          </a:prstGeom>
+          <a:noFill/>
+        </p:spPr>
+        <p:txBody>
+          <a:bodyPr wrap="square">
+            <a:spAutoFit/>
+          </a:bodyPr>
+          <a:lstStyle/>
+          <a:p>
+            <a:pPr algn="l">
+              <a:defRPr sz="1200" b="0">
+                <a:solidFill>
+                  <a:srgbClr val="787878"/>
+                </a:solidFill>
+                <a:latin typeface="Open Sauce Sans"/>
+              </a:defRPr>
+            </a:pPr>
+            <a:r>
+              <a:t>Google's servers returned transient errors.</a:t>
+            </a:r>
+          </a:p>
+        </p:txBody>
+      </p:sp>
+      <p:sp>
+        <p:nvSpPr>
+          <p:cNvPr id="11" name="TextBox 10"/>
+          <p:cNvSpPr txBox="1"/>
+          <p:nvPr/>
+        </p:nvSpPr>
+        <p:spPr>
+          <a:xfrm>
+            <a:off x="7315200" y="2029968"/>
+            <a:ext cx="4114800" cy="365760"/>
+          </a:xfrm>
+          <a:prstGeom prst="rect">
+            <a:avLst/>
+          </a:prstGeom>
+          <a:noFill/>
+        </p:spPr>
+        <p:txBody>
+          <a:bodyPr wrap="square">
+            <a:spAutoFit/>
+          </a:bodyPr>
+          <a:lstStyle/>
+          <a:p>
+            <a:pPr algn="l">
+              <a:defRPr sz="1200" b="0">
+                <a:solidFill>
+                  <a:srgbClr val="141414"/>
+                </a:solidFill>
+                <a:latin typeface="Open Sauce Sans"/>
+              </a:defRPr>
+            </a:pPr>
+            <a:r>
+              <a:t>Added tenacity for automatic retry.</a:t>
+            </a:r>
+          </a:p>
+        </p:txBody>
+      </p:sp>
+      <p:sp>
+        <p:nvSpPr>
+          <p:cNvPr id="12" name="Rectangle 11"/>
+          <p:cNvSpPr/>
+          <p:nvPr/>
+        </p:nvSpPr>
+        <p:spPr>
+          <a:xfrm>
+            <a:off x="731520" y="2761488"/>
+            <a:ext cx="10515600" cy="6350"/>
+          </a:xfrm>
+          <a:prstGeom prst="rect">
+            <a:avLst/>
+          </a:prstGeom>
+          <a:solidFill>
+            <a:srgbClr val="D2D2D2"/>
+          </a:solidFill>
+          <a:ln>
+            <a:noFill/>
+          </a:ln>
+        </p:spPr>
+        <p:style>
+          <a:lnRef idx="1">
+            <a:schemeClr val="accent1"/>
+          </a:lnRef>
+          <a:fillRef idx="3">
+            <a:schemeClr val="accent1"/>
+          </a:fillRef>
+          <a:effectRef idx="2">
+            <a:schemeClr val="accent1"/>
+          </a:effectRef>
+          <a:fontRef idx="minor">
+            <a:schemeClr val="lt1"/>
+          </a:fontRef>
+        </p:style>
+        <p:txBody>
+          <a:bodyPr rtlCol="0" anchor="ctr"/>
+          <a:lstStyle/>
+          <a:p>
+            <a:pPr algn="ctr"/>
+          </a:p>
+        </p:txBody>
+      </p:sp>
+      <p:sp>
+        <p:nvSpPr>
+          <p:cNvPr id="13" name="TextBox 12"/>
+          <p:cNvSpPr txBox="1"/>
+          <p:nvPr/>
+        </p:nvSpPr>
+        <p:spPr>
+          <a:xfrm>
+            <a:off x="731520" y="2871216"/>
+            <a:ext cx="457200" cy="365760"/>
+          </a:xfrm>
+          <a:prstGeom prst="rect">
+            <a:avLst/>
+          </a:prstGeom>
+          <a:noFill/>
+        </p:spPr>
+        <p:txBody>
+          <a:bodyPr wrap="square">
+            <a:spAutoFit/>
+          </a:bodyPr>
+          <a:lstStyle/>
+          <a:p>
+            <a:pPr algn="l">
+              <a:defRPr sz="1200" b="0">
+                <a:solidFill>
+                  <a:srgbClr val="787878"/>
+                </a:solidFill>
+                <a:latin typeface="Open Sauce Sans"/>
+              </a:defRPr>
+            </a:pPr>
+            <a:r>
+              <a:t>02</a:t>
+            </a:r>
+          </a:p>
+        </p:txBody>
+      </p:sp>
+      <p:sp>
+        <p:nvSpPr>
+          <p:cNvPr id="14" name="TextBox 13"/>
+          <p:cNvSpPr txBox="1"/>
+          <p:nvPr/>
+        </p:nvSpPr>
+        <p:spPr>
+          <a:xfrm>
+            <a:off x="1371600" y="2871216"/>
+            <a:ext cx="2286000" cy="365760"/>
+          </a:xfrm>
+          <a:prstGeom prst="rect">
+            <a:avLst/>
+          </a:prstGeom>
+          <a:noFill/>
+        </p:spPr>
+        <p:txBody>
+          <a:bodyPr wrap="square">
+            <a:spAutoFit/>
+          </a:bodyPr>
+          <a:lstStyle/>
+          <a:p>
+            <a:pPr algn="l">
+              <a:defRPr sz="1100" b="1" a:spc="200">
+                <a:solidFill>
+                  <a:srgbClr val="141414"/>
+                </a:solidFill>
+                <a:latin typeface="Open Sauce Sans"/>
+              </a:defRPr>
+            </a:pPr>
+            <a:r>
+              <a:t>MODEL DEPRECATION</a:t>
+            </a:r>
+          </a:p>
+        </p:txBody>
+      </p:sp>
+      <p:sp>
+        <p:nvSpPr>
+          <p:cNvPr id="15" name="TextBox 14"/>
+          <p:cNvSpPr txBox="1"/>
+          <p:nvPr/>
+        </p:nvSpPr>
+        <p:spPr>
+          <a:xfrm>
+            <a:off x="3840480" y="2871216"/>
+            <a:ext cx="3200400" cy="365760"/>
+          </a:xfrm>
+          <a:prstGeom prst="rect">
+            <a:avLst/>
+          </a:prstGeom>
+          <a:noFill/>
+        </p:spPr>
+        <p:txBody>
+          <a:bodyPr wrap="square">
+            <a:spAutoFit/>
+          </a:bodyPr>
+          <a:lstStyle/>
+          <a:p>
+            <a:pPr algn="l">
+              <a:defRPr sz="1200" b="0">
+                <a:solidFill>
+                  <a:srgbClr val="787878"/>
+                </a:solidFill>
+                <a:latin typeface="Open Sauce Sans"/>
+              </a:defRPr>
+            </a:pPr>
+            <a:r>
+              <a:t>Google retired gemini-2.0-flash mid-project.</a:t>
+            </a:r>
+          </a:p>
+        </p:txBody>
+      </p:sp>
+      <p:sp>
+        <p:nvSpPr>
+          <p:cNvPr id="16" name="TextBox 15"/>
+          <p:cNvSpPr txBox="1"/>
+          <p:nvPr/>
+        </p:nvSpPr>
+        <p:spPr>
+          <a:xfrm>
+            <a:off x="7315200" y="2871216"/>
+            <a:ext cx="4114800" cy="365760"/>
+          </a:xfrm>
+          <a:prstGeom prst="rect">
+            <a:avLst/>
+          </a:prstGeom>
+          <a:noFill/>
+        </p:spPr>
+        <p:txBody>
+          <a:bodyPr wrap="square">
+            <a:spAutoFit/>
+          </a:bodyPr>
+          <a:lstStyle/>
+          <a:p>
+            <a:pPr algn="l">
+              <a:defRPr sz="1200" b="0">
+                <a:solidFill>
+                  <a:srgbClr val="141414"/>
+                </a:solidFill>
+                <a:latin typeface="Open Sauce Sans"/>
+              </a:defRPr>
+            </a:pPr>
+            <a:r>
+              <a:t>Centralized config made migration a one-line fix.</a:t>
+            </a:r>
+          </a:p>
+        </p:txBody>
+      </p:sp>
+      <p:sp>
+        <p:nvSpPr>
+          <p:cNvPr id="17" name="Rectangle 16"/>
+          <p:cNvSpPr/>
+          <p:nvPr/>
+        </p:nvSpPr>
+        <p:spPr>
+          <a:xfrm>
+            <a:off x="731520" y="3602736"/>
+            <a:ext cx="10515600" cy="6350"/>
+          </a:xfrm>
+          <a:prstGeom prst="rect">
+            <a:avLst/>
+          </a:prstGeom>
+          <a:solidFill>
+            <a:srgbClr val="D2D2D2"/>
+          </a:solidFill>
+          <a:ln>
+            <a:noFill/>
+          </a:ln>
+        </p:spPr>
+        <p:style>
+          <a:lnRef idx="1">
+            <a:schemeClr val="accent1"/>
+          </a:lnRef>
+          <a:fillRef idx="3">
+            <a:schemeClr val="accent1"/>
+          </a:fillRef>
+          <a:effectRef idx="2">
+            <a:schemeClr val="accent1"/>
+          </a:effectRef>
+          <a:fontRef idx="minor">
+            <a:schemeClr val="lt1"/>
+          </a:fontRef>
+        </p:style>
+        <p:txBody>
+          <a:bodyPr rtlCol="0" anchor="ctr"/>
+          <a:lstStyle/>
+          <a:p>
+            <a:pPr algn="ctr"/>
+          </a:p>
+        </p:txBody>
+      </p:sp>
+      <p:sp>
+        <p:nvSpPr>
+          <p:cNvPr id="18" name="TextBox 17"/>
+          <p:cNvSpPr txBox="1"/>
+          <p:nvPr/>
+        </p:nvSpPr>
+        <p:spPr>
+          <a:xfrm>
+            <a:off x="731520" y="3712464"/>
+            <a:ext cx="457200" cy="365760"/>
+          </a:xfrm>
+          <a:prstGeom prst="rect">
+            <a:avLst/>
+          </a:prstGeom>
+          <a:noFill/>
+        </p:spPr>
+        <p:txBody>
+          <a:bodyPr wrap="square">
+            <a:spAutoFit/>
+          </a:bodyPr>
+          <a:lstStyle/>
+          <a:p>
+            <a:pPr algn="l">
+              <a:defRPr sz="1200" b="0">
+                <a:solidFill>
+                  <a:srgbClr val="787878"/>
+                </a:solidFill>
+                <a:latin typeface="Open Sauce Sans"/>
+              </a:defRPr>
+            </a:pPr>
+            <a:r>
+              <a:t>03</a:t>
+            </a:r>
+          </a:p>
+        </p:txBody>
+      </p:sp>
+      <p:sp>
+        <p:nvSpPr>
+          <p:cNvPr id="19" name="TextBox 18"/>
+          <p:cNvSpPr txBox="1"/>
+          <p:nvPr/>
+        </p:nvSpPr>
+        <p:spPr>
+          <a:xfrm>
+            <a:off x="1371600" y="3712464"/>
+            <a:ext cx="2286000" cy="365760"/>
+          </a:xfrm>
+          <a:prstGeom prst="rect">
+            <a:avLst/>
+          </a:prstGeom>
+          <a:noFill/>
+        </p:spPr>
+        <p:txBody>
+          <a:bodyPr wrap="square">
+            <a:spAutoFit/>
+          </a:bodyPr>
+          <a:lstStyle/>
+          <a:p>
+            <a:pPr algn="l">
+              <a:defRPr sz="1100" b="1" a:spc="200">
+                <a:solidFill>
+                  <a:srgbClr val="141414"/>
+                </a:solidFill>
+                <a:latin typeface="Open Sauce Sans"/>
+              </a:defRPr>
+            </a:pPr>
+            <a:r>
+              <a:t>EMBEDDING PIPELINE</a:t>
+            </a:r>
+          </a:p>
+        </p:txBody>
+      </p:sp>
+      <p:sp>
+        <p:nvSpPr>
+          <p:cNvPr id="20" name="TextBox 19"/>
+          <p:cNvSpPr txBox="1"/>
+          <p:nvPr/>
+        </p:nvSpPr>
+        <p:spPr>
+          <a:xfrm>
+            <a:off x="3840480" y="3712464"/>
+            <a:ext cx="3200400" cy="365760"/>
+          </a:xfrm>
+          <a:prstGeom prst="rect">
+            <a:avLst/>
+          </a:prstGeom>
+          <a:noFill/>
+        </p:spPr>
+        <p:txBody>
+          <a:bodyPr wrap="square">
+            <a:spAutoFit/>
+          </a:bodyPr>
+          <a:lstStyle/>
+          <a:p>
+            <a:pPr algn="l">
+              <a:defRPr sz="1200" b="0">
+                <a:solidFill>
+                  <a:srgbClr val="787878"/>
+                </a:solidFill>
+                <a:latin typeface="Open Sauce Sans"/>
+              </a:defRPr>
+            </a:pPr>
+            <a:r>
+              <a:t>Silent failures when API was unreachable.</a:t>
+            </a:r>
+          </a:p>
+        </p:txBody>
+      </p:sp>
+      <p:sp>
+        <p:nvSpPr>
+          <p:cNvPr id="21" name="TextBox 20"/>
+          <p:cNvSpPr txBox="1"/>
+          <p:nvPr/>
+        </p:nvSpPr>
+        <p:spPr>
+          <a:xfrm>
+            <a:off x="7315200" y="3712464"/>
+            <a:ext cx="4114800" cy="365760"/>
+          </a:xfrm>
+          <a:prstGeom prst="rect">
+            <a:avLst/>
+          </a:prstGeom>
+          <a:noFill/>
+        </p:spPr>
+        <p:txBody>
+          <a:bodyPr wrap="square">
+            <a:spAutoFit/>
+          </a:bodyPr>
+          <a:lstStyle/>
+          <a:p>
+            <a:pPr algn="l">
+              <a:defRPr sz="1200" b="0">
+                <a:solidFill>
+                  <a:srgbClr val="141414"/>
+                </a:solidFill>
+                <a:latin typeface="Open Sauce Sans"/>
+              </a:defRPr>
+            </a:pPr>
+            <a:r>
+              <a:t>Added explicit error surfacing and validation.</a:t>
+            </a:r>
+          </a:p>
+        </p:txBody>
+      </p:sp>
+      <p:sp>
+        <p:nvSpPr>
+          <p:cNvPr id="22" name="Rectangle 21"/>
+          <p:cNvSpPr/>
+          <p:nvPr/>
+        </p:nvSpPr>
+        <p:spPr>
+          <a:xfrm>
+            <a:off x="731520" y="4443984"/>
+            <a:ext cx="10515600" cy="6350"/>
+          </a:xfrm>
+          <a:prstGeom prst="rect">
+            <a:avLst/>
+          </a:prstGeom>
+          <a:solidFill>
+            <a:srgbClr val="D2D2D2"/>
+          </a:solidFill>
+          <a:ln>
+            <a:noFill/>
+          </a:ln>
+        </p:spPr>
+        <p:style>
+          <a:lnRef idx="1">
+            <a:schemeClr val="accent1"/>
+          </a:lnRef>
+          <a:fillRef idx="3">
+            <a:schemeClr val="accent1"/>
+          </a:fillRef>
+          <a:effectRef idx="2">
+            <a:schemeClr val="accent1"/>
+          </a:effectRef>
+          <a:fontRef idx="minor">
+            <a:schemeClr val="lt1"/>
+          </a:fontRef>
+        </p:style>
+        <p:txBody>
+          <a:bodyPr rtlCol="0" anchor="ctr"/>
+          <a:lstStyle/>
+          <a:p>
+            <a:pPr algn="ctr"/>
+          </a:p>
+        </p:txBody>
+      </p:sp>
+      <p:sp>
+        <p:nvSpPr>
+          <p:cNvPr id="23" name="TextBox 22"/>
+          <p:cNvSpPr txBox="1"/>
+          <p:nvPr/>
+        </p:nvSpPr>
+        <p:spPr>
+          <a:xfrm>
+            <a:off x="731520" y="4553712"/>
+            <a:ext cx="457200" cy="365760"/>
+          </a:xfrm>
+          <a:prstGeom prst="rect">
+            <a:avLst/>
+          </a:prstGeom>
+          <a:noFill/>
+        </p:spPr>
+        <p:txBody>
+          <a:bodyPr wrap="square">
+            <a:spAutoFit/>
+          </a:bodyPr>
+          <a:lstStyle/>
+          <a:p>
+            <a:pPr algn="l">
+              <a:defRPr sz="1200" b="0">
+                <a:solidFill>
+                  <a:srgbClr val="787878"/>
+                </a:solidFill>
+                <a:latin typeface="Open Sauce Sans"/>
+              </a:defRPr>
+            </a:pPr>
+            <a:r>
+              <a:t>04</a:t>
+            </a:r>
+          </a:p>
+        </p:txBody>
+      </p:sp>
+      <p:sp>
+        <p:nvSpPr>
+          <p:cNvPr id="24" name="TextBox 23"/>
+          <p:cNvSpPr txBox="1"/>
+          <p:nvPr/>
+        </p:nvSpPr>
+        <p:spPr>
+          <a:xfrm>
+            <a:off x="1371600" y="4553712"/>
+            <a:ext cx="2286000" cy="365760"/>
+          </a:xfrm>
+          <a:prstGeom prst="rect">
+            <a:avLst/>
+          </a:prstGeom>
+          <a:noFill/>
+        </p:spPr>
+        <p:txBody>
+          <a:bodyPr wrap="square">
+            <a:spAutoFit/>
+          </a:bodyPr>
+          <a:lstStyle/>
+          <a:p>
+            <a:pPr algn="l">
+              <a:defRPr sz="1100" b="1" a:spc="200">
+                <a:solidFill>
+                  <a:srgbClr val="141414"/>
+                </a:solidFill>
+                <a:latin typeface="Open Sauce Sans"/>
+              </a:defRPr>
+            </a:pPr>
+            <a:r>
+              <a:t>PORT CONFLICTS</a:t>
+            </a:r>
+          </a:p>
+        </p:txBody>
+      </p:sp>
+      <p:sp>
+        <p:nvSpPr>
+          <p:cNvPr id="25" name="TextBox 24"/>
+          <p:cNvSpPr txBox="1"/>
+          <p:nvPr/>
+        </p:nvSpPr>
+        <p:spPr>
+          <a:xfrm>
+            <a:off x="3840480" y="4553712"/>
+            <a:ext cx="3200400" cy="365760"/>
+          </a:xfrm>
+          <a:prstGeom prst="rect">
+            <a:avLst/>
+          </a:prstGeom>
+          <a:noFill/>
+        </p:spPr>
+        <p:txBody>
+          <a:bodyPr wrap="square">
+            <a:spAutoFit/>
+          </a:bodyPr>
+          <a:lstStyle/>
+          <a:p>
+            <a:pPr algn="l">
+              <a:defRPr sz="1200" b="0">
+                <a:solidFill>
+                  <a:srgbClr val="787878"/>
+                </a:solidFill>
+                <a:latin typeface="Open Sauce Sans"/>
+              </a:defRPr>
+            </a:pPr>
+            <a:r>
+              <a:t>Windows blocked backend ports silently.</a:t>
+            </a:r>
+          </a:p>
+        </p:txBody>
+      </p:sp>
+      <p:sp>
+        <p:nvSpPr>
+          <p:cNvPr id="26" name="TextBox 25"/>
+          <p:cNvSpPr txBox="1"/>
+          <p:nvPr/>
+        </p:nvSpPr>
+        <p:spPr>
+          <a:xfrm>
+            <a:off x="7315200" y="4553712"/>
+            <a:ext cx="4114800" cy="365760"/>
+          </a:xfrm>
+          <a:prstGeom prst="rect">
+            <a:avLst/>
+          </a:prstGeom>
+          <a:noFill/>
+        </p:spPr>
+        <p:txBody>
+          <a:bodyPr wrap="square">
+            <a:spAutoFit/>
+          </a:bodyPr>
+          <a:lstStyle/>
+          <a:p>
+            <a:pPr algn="l">
+              <a:defRPr sz="1200" b="0">
+                <a:solidFill>
+                  <a:srgbClr val="141414"/>
+                </a:solidFill>
+                <a:latin typeface="Open Sauce Sans"/>
+              </a:defRPr>
+            </a:pPr>
+            <a:r>
+              <a:t>Created start_app.bat for automated startup.</a:t>
+            </a:r>
+          </a:p>
+        </p:txBody>
+      </p:sp>
+      <p:sp>
+        <p:nvSpPr>
+          <p:cNvPr id="27" name="Rectangle 26"/>
+          <p:cNvSpPr/>
+          <p:nvPr/>
+        </p:nvSpPr>
+        <p:spPr>
+          <a:xfrm>
+            <a:off x="731520" y="5285232"/>
+            <a:ext cx="10515600" cy="6350"/>
+          </a:xfrm>
+          <a:prstGeom prst="rect">
+            <a:avLst/>
+          </a:prstGeom>
+          <a:solidFill>
+            <a:srgbClr val="D2D2D2"/>
+          </a:solidFill>
+          <a:ln>
+            <a:noFill/>
+          </a:ln>
+        </p:spPr>
+        <p:style>
+          <a:lnRef idx="1">
+            <a:schemeClr val="accent1"/>
+          </a:lnRef>
+          <a:fillRef idx="3">
+            <a:schemeClr val="accent1"/>
+          </a:fillRef>
+          <a:effectRef idx="2">
+            <a:schemeClr val="accent1"/>
+          </a:effectRef>
+          <a:fontRef idx="minor">
+            <a:schemeClr val="lt1"/>
+          </a:fontRef>
+        </p:style>
+        <p:txBody>
+          <a:bodyPr rtlCol="0" anchor="ctr"/>
+          <a:lstStyle/>
+          <a:p>
+            <a:pPr algn="ctr"/>
+          </a:p>
+        </p:txBody>
+      </p:sp>
+      <p:sp>
+        <p:nvSpPr>
+          <p:cNvPr id="28" name="TextBox 27"/>
+          <p:cNvSpPr txBox="1"/>
+          <p:nvPr/>
+        </p:nvSpPr>
+        <p:spPr>
+          <a:xfrm>
+            <a:off x="731520" y="5394960"/>
+            <a:ext cx="457200" cy="365760"/>
+          </a:xfrm>
+          <a:prstGeom prst="rect">
+            <a:avLst/>
+          </a:prstGeom>
+          <a:noFill/>
+        </p:spPr>
+        <p:txBody>
+          <a:bodyPr wrap="square">
+            <a:spAutoFit/>
+          </a:bodyPr>
+          <a:lstStyle/>
+          <a:p>
+            <a:pPr algn="l">
+              <a:defRPr sz="1200" b="0">
+                <a:solidFill>
+                  <a:srgbClr val="787878"/>
+                </a:solidFill>
+                <a:latin typeface="Open Sauce Sans"/>
+              </a:defRPr>
+            </a:pPr>
+            <a:r>
+              <a:t>05</a:t>
+            </a:r>
+          </a:p>
+        </p:txBody>
+      </p:sp>
+      <p:sp>
+        <p:nvSpPr>
+          <p:cNvPr id="29" name="TextBox 28"/>
+          <p:cNvSpPr txBox="1"/>
+          <p:nvPr/>
+        </p:nvSpPr>
+        <p:spPr>
+          <a:xfrm>
+            <a:off x="1371600" y="5394960"/>
+            <a:ext cx="2286000" cy="365760"/>
+          </a:xfrm>
+          <a:prstGeom prst="rect">
+            <a:avLst/>
+          </a:prstGeom>
+          <a:noFill/>
+        </p:spPr>
+        <p:txBody>
+          <a:bodyPr wrap="square">
+            <a:spAutoFit/>
+          </a:bodyPr>
+          <a:lstStyle/>
+          <a:p>
+            <a:pPr algn="l">
+              <a:defRPr sz="1100" b="1" a:spc="200">
+                <a:solidFill>
+                  <a:srgbClr val="141414"/>
+                </a:solidFill>
+                <a:latin typeface="Open Sauce Sans"/>
+              </a:defRPr>
+            </a:pPr>
+            <a:r>
+              <a:t>FRONTEND-BACKEND SYNC</a:t>
+            </a:r>
+          </a:p>
+        </p:txBody>
+      </p:sp>
+      <p:sp>
+        <p:nvSpPr>
+          <p:cNvPr id="30" name="TextBox 29"/>
+          <p:cNvSpPr txBox="1"/>
+          <p:nvPr/>
+        </p:nvSpPr>
+        <p:spPr>
+          <a:xfrm>
+            <a:off x="3840480" y="5394960"/>
+            <a:ext cx="3200400" cy="365760"/>
+          </a:xfrm>
+          <a:prstGeom prst="rect">
+            <a:avLst/>
+          </a:prstGeom>
+          <a:noFill/>
+        </p:spPr>
+        <p:txBody>
+          <a:bodyPr wrap="square">
+            <a:spAutoFit/>
+          </a:bodyPr>
+          <a:lstStyle/>
+          <a:p>
+            <a:pPr algn="l">
+              <a:defRPr sz="1200" b="0">
+                <a:solidFill>
+                  <a:srgbClr val="787878"/>
+                </a:solidFill>
+                <a:latin typeface="Open Sauce Sans"/>
+              </a:defRPr>
+            </a:pPr>
+            <a:r>
+              <a:t>Separating monolith into microservices.</a:t>
+            </a:r>
+          </a:p>
+        </p:txBody>
+      </p:sp>
+      <p:sp>
+        <p:nvSpPr>
+          <p:cNvPr id="31" name="TextBox 30"/>
+          <p:cNvSpPr txBox="1"/>
+          <p:nvPr/>
+        </p:nvSpPr>
+        <p:spPr>
+          <a:xfrm>
+            <a:off x="7315200" y="5394960"/>
+            <a:ext cx="4114800" cy="365760"/>
+          </a:xfrm>
+          <a:prstGeom prst="rect">
+            <a:avLst/>
+          </a:prstGeom>
+          <a:noFill/>
+        </p:spPr>
+        <p:txBody>
+          <a:bodyPr wrap="square">
+            <a:spAutoFit/>
+          </a:bodyPr>
+          <a:lstStyle/>
+          <a:p>
+            <a:pPr algn="l">
+              <a:defRPr sz="1200" b="0">
+                <a:solidFill>
+                  <a:srgbClr val="141414"/>
+                </a:solidFill>
+                <a:latin typeface="Open Sauce Sans"/>
+              </a:defRPr>
+            </a:pPr>
+            <a:r>
+              <a:t>Used environment variables for flexible routing.</a:t>
+            </a:r>
+          </a:p>
+        </p:txBody>
+      </p:sp>
+      <p:sp>
+        <p:nvSpPr>
+          <p:cNvPr id="32" name="Rectangle 31"/>
+          <p:cNvSpPr/>
+          <p:nvPr/>
+        </p:nvSpPr>
+        <p:spPr>
+          <a:xfrm>
+            <a:off x="731520" y="6126480"/>
+            <a:ext cx="10515600" cy="6350"/>
+          </a:xfrm>
+          <a:prstGeom prst="rect">
+            <a:avLst/>
+          </a:prstGeom>
+          <a:solidFill>
+            <a:srgbClr val="D2D2D2"/>
+          </a:solidFill>
+          <a:ln>
+            <a:noFill/>
+          </a:ln>
+        </p:spPr>
+        <p:style>
+          <a:lnRef idx="1">
+            <a:schemeClr val="accent1"/>
+          </a:lnRef>
+          <a:fillRef idx="3">
+            <a:schemeClr val="accent1"/>
+          </a:fillRef>
+          <a:effectRef idx="2">
+            <a:schemeClr val="accent1"/>
+          </a:effectRef>
+          <a:fontRef idx="minor">
+            <a:schemeClr val="lt1"/>
+          </a:fontRef>
+        </p:style>
+        <p:txBody>
+          <a:bodyPr rtlCol="0" anchor="ctr"/>
+          <a:lstStyle/>
+          <a:p>
+            <a:pPr algn="ctr"/>
+          </a:p>
+        </p:txBody>
+      </p:sp>
+    </p:spTree>
+  </p:cSld>
+  <p:clrMapOvr>
+    <a:masterClrMapping/>
+  </p:clrMapOvr>
+</p:sld>
+</file>
+
+<file path=ppt/slides/slide13.xml><?xml version="1.0" encoding="utf-8"?>
+<p:sld xmlns:a="http://schemas.openxmlformats.org/drawingml/2006/main" xmlns:p="http://schemas.openxmlformats.org/presentationml/2006/main" xmlns:r="http://schemas.openxmlformats.org/officeDocument/2006/relationships">
+  <p:cSld>
+    <p:bg>
+      <p:bgPr>
+        <a:solidFill>
+          <a:srgbClr val="FBFBF9"/>
+        </a:solidFill>
+        <a:effectLst/>
+      </p:bgPr>
+    </p:bg>
+    <p:spTree>
+      <p:nvGrpSpPr>
+        <p:cNvPr id="1" name=""/>
+        <p:cNvGrpSpPr/>
+        <p:nvPr/>
+      </p:nvGrpSpPr>
+      <p:grpSpPr/>
+      <p:sp>
+        <p:nvSpPr>
+          <p:cNvPr id="2" name="Rectangle 1"/>
+          <p:cNvSpPr/>
+          <p:nvPr/>
+        </p:nvSpPr>
+        <p:spPr>
+          <a:xfrm>
+            <a:off x="731520" y="6263640"/>
+            <a:ext cx="10728655" cy="6350"/>
+          </a:xfrm>
+          <a:prstGeom prst="rect">
+            <a:avLst/>
+          </a:prstGeom>
+          <a:solidFill>
+            <a:srgbClr val="D2D2D2"/>
+          </a:solidFill>
+          <a:ln>
+            <a:noFill/>
+          </a:ln>
+        </p:spPr>
+        <p:style>
+          <a:lnRef idx="1">
+            <a:schemeClr val="accent1"/>
+          </a:lnRef>
+          <a:fillRef idx="3">
+            <a:schemeClr val="accent1"/>
+          </a:fillRef>
+          <a:effectRef idx="2">
+            <a:schemeClr val="accent1"/>
+          </a:effectRef>
+          <a:fontRef idx="minor">
+            <a:schemeClr val="lt1"/>
+          </a:fontRef>
+        </p:style>
+        <p:txBody>
+          <a:bodyPr rtlCol="0" anchor="ctr"/>
+          <a:lstStyle/>
+          <a:p>
+            <a:pPr algn="ctr"/>
+          </a:p>
+        </p:txBody>
+      </p:sp>
+      <p:sp>
+        <p:nvSpPr>
+          <p:cNvPr id="3" name="TextBox 2"/>
+          <p:cNvSpPr txBox="1"/>
+          <p:nvPr/>
+        </p:nvSpPr>
+        <p:spPr>
+          <a:xfrm>
+            <a:off x="731520" y="6355080"/>
+            <a:ext cx="2743200" cy="274320"/>
+          </a:xfrm>
+          <a:prstGeom prst="rect">
+            <a:avLst/>
+          </a:prstGeom>
+          <a:noFill/>
+        </p:spPr>
+        <p:txBody>
+          <a:bodyPr wrap="square">
+            <a:spAutoFit/>
+          </a:bodyPr>
+          <a:lstStyle/>
+          <a:p>
+            <a:pPr algn="l">
+              <a:defRPr sz="800" b="1" a:spc="300">
+                <a:solidFill>
+                  <a:srgbClr val="787878"/>
+                </a:solidFill>
+                <a:latin typeface="Open Sauce Sans"/>
+              </a:defRPr>
+            </a:pPr>
+            <a:r>
+              <a:t>STUDYMATE AI</a:t>
+            </a:r>
+          </a:p>
+        </p:txBody>
+      </p:sp>
+      <p:sp>
+        <p:nvSpPr>
+          <p:cNvPr id="4" name="TextBox 3"/>
+          <p:cNvSpPr txBox="1"/>
+          <p:nvPr/>
+        </p:nvSpPr>
+        <p:spPr>
+          <a:xfrm>
+            <a:off x="10789920" y="6355080"/>
+            <a:ext cx="731520" cy="274320"/>
+          </a:xfrm>
+          <a:prstGeom prst="rect">
+            <a:avLst/>
+          </a:prstGeom>
+          <a:noFill/>
+        </p:spPr>
+        <p:txBody>
+          <a:bodyPr wrap="square">
+            <a:spAutoFit/>
+          </a:bodyPr>
+          <a:lstStyle/>
+          <a:p>
+            <a:pPr algn="r">
+              <a:defRPr sz="800" b="0">
+                <a:solidFill>
+                  <a:srgbClr val="787878"/>
+                </a:solidFill>
+                <a:latin typeface="Open Sauce Sans"/>
+              </a:defRPr>
+            </a:pPr>
+            <a:r>
+              <a:t>13</a:t>
+            </a:r>
+          </a:p>
+        </p:txBody>
+      </p:sp>
+      <p:sp>
+        <p:nvSpPr>
+          <p:cNvPr id="5" name="TextBox 4"/>
+          <p:cNvSpPr txBox="1"/>
+          <p:nvPr/>
+        </p:nvSpPr>
+        <p:spPr>
+          <a:xfrm>
+            <a:off x="731520" y="731520"/>
+            <a:ext cx="9144000" cy="731520"/>
+          </a:xfrm>
+          <a:prstGeom prst="rect">
+            <a:avLst/>
+          </a:prstGeom>
+          <a:noFill/>
+        </p:spPr>
+        <p:txBody>
+          <a:bodyPr wrap="square">
+            <a:spAutoFit/>
+          </a:bodyPr>
+          <a:lstStyle/>
+          <a:p>
+            <a:pPr algn="l">
+              <a:defRPr sz="4000" b="0">
+                <a:solidFill>
+                  <a:srgbClr val="141414"/>
+                </a:solidFill>
+                <a:latin typeface="Open Sauce Sans"/>
+              </a:defRPr>
+            </a:pPr>
+            <a:r>
+              <a:t>Conclusion</a:t>
+            </a:r>
+          </a:p>
+        </p:txBody>
+      </p:sp>
+      <p:sp>
+        <p:nvSpPr>
+          <p:cNvPr id="6" name="Rectangle 5"/>
+          <p:cNvSpPr/>
+          <p:nvPr/>
+        </p:nvSpPr>
+        <p:spPr>
+          <a:xfrm>
+            <a:off x="731520" y="1417320"/>
+            <a:ext cx="1371600" cy="9525"/>
+          </a:xfrm>
+          <a:prstGeom prst="rect">
+            <a:avLst/>
+          </a:prstGeom>
+          <a:solidFill>
+            <a:srgbClr val="141414"/>
+          </a:solidFill>
+          <a:ln>
+            <a:noFill/>
+          </a:ln>
+        </p:spPr>
+        <p:style>
+          <a:lnRef idx="1">
+            <a:schemeClr val="accent1"/>
+          </a:lnRef>
+          <a:fillRef idx="3">
+            <a:schemeClr val="accent1"/>
+          </a:fillRef>
+          <a:effectRef idx="2">
+            <a:schemeClr val="accent1"/>
+          </a:effectRef>
+          <a:fontRef idx="minor">
+            <a:schemeClr val="lt1"/>
+          </a:fontRef>
+        </p:style>
+        <p:txBody>
+          <a:bodyPr rtlCol="0" anchor="ctr"/>
+          <a:lstStyle/>
+          <a:p>
+            <a:pPr algn="ctr"/>
+          </a:p>
+        </p:txBody>
+      </p:sp>
+      <p:sp>
+        <p:nvSpPr>
+          <p:cNvPr id="7" name="TextBox 6"/>
+          <p:cNvSpPr txBox="1"/>
+          <p:nvPr/>
+        </p:nvSpPr>
+        <p:spPr>
+          <a:xfrm>
+            <a:off x="731520" y="2011680"/>
+            <a:ext cx="6400800" cy="1371600"/>
+          </a:xfrm>
+          <a:prstGeom prst="rect">
+            <a:avLst/>
+          </a:prstGeom>
+          <a:noFill/>
+        </p:spPr>
+        <p:txBody>
+          <a:bodyPr wrap="square">
+            <a:spAutoFit/>
+          </a:bodyPr>
+          <a:lstStyle/>
+          <a:p>
+            <a:pPr>
+              <a:spcAft>
+                <a:spcPts val="2000"/>
+              </a:spcAft>
+              <a:defRPr sz="1500">
+                <a:solidFill>
+                  <a:srgbClr val="141414"/>
+                </a:solidFill>
+                <a:latin typeface="Open Sauce Sans"/>
+              </a:defRPr>
+            </a:pPr>
+            <a:r>
+              <a:t>This internship pushed me to build a real, production-grade AI application from scratch — not just calling an API, but designing a complete system around it.</a:t>
+            </a:r>
+          </a:p>
+          <a:p>
+            <a:pPr>
+              <a:spcAft>
+                <a:spcPts val="2000"/>
+              </a:spcAft>
+              <a:defRPr sz="1500">
+                <a:solidFill>
+                  <a:srgbClr val="141414"/>
+                </a:solidFill>
+                <a:latin typeface="Open Sauce Sans"/>
+              </a:defRPr>
+            </a:pPr>
+            <a:r>
+              <a:t>I completed all three levels: a polished study tool, a RAG pipeline for document intelligence, and a microservices architecture with an agentic AI workflow.</a:t>
+            </a:r>
+          </a:p>
+        </p:txBody>
+      </p:sp>
+      <p:sp>
+        <p:nvSpPr>
+          <p:cNvPr id="8" name="TextBox 7"/>
+          <p:cNvSpPr txBox="1"/>
+          <p:nvPr/>
+        </p:nvSpPr>
+        <p:spPr>
+          <a:xfrm>
+            <a:off x="731520" y="3657600"/>
+            <a:ext cx="4572000" cy="365760"/>
+          </a:xfrm>
+          <a:prstGeom prst="rect">
+            <a:avLst/>
+          </a:prstGeom>
+          <a:noFill/>
+        </p:spPr>
+        <p:txBody>
+          <a:bodyPr wrap="square">
+            <a:spAutoFit/>
+          </a:bodyPr>
+          <a:lstStyle/>
+          <a:p>
+            <a:pPr algn="l">
+              <a:defRPr sz="1000" b="1" a:spc="300">
+                <a:solidFill>
+                  <a:srgbClr val="141414"/>
+                </a:solidFill>
+                <a:latin typeface="Open Sauce Sans"/>
+              </a:defRPr>
+            </a:pPr>
+            <a:r>
+              <a:t>WHAT I DELIVERED</a:t>
+            </a:r>
+          </a:p>
+        </p:txBody>
+      </p:sp>
+      <p:sp>
+        <p:nvSpPr>
+          <p:cNvPr id="9" name="TextBox 8"/>
+          <p:cNvSpPr txBox="1"/>
+          <p:nvPr/>
+        </p:nvSpPr>
+        <p:spPr>
+          <a:xfrm>
+            <a:off x="731520" y="4114800"/>
+            <a:ext cx="7315200" cy="2560320"/>
+          </a:xfrm>
+          <a:prstGeom prst="rect">
+            <a:avLst/>
+          </a:prstGeom>
+          <a:noFill/>
+        </p:spPr>
+        <p:txBody>
+          <a:bodyPr wrap="square">
+            <a:spAutoFit/>
+          </a:bodyPr>
+          <a:lstStyle/>
+          <a:p>
+            <a:pPr>
+              <a:spcAft>
+                <a:spcPts val="800"/>
+              </a:spcAft>
+              <a:defRPr sz="1300">
+                <a:solidFill>
+                  <a:srgbClr val="787878"/>
+                </a:solidFill>
+                <a:latin typeface="Open Sauce Sans"/>
+              </a:defRPr>
+            </a:pPr>
+            <a:r>
+              <a:t>—   5 AI-powered features (4 study tools + document Q&amp;A)</a:t>
+            </a:r>
+          </a:p>
+          <a:p>
+            <a:pPr>
+              <a:spcAft>
+                <a:spcPts val="800"/>
+              </a:spcAft>
+              <a:defRPr sz="1300">
+                <a:solidFill>
+                  <a:srgbClr val="787878"/>
+                </a:solidFill>
+                <a:latin typeface="Open Sauce Sans"/>
+              </a:defRPr>
+            </a:pPr>
+            <a:r>
+              <a:t>—   44 automated unit tests using pytest</a:t>
+            </a:r>
+          </a:p>
+          <a:p>
+            <a:pPr>
+              <a:spcAft>
+                <a:spcPts val="800"/>
+              </a:spcAft>
+              <a:defRPr sz="1300">
+                <a:solidFill>
+                  <a:srgbClr val="787878"/>
+                </a:solidFill>
+                <a:latin typeface="Open Sauce Sans"/>
+              </a:defRPr>
+            </a:pPr>
+            <a:r>
+              <a:t>—   FastAPI backend with Pydantic validation</a:t>
+            </a:r>
+          </a:p>
+          <a:p>
+            <a:pPr>
+              <a:spcAft>
+                <a:spcPts val="800"/>
+              </a:spcAft>
+              <a:defRPr sz="1300">
+                <a:solidFill>
+                  <a:srgbClr val="787878"/>
+                </a:solidFill>
+                <a:latin typeface="Open Sauce Sans"/>
+              </a:defRPr>
+            </a:pPr>
+            <a:r>
+              <a:t>—   LangGraph multi-step agentic RAG pipeline</a:t>
+            </a:r>
+          </a:p>
+          <a:p>
+            <a:pPr>
+              <a:spcAft>
+                <a:spcPts val="800"/>
+              </a:spcAft>
+              <a:defRPr sz="1300">
+                <a:solidFill>
+                  <a:srgbClr val="787878"/>
+                </a:solidFill>
+                <a:latin typeface="Open Sauce Sans"/>
+              </a:defRPr>
+            </a:pPr>
+            <a:r>
+              <a:t>—   FAISS vector database for semantic search</a:t>
+            </a:r>
+          </a:p>
+          <a:p>
+            <a:pPr>
+              <a:spcAft>
+                <a:spcPts val="800"/>
+              </a:spcAft>
+              <a:defRPr sz="1300">
+                <a:solidFill>
+                  <a:srgbClr val="787878"/>
+                </a:solidFill>
+                <a:latin typeface="Open Sauce Sans"/>
+              </a:defRPr>
+            </a:pPr>
+            <a:r>
+              <a:t>—   Docker Compose for one-command deployment</a:t>
+            </a:r>
+          </a:p>
+          <a:p>
+            <a:pPr>
+              <a:spcAft>
+                <a:spcPts val="800"/>
+              </a:spcAft>
+              <a:defRPr sz="1300">
+                <a:solidFill>
+                  <a:srgbClr val="787878"/>
+                </a:solidFill>
+                <a:latin typeface="Open Sauce Sans"/>
+              </a:defRPr>
+            </a:pPr>
+            <a:r>
+              <a:t>—   Custom dark-mode UI with CSS animations</a:t>
+            </a:r>
+          </a:p>
+        </p:txBody>
+      </p:sp>
+    </p:spTree>
+  </p:cSld>
+  <p:clrMapOvr>
+    <a:masterClrMapping/>
+  </p:clrMapOvr>
+</p:sld>
+</file>
+
+<file path=ppt/slides/slide14.xml><?xml version="1.0" encoding="utf-8"?>
+<p:sld xmlns:a="http://schemas.openxmlformats.org/drawingml/2006/main" xmlns:p="http://schemas.openxmlformats.org/presentationml/2006/main" xmlns:r="http://schemas.openxmlformats.org/officeDocument/2006/relationships">
+  <p:cSld>
+    <p:bg>
+      <p:bgPr>
+        <a:solidFill>
+          <a:srgbClr val="FBFBF9"/>
+        </a:solidFill>
+        <a:effectLst/>
+      </p:bgPr>
+    </p:bg>
+    <p:spTree>
+      <p:nvGrpSpPr>
+        <p:cNvPr id="1" name=""/>
+        <p:cNvGrpSpPr/>
+        <p:nvPr/>
+      </p:nvGrpSpPr>
+      <p:grpSpPr/>
+      <p:sp>
+        <p:nvSpPr>
+          <p:cNvPr id="2" name="TextBox 1"/>
+          <p:cNvSpPr txBox="1"/>
+          <p:nvPr/>
+        </p:nvSpPr>
+        <p:spPr>
+          <a:xfrm>
+            <a:off x="0" y="2011680"/>
+            <a:ext cx="12191695" cy="914400"/>
+          </a:xfrm>
+          <a:prstGeom prst="rect">
+            <a:avLst/>
+          </a:prstGeom>
+          <a:noFill/>
+        </p:spPr>
+        <p:txBody>
+          <a:bodyPr wrap="square">
+            <a:spAutoFit/>
+          </a:bodyPr>
+          <a:lstStyle/>
+          <a:p>
+            <a:pPr algn="ctr">
+              <a:defRPr sz="6000" b="0">
+                <a:solidFill>
+                  <a:srgbClr val="141414"/>
+                </a:solidFill>
+                <a:latin typeface="Open Sauce Sans"/>
+              </a:defRPr>
+            </a:pPr>
+            <a:r>
+              <a:t>Thank you</a:t>
+            </a:r>
+          </a:p>
+        </p:txBody>
+      </p:sp>
+      <p:sp>
+        <p:nvSpPr>
+          <p:cNvPr id="3" name="Rectangle 2"/>
+          <p:cNvSpPr/>
+          <p:nvPr/>
+        </p:nvSpPr>
+        <p:spPr>
+          <a:xfrm>
+            <a:off x="5303520" y="3200400"/>
+            <a:ext cx="1584655" cy="9525"/>
+          </a:xfrm>
+          <a:prstGeom prst="rect">
+            <a:avLst/>
+          </a:prstGeom>
+          <a:solidFill>
+            <a:srgbClr val="141414"/>
+          </a:solidFill>
+          <a:ln>
+            <a:noFill/>
+          </a:ln>
+        </p:spPr>
+        <p:style>
+          <a:lnRef idx="1">
+            <a:schemeClr val="accent1"/>
+          </a:lnRef>
+          <a:fillRef idx="3">
+            <a:schemeClr val="accent1"/>
+          </a:fillRef>
+          <a:effectRef idx="2">
+            <a:schemeClr val="accent1"/>
+          </a:effectRef>
+          <a:fontRef idx="minor">
+            <a:schemeClr val="lt1"/>
+          </a:fontRef>
+        </p:style>
+        <p:txBody>
+          <a:bodyPr rtlCol="0" anchor="ctr"/>
+          <a:lstStyle/>
+          <a:p>
+            <a:pPr algn="ctr"/>
+          </a:p>
+        </p:txBody>
+      </p:sp>
+      <p:sp>
+        <p:nvSpPr>
           <p:cNvPr id="4" name="TextBox 3"/>
           <p:cNvSpPr txBox="1"/>
           <p:nvPr/>
@@ -4944,6 +7660,42 @@
             </a:pPr>
             <a:r>
               <a:t>SHADOWFOX  AI  INTERNSHIP  •  SEPTEMBER  2026</a:t>
+            </a:r>
+          </a:p>
+        </p:txBody>
+      </p:sp>
+      <p:sp>
+        <p:nvSpPr>
+          <p:cNvPr id="6" name="TextBox 5"/>
+          <p:cNvSpPr txBox="1"/>
+          <p:nvPr/>
+        </p:nvSpPr>
+        <p:spPr>
+          <a:xfrm>
+            <a:off x="0" y="4754880"/>
+            <a:ext cx="12191695" cy="365760"/>
+          </a:xfrm>
+          <a:prstGeom prst="rect">
+            <a:avLst/>
+          </a:prstGeom>
+          <a:noFill/>
+        </p:spPr>
+        <p:txBody>
+          <a:bodyPr wrap="square">
+            <a:spAutoFit/>
+          </a:bodyPr>
+          <a:lstStyle/>
+          <a:p>
+            <a:pPr algn="ctr">
+              <a:defRPr sz="1100" b="0">
+                <a:solidFill>
+                  <a:srgbClr val="787878"/>
+                </a:solidFill>
+                <a:latin typeface="Open Sauce Sans"/>
+              </a:defRPr>
+            </a:pPr>
+            <a:r>
+              <a:t>github.com/Pavanyamanuru-30/studymate-ai</a:t>
             </a:r>
           </a:p>
         </p:txBody>
@@ -5213,7 +7965,7 @@
         <p:spPr>
           <a:xfrm>
             <a:off x="1463040" y="2194560"/>
-            <a:ext cx="3200400" cy="365760"/>
+            <a:ext cx="3657600" cy="365760"/>
           </a:xfrm>
           <a:prstGeom prst="rect">
             <a:avLst/>
@@ -5248,8 +8000,8 @@
         </p:nvSpPr>
         <p:spPr>
           <a:xfrm>
-            <a:off x="731520" y="2697480"/>
-            <a:ext cx="3840480" cy="6350"/>
+            <a:off x="731520" y="2651760"/>
+            <a:ext cx="4389120" cy="6350"/>
           </a:xfrm>
           <a:prstGeom prst="rect">
             <a:avLst/>
@@ -5291,7 +8043,7 @@
         </p:nvSpPr>
         <p:spPr>
           <a:xfrm>
-            <a:off x="731520" y="2971800"/>
+            <a:off x="731520" y="2852928"/>
             <a:ext cx="731520" cy="365760"/>
           </a:xfrm>
           <a:prstGeom prst="rect">
@@ -5327,8 +8079,8 @@
         </p:nvSpPr>
         <p:spPr>
           <a:xfrm>
-            <a:off x="1463040" y="2971800"/>
-            <a:ext cx="3200400" cy="365760"/>
+            <a:off x="1463040" y="2852928"/>
+            <a:ext cx="3657600" cy="365760"/>
           </a:xfrm>
           <a:prstGeom prst="rect">
             <a:avLst/>
@@ -5363,8 +8115,8 @@
         </p:nvSpPr>
         <p:spPr>
           <a:xfrm>
-            <a:off x="731520" y="3474720"/>
-            <a:ext cx="3840480" cy="6350"/>
+            <a:off x="731520" y="3310128"/>
+            <a:ext cx="4389120" cy="6350"/>
           </a:xfrm>
           <a:prstGeom prst="rect">
             <a:avLst/>
@@ -5406,7 +8158,7 @@
         </p:nvSpPr>
         <p:spPr>
           <a:xfrm>
-            <a:off x="731520" y="3749040"/>
+            <a:off x="731520" y="3511296"/>
             <a:ext cx="731520" cy="365760"/>
           </a:xfrm>
           <a:prstGeom prst="rect">
@@ -5442,8 +8194,8 @@
         </p:nvSpPr>
         <p:spPr>
           <a:xfrm>
-            <a:off x="1463040" y="3749040"/>
-            <a:ext cx="3200400" cy="365760"/>
+            <a:off x="1463040" y="3511296"/>
+            <a:ext cx="3657600" cy="365760"/>
           </a:xfrm>
           <a:prstGeom prst="rect">
             <a:avLst/>
@@ -5478,8 +8230,8 @@
         </p:nvSpPr>
         <p:spPr>
           <a:xfrm>
-            <a:off x="731520" y="4251960"/>
-            <a:ext cx="3840480" cy="6350"/>
+            <a:off x="731520" y="3968496"/>
+            <a:ext cx="4389120" cy="6350"/>
           </a:xfrm>
           <a:prstGeom prst="rect">
             <a:avLst/>
@@ -5521,7 +8273,7 @@
         </p:nvSpPr>
         <p:spPr>
           <a:xfrm>
-            <a:off x="731520" y="4526280"/>
+            <a:off x="731520" y="4169664"/>
             <a:ext cx="731520" cy="365760"/>
           </a:xfrm>
           <a:prstGeom prst="rect">
@@ -5557,8 +8309,8 @@
         </p:nvSpPr>
         <p:spPr>
           <a:xfrm>
-            <a:off x="1463040" y="4526280"/>
-            <a:ext cx="3200400" cy="365760"/>
+            <a:off x="1463040" y="4169664"/>
+            <a:ext cx="3657600" cy="365760"/>
           </a:xfrm>
           <a:prstGeom prst="rect">
             <a:avLst/>
@@ -5580,7 +8332,7 @@
               </a:defRPr>
             </a:pPr>
             <a:r>
-              <a:t>Features</a:t>
+              <a:t>Beginner Features</a:t>
             </a:r>
           </a:p>
         </p:txBody>
@@ -5593,8 +8345,8 @@
         </p:nvSpPr>
         <p:spPr>
           <a:xfrm>
-            <a:off x="731520" y="5029200"/>
-            <a:ext cx="3840480" cy="6350"/>
+            <a:off x="731520" y="4626864"/>
+            <a:ext cx="4389120" cy="6350"/>
           </a:xfrm>
           <a:prstGeom prst="rect">
             <a:avLst/>
@@ -5636,7 +8388,7 @@
         </p:nvSpPr>
         <p:spPr>
           <a:xfrm>
-            <a:off x="731520" y="5303520"/>
+            <a:off x="731520" y="4828032"/>
             <a:ext cx="731520" cy="365760"/>
           </a:xfrm>
           <a:prstGeom prst="rect">
@@ -5672,8 +8424,8 @@
         </p:nvSpPr>
         <p:spPr>
           <a:xfrm>
-            <a:off x="1463040" y="5303520"/>
-            <a:ext cx="3200400" cy="365760"/>
+            <a:off x="1463040" y="4828032"/>
+            <a:ext cx="3657600" cy="365760"/>
           </a:xfrm>
           <a:prstGeom prst="rect">
             <a:avLst/>
@@ -5695,7 +8447,7 @@
               </a:defRPr>
             </a:pPr>
             <a:r>
-              <a:t>Architecture</a:t>
+              <a:t>Intermediate: RAG Pipeline</a:t>
             </a:r>
           </a:p>
         </p:txBody>
@@ -5708,8 +8460,8 @@
         </p:nvSpPr>
         <p:spPr>
           <a:xfrm>
-            <a:off x="731520" y="5806440"/>
-            <a:ext cx="3840480" cy="6350"/>
+            <a:off x="731520" y="5285232"/>
+            <a:ext cx="4389120" cy="6350"/>
           </a:xfrm>
           <a:prstGeom prst="rect">
             <a:avLst/>
@@ -5751,7 +8503,7 @@
         </p:nvSpPr>
         <p:spPr>
           <a:xfrm>
-            <a:off x="5303520" y="2194560"/>
+            <a:off x="731520" y="5486399"/>
             <a:ext cx="731520" cy="365760"/>
           </a:xfrm>
           <a:prstGeom prst="rect">
@@ -5787,8 +8539,8 @@
         </p:nvSpPr>
         <p:spPr>
           <a:xfrm>
-            <a:off x="6035040" y="2194560"/>
-            <a:ext cx="3200400" cy="365760"/>
+            <a:off x="1463040" y="5486399"/>
+            <a:ext cx="3657600" cy="365760"/>
           </a:xfrm>
           <a:prstGeom prst="rect">
             <a:avLst/>
@@ -5810,7 +8562,7 @@
               </a:defRPr>
             </a:pPr>
             <a:r>
-              <a:t>Tech Stack</a:t>
+              <a:t>Advanced: Microservices</a:t>
             </a:r>
           </a:p>
         </p:txBody>
@@ -5823,8 +8575,8 @@
         </p:nvSpPr>
         <p:spPr>
           <a:xfrm>
-            <a:off x="5303520" y="2697480"/>
-            <a:ext cx="3840480" cy="6350"/>
+            <a:off x="731520" y="5943599"/>
+            <a:ext cx="4389120" cy="6350"/>
           </a:xfrm>
           <a:prstGeom prst="rect">
             <a:avLst/>
@@ -5866,7 +8618,7 @@
         </p:nvSpPr>
         <p:spPr>
           <a:xfrm>
-            <a:off x="5303520" y="2971800"/>
+            <a:off x="5760720" y="2194560"/>
             <a:ext cx="731520" cy="365760"/>
           </a:xfrm>
           <a:prstGeom prst="rect">
@@ -5902,8 +8654,8 @@
         </p:nvSpPr>
         <p:spPr>
           <a:xfrm>
-            <a:off x="6035040" y="2971800"/>
-            <a:ext cx="3200400" cy="365760"/>
+            <a:off x="6492240" y="2194560"/>
+            <a:ext cx="3657600" cy="365760"/>
           </a:xfrm>
           <a:prstGeom prst="rect">
             <a:avLst/>
@@ -5925,7 +8677,7 @@
               </a:defRPr>
             </a:pPr>
             <a:r>
-              <a:t>Testing</a:t>
+              <a:t>Full Architecture</a:t>
             </a:r>
           </a:p>
         </p:txBody>
@@ -5938,8 +8690,8 @@
         </p:nvSpPr>
         <p:spPr>
           <a:xfrm>
-            <a:off x="5303520" y="3474720"/>
-            <a:ext cx="3840480" cy="6350"/>
+            <a:off x="5760720" y="2651760"/>
+            <a:ext cx="4389120" cy="6350"/>
           </a:xfrm>
           <a:prstGeom prst="rect">
             <a:avLst/>
@@ -5981,7 +8733,7 @@
         </p:nvSpPr>
         <p:spPr>
           <a:xfrm>
-            <a:off x="5303520" y="3749040"/>
+            <a:off x="5760720" y="2852928"/>
             <a:ext cx="731520" cy="365760"/>
           </a:xfrm>
           <a:prstGeom prst="rect">
@@ -6017,8 +8769,8 @@
         </p:nvSpPr>
         <p:spPr>
           <a:xfrm>
-            <a:off x="6035040" y="3749040"/>
-            <a:ext cx="3200400" cy="365760"/>
+            <a:off x="6492240" y="2852928"/>
+            <a:ext cx="3657600" cy="365760"/>
           </a:xfrm>
           <a:prstGeom prst="rect">
             <a:avLst/>
@@ -6040,7 +8792,7 @@
               </a:defRPr>
             </a:pPr>
             <a:r>
-              <a:t>Challenges</a:t>
+              <a:t>Tech Stack</a:t>
             </a:r>
           </a:p>
         </p:txBody>
@@ -6053,8 +8805,8 @@
         </p:nvSpPr>
         <p:spPr>
           <a:xfrm>
-            <a:off x="5303520" y="4251960"/>
-            <a:ext cx="3840480" cy="6350"/>
+            <a:off x="5760720" y="3310128"/>
+            <a:ext cx="4389120" cy="6350"/>
           </a:xfrm>
           <a:prstGeom prst="rect">
             <a:avLst/>
@@ -6096,7 +8848,7 @@
         </p:nvSpPr>
         <p:spPr>
           <a:xfrm>
-            <a:off x="5303520" y="4526280"/>
+            <a:off x="5760720" y="3511296"/>
             <a:ext cx="731520" cy="365760"/>
           </a:xfrm>
           <a:prstGeom prst="rect">
@@ -6132,8 +8884,8 @@
         </p:nvSpPr>
         <p:spPr>
           <a:xfrm>
-            <a:off x="6035040" y="4526280"/>
-            <a:ext cx="3200400" cy="365760"/>
+            <a:off x="6492240" y="3511296"/>
+            <a:ext cx="3657600" cy="365760"/>
           </a:xfrm>
           <a:prstGeom prst="rect">
             <a:avLst/>
@@ -6155,7 +8907,7 @@
               </a:defRPr>
             </a:pPr>
             <a:r>
-              <a:t>Conclusion</a:t>
+              <a:t>Testing</a:t>
             </a:r>
           </a:p>
         </p:txBody>
@@ -6168,8 +8920,238 @@
         </p:nvSpPr>
         <p:spPr>
           <a:xfrm>
-            <a:off x="5303520" y="5029200"/>
-            <a:ext cx="3840480" cy="6350"/>
+            <a:off x="5760720" y="3968496"/>
+            <a:ext cx="4389120" cy="6350"/>
+          </a:xfrm>
+          <a:prstGeom prst="rect">
+            <a:avLst/>
+          </a:prstGeom>
+          <a:solidFill>
+            <a:srgbClr val="D2D2D2"/>
+          </a:solidFill>
+          <a:ln>
+            <a:noFill/>
+          </a:ln>
+        </p:spPr>
+        <p:style>
+          <a:lnRef idx="1">
+            <a:schemeClr val="accent1"/>
+          </a:lnRef>
+          <a:fillRef idx="3">
+            <a:schemeClr val="accent1"/>
+          </a:fillRef>
+          <a:effectRef idx="2">
+            <a:schemeClr val="accent1"/>
+          </a:effectRef>
+          <a:fontRef idx="minor">
+            <a:schemeClr val="lt1"/>
+          </a:fontRef>
+        </p:style>
+        <p:txBody>
+          <a:bodyPr rtlCol="0" anchor="ctr"/>
+          <a:lstStyle/>
+          <a:p>
+            <a:pPr algn="ctr"/>
+          </a:p>
+        </p:txBody>
+      </p:sp>
+      <p:sp>
+        <p:nvSpPr>
+          <p:cNvPr id="34" name="TextBox 33"/>
+          <p:cNvSpPr txBox="1"/>
+          <p:nvPr/>
+        </p:nvSpPr>
+        <p:spPr>
+          <a:xfrm>
+            <a:off x="5760720" y="4169664"/>
+            <a:ext cx="731520" cy="365760"/>
+          </a:xfrm>
+          <a:prstGeom prst="rect">
+            <a:avLst/>
+          </a:prstGeom>
+          <a:noFill/>
+        </p:spPr>
+        <p:txBody>
+          <a:bodyPr wrap="square">
+            <a:spAutoFit/>
+          </a:bodyPr>
+          <a:lstStyle/>
+          <a:p>
+            <a:pPr algn="l">
+              <a:defRPr sz="1300" b="0">
+                <a:solidFill>
+                  <a:srgbClr val="787878"/>
+                </a:solidFill>
+                <a:latin typeface="Open Sauce Sans"/>
+              </a:defRPr>
+            </a:pPr>
+            <a:r>
+              <a:t>10</a:t>
+            </a:r>
+          </a:p>
+        </p:txBody>
+      </p:sp>
+      <p:sp>
+        <p:nvSpPr>
+          <p:cNvPr id="35" name="TextBox 34"/>
+          <p:cNvSpPr txBox="1"/>
+          <p:nvPr/>
+        </p:nvSpPr>
+        <p:spPr>
+          <a:xfrm>
+            <a:off x="6492240" y="4169664"/>
+            <a:ext cx="3657600" cy="365760"/>
+          </a:xfrm>
+          <a:prstGeom prst="rect">
+            <a:avLst/>
+          </a:prstGeom>
+          <a:noFill/>
+        </p:spPr>
+        <p:txBody>
+          <a:bodyPr wrap="square">
+            <a:spAutoFit/>
+          </a:bodyPr>
+          <a:lstStyle/>
+          <a:p>
+            <a:pPr algn="l">
+              <a:defRPr sz="1500" b="1">
+                <a:solidFill>
+                  <a:srgbClr val="141414"/>
+                </a:solidFill>
+                <a:latin typeface="Open Sauce Sans"/>
+              </a:defRPr>
+            </a:pPr>
+            <a:r>
+              <a:t>Challenges</a:t>
+            </a:r>
+          </a:p>
+        </p:txBody>
+      </p:sp>
+      <p:sp>
+        <p:nvSpPr>
+          <p:cNvPr id="36" name="Rectangle 35"/>
+          <p:cNvSpPr/>
+          <p:nvPr/>
+        </p:nvSpPr>
+        <p:spPr>
+          <a:xfrm>
+            <a:off x="5760720" y="4626864"/>
+            <a:ext cx="4389120" cy="6350"/>
+          </a:xfrm>
+          <a:prstGeom prst="rect">
+            <a:avLst/>
+          </a:prstGeom>
+          <a:solidFill>
+            <a:srgbClr val="D2D2D2"/>
+          </a:solidFill>
+          <a:ln>
+            <a:noFill/>
+          </a:ln>
+        </p:spPr>
+        <p:style>
+          <a:lnRef idx="1">
+            <a:schemeClr val="accent1"/>
+          </a:lnRef>
+          <a:fillRef idx="3">
+            <a:schemeClr val="accent1"/>
+          </a:fillRef>
+          <a:effectRef idx="2">
+            <a:schemeClr val="accent1"/>
+          </a:effectRef>
+          <a:fontRef idx="minor">
+            <a:schemeClr val="lt1"/>
+          </a:fontRef>
+        </p:style>
+        <p:txBody>
+          <a:bodyPr rtlCol="0" anchor="ctr"/>
+          <a:lstStyle/>
+          <a:p>
+            <a:pPr algn="ctr"/>
+          </a:p>
+        </p:txBody>
+      </p:sp>
+      <p:sp>
+        <p:nvSpPr>
+          <p:cNvPr id="37" name="TextBox 36"/>
+          <p:cNvSpPr txBox="1"/>
+          <p:nvPr/>
+        </p:nvSpPr>
+        <p:spPr>
+          <a:xfrm>
+            <a:off x="5760720" y="4828032"/>
+            <a:ext cx="731520" cy="365760"/>
+          </a:xfrm>
+          <a:prstGeom prst="rect">
+            <a:avLst/>
+          </a:prstGeom>
+          <a:noFill/>
+        </p:spPr>
+        <p:txBody>
+          <a:bodyPr wrap="square">
+            <a:spAutoFit/>
+          </a:bodyPr>
+          <a:lstStyle/>
+          <a:p>
+            <a:pPr algn="l">
+              <a:defRPr sz="1300" b="0">
+                <a:solidFill>
+                  <a:srgbClr val="787878"/>
+                </a:solidFill>
+                <a:latin typeface="Open Sauce Sans"/>
+              </a:defRPr>
+            </a:pPr>
+            <a:r>
+              <a:t>11</a:t>
+            </a:r>
+          </a:p>
+        </p:txBody>
+      </p:sp>
+      <p:sp>
+        <p:nvSpPr>
+          <p:cNvPr id="38" name="TextBox 37"/>
+          <p:cNvSpPr txBox="1"/>
+          <p:nvPr/>
+        </p:nvSpPr>
+        <p:spPr>
+          <a:xfrm>
+            <a:off x="6492240" y="4828032"/>
+            <a:ext cx="3657600" cy="365760"/>
+          </a:xfrm>
+          <a:prstGeom prst="rect">
+            <a:avLst/>
+          </a:prstGeom>
+          <a:noFill/>
+        </p:spPr>
+        <p:txBody>
+          <a:bodyPr wrap="square">
+            <a:spAutoFit/>
+          </a:bodyPr>
+          <a:lstStyle/>
+          <a:p>
+            <a:pPr algn="l">
+              <a:defRPr sz="1500" b="1">
+                <a:solidFill>
+                  <a:srgbClr val="141414"/>
+                </a:solidFill>
+                <a:latin typeface="Open Sauce Sans"/>
+              </a:defRPr>
+            </a:pPr>
+            <a:r>
+              <a:t>Conclusion</a:t>
+            </a:r>
+          </a:p>
+        </p:txBody>
+      </p:sp>
+      <p:sp>
+        <p:nvSpPr>
+          <p:cNvPr id="39" name="Rectangle 38"/>
+          <p:cNvSpPr/>
+          <p:nvPr/>
+        </p:nvSpPr>
+        <p:spPr>
+          <a:xfrm>
+            <a:off x="5760720" y="5285232"/>
+            <a:ext cx="4389120" cy="6350"/>
           </a:xfrm>
           <a:prstGeom prst="rect">
             <a:avLst/>
@@ -6489,7 +9471,7 @@
               </a:defRPr>
             </a:pPr>
             <a:r>
-              <a:t>All tasks were completed independently by me, utilizing the Google Gemini API for the application's core AI functionalities.</a:t>
+              <a:t>All tasks were completed independently by me across all three levels (Beginner, Intermediate, and Advanced), utilizing the Google Gemini API and modern Python frameworks.</a:t>
             </a:r>
           </a:p>
         </p:txBody>
@@ -6865,7 +9847,7 @@
                 </a:solidFill>
                 <a:latin typeface="Open Sauce Sans"/>
               </a:rPr>
-              <a:t>Concept gaps</a:t>
+              <a:t>No document intelligence</a:t>
             </a:r>
             <a:r>
               <a:rPr sz="1400">
@@ -6874,7 +9856,7 @@
                 </a:solidFill>
                 <a:latin typeface="Open Sauce Sans"/>
               </a:rPr>
-              <a:t>  —  Textbook explanations are not always simple or intuitive</a:t>
+              <a:t>  —  Students can't ask questions directly about their own PDFs</a:t>
             </a:r>
           </a:p>
           <a:p>
@@ -6899,7 +9881,7 @@
                 </a:solidFill>
                 <a:latin typeface="Open Sauce Sans"/>
               </a:rPr>
-              <a:t>No feedback loop</a:t>
+              <a:t>No production architecture</a:t>
             </a:r>
             <a:r>
               <a:rPr sz="1400">
@@ -6908,7 +9890,7 @@
                 </a:solidFill>
                 <a:latin typeface="Open Sauce Sans"/>
               </a:rPr>
-              <a:t>  —  Students lack tools to review and improve their written answers</a:t>
+              <a:t>  —  Most AI tools are fragile scripts, not scalable systems</a:t>
             </a:r>
           </a:p>
         </p:txBody>
@@ -7164,7 +10146,7 @@
               </a:defRPr>
             </a:pPr>
             <a:r>
-              <a:t>A single web application with four AI-powered study tools, built using Python and Google Gemini.</a:t>
+              <a:t>A production-grade AI web application with five tools, a separated frontend and backend, and an agentic RAG pipeline.</a:t>
             </a:r>
           </a:p>
         </p:txBody>
@@ -7178,7 +10160,7 @@
         <p:spPr>
           <a:xfrm>
             <a:off x="731520" y="2926080"/>
-            <a:ext cx="9144000" cy="548640"/>
+            <a:ext cx="10058400" cy="548640"/>
           </a:xfrm>
           <a:prstGeom prst="rect">
             <a:avLst/>
@@ -7200,7 +10182,7 @@
               </a:defRPr>
             </a:pPr>
             <a:r>
-              <a:t>SUMMARIZE   •   QUIZ   •   EXPLAIN   •   IMPROVE</a:t>
+              <a:t>SUMMARIZE   •   QUIZ   •   EXPLAIN   •   IMPROVE   •   DOC Q&amp;A</a:t>
             </a:r>
           </a:p>
         </p:txBody>
@@ -7239,7 +10221,7 @@
               </a:defRPr>
             </a:pPr>
             <a:r>
-              <a:t>Students paste their notes or questions into one of four tabs. The application validates the input, wraps it in a carefully engineered prompt template, sends it to the Gemini API, and renders the AI's response as clean, downloadable markdown.</a:t>
+              <a:t>Students can paste notes, generate quizzes, get explanations, improve answers, or upload entire PDFs and ask questions about them. The AI answers strictly from the document content, preventing hallucination.</a:t>
             </a:r>
           </a:p>
           <a:p>
@@ -7255,7 +10237,7 @@
               </a:defRPr>
             </a:pPr>
             <a:r>
-              <a:t>The result is a focused tool that does four things well — not a chatbot, not a generic wrapper, but a purpose-built study assistant.</a:t>
+              <a:t>The system is built as a true microservice: a Streamlit frontend talks to a FastAPI backend, which orchestrates a multi-step LangGraph agent to retrieve, verify, and generate grounded answers.</a:t>
             </a:r>
           </a:p>
         </p:txBody>
@@ -7409,7 +10391,43 @@
         </p:nvSpPr>
         <p:spPr>
           <a:xfrm>
-            <a:off x="731520" y="731520"/>
+            <a:off x="731520" y="457200"/>
+            <a:ext cx="2743200" cy="274320"/>
+          </a:xfrm>
+          <a:prstGeom prst="rect">
+            <a:avLst/>
+          </a:prstGeom>
+          <a:noFill/>
+        </p:spPr>
+        <p:txBody>
+          <a:bodyPr wrap="square">
+            <a:spAutoFit/>
+          </a:bodyPr>
+          <a:lstStyle/>
+          <a:p>
+            <a:pPr algn="l">
+              <a:defRPr sz="1000" b="1" a:spc="300">
+                <a:solidFill>
+                  <a:srgbClr val="787878"/>
+                </a:solidFill>
+                <a:latin typeface="Open Sauce Sans"/>
+              </a:defRPr>
+            </a:pPr>
+            <a:r>
+              <a:t>BEGINNER LEVEL</a:t>
+            </a:r>
+          </a:p>
+        </p:txBody>
+      </p:sp>
+      <p:sp>
+        <p:nvSpPr>
+          <p:cNvPr id="6" name="TextBox 5"/>
+          <p:cNvSpPr txBox="1"/>
+          <p:nvPr/>
+        </p:nvSpPr>
+        <p:spPr>
+          <a:xfrm>
+            <a:off x="731520" y="822960"/>
             <a:ext cx="9144000" cy="731520"/>
           </a:xfrm>
           <a:prstGeom prst="rect">
@@ -7432,20 +10450,20 @@
               </a:defRPr>
             </a:pPr>
             <a:r>
-              <a:t>Features</a:t>
-            </a:r>
-          </a:p>
-        </p:txBody>
-      </p:sp>
-      <p:sp>
-        <p:nvSpPr>
-          <p:cNvPr id="6" name="Rectangle 5"/>
+              <a:t>Core Features</a:t>
+            </a:r>
+          </a:p>
+        </p:txBody>
+      </p:sp>
+      <p:sp>
+        <p:nvSpPr>
+          <p:cNvPr id="7" name="Rectangle 6"/>
           <p:cNvSpPr/>
           <p:nvPr/>
         </p:nvSpPr>
         <p:spPr>
           <a:xfrm>
-            <a:off x="731520" y="1417320"/>
+            <a:off x="731520" y="1508760"/>
             <a:ext cx="1097280" cy="9525"/>
           </a:xfrm>
           <a:prstGeom prst="rect">
@@ -7482,7 +10500,7 @@
       </p:sp>
       <p:sp>
         <p:nvSpPr>
-          <p:cNvPr id="7" name="Rectangle 6"/>
+          <p:cNvPr id="8" name="Rectangle 7"/>
           <p:cNvSpPr/>
           <p:nvPr/>
         </p:nvSpPr>
@@ -7525,7 +10543,7 @@
       </p:sp>
       <p:sp>
         <p:nvSpPr>
-          <p:cNvPr id="8" name="TextBox 7"/>
+          <p:cNvPr id="9" name="TextBox 8"/>
           <p:cNvSpPr txBox="1"/>
           <p:nvPr/>
         </p:nvSpPr>
@@ -7561,7 +10579,7 @@
       </p:sp>
       <p:sp>
         <p:nvSpPr>
-          <p:cNvPr id="9" name="TextBox 8"/>
+          <p:cNvPr id="10" name="TextBox 9"/>
           <p:cNvSpPr txBox="1"/>
           <p:nvPr/>
         </p:nvSpPr>
@@ -7597,7 +10615,7 @@
       </p:sp>
       <p:sp>
         <p:nvSpPr>
-          <p:cNvPr id="10" name="Rectangle 9"/>
+          <p:cNvPr id="11" name="Rectangle 10"/>
           <p:cNvSpPr/>
           <p:nvPr/>
         </p:nvSpPr>
@@ -7640,7 +10658,7 @@
       </p:sp>
       <p:sp>
         <p:nvSpPr>
-          <p:cNvPr id="11" name="TextBox 10"/>
+          <p:cNvPr id="12" name="TextBox 11"/>
           <p:cNvSpPr txBox="1"/>
           <p:nvPr/>
         </p:nvSpPr>
@@ -7676,7 +10694,7 @@
       </p:sp>
       <p:sp>
         <p:nvSpPr>
-          <p:cNvPr id="12" name="TextBox 11"/>
+          <p:cNvPr id="13" name="TextBox 12"/>
           <p:cNvSpPr txBox="1"/>
           <p:nvPr/>
         </p:nvSpPr>
@@ -7705,14 +10723,14 @@
               </a:defRPr>
             </a:pPr>
             <a:r>
-              <a:t>Convert notes into 3–10 multiple-choice questions. Each question has 4 options and an answer key with explanations.</a:t>
-            </a:r>
-          </a:p>
-        </p:txBody>
-      </p:sp>
-      <p:sp>
-        <p:nvSpPr>
-          <p:cNvPr id="13" name="Rectangle 12"/>
+              <a:t>Convert notes into 3-10 multiple-choice questions. Each question has 4 options and an answer key with explanations.</a:t>
+            </a:r>
+          </a:p>
+        </p:txBody>
+      </p:sp>
+      <p:sp>
+        <p:nvSpPr>
+          <p:cNvPr id="14" name="Rectangle 13"/>
           <p:cNvSpPr/>
           <p:nvPr/>
         </p:nvSpPr>
@@ -7755,7 +10773,7 @@
       </p:sp>
       <p:sp>
         <p:nvSpPr>
-          <p:cNvPr id="14" name="TextBox 13"/>
+          <p:cNvPr id="15" name="TextBox 14"/>
           <p:cNvSpPr txBox="1"/>
           <p:nvPr/>
         </p:nvSpPr>
@@ -7791,7 +10809,7 @@
       </p:sp>
       <p:sp>
         <p:nvSpPr>
-          <p:cNvPr id="15" name="TextBox 14"/>
+          <p:cNvPr id="16" name="TextBox 15"/>
           <p:cNvSpPr txBox="1"/>
           <p:nvPr/>
         </p:nvSpPr>
@@ -7827,7 +10845,7 @@
       </p:sp>
       <p:sp>
         <p:nvSpPr>
-          <p:cNvPr id="16" name="Rectangle 15"/>
+          <p:cNvPr id="17" name="Rectangle 16"/>
           <p:cNvSpPr/>
           <p:nvPr/>
         </p:nvSpPr>
@@ -7870,7 +10888,7 @@
       </p:sp>
       <p:sp>
         <p:nvSpPr>
-          <p:cNvPr id="17" name="TextBox 16"/>
+          <p:cNvPr id="18" name="TextBox 17"/>
           <p:cNvSpPr txBox="1"/>
           <p:nvPr/>
         </p:nvSpPr>
@@ -7906,7 +10924,7 @@
       </p:sp>
       <p:sp>
         <p:nvSpPr>
-          <p:cNvPr id="18" name="TextBox 17"/>
+          <p:cNvPr id="19" name="TextBox 18"/>
           <p:cNvSpPr txBox="1"/>
           <p:nvPr/>
         </p:nvSpPr>
@@ -7942,7 +10960,7 @@
       </p:sp>
       <p:sp>
         <p:nvSpPr>
-          <p:cNvPr id="19" name="Rectangle 18"/>
+          <p:cNvPr id="20" name="Rectangle 19"/>
           <p:cNvSpPr/>
           <p:nvPr/>
         </p:nvSpPr>
@@ -8132,7 +11150,43 @@
         </p:nvSpPr>
         <p:spPr>
           <a:xfrm>
-            <a:off x="731520" y="731520"/>
+            <a:off x="731520" y="457200"/>
+            <a:ext cx="2743200" cy="274320"/>
+          </a:xfrm>
+          <a:prstGeom prst="rect">
+            <a:avLst/>
+          </a:prstGeom>
+          <a:noFill/>
+        </p:spPr>
+        <p:txBody>
+          <a:bodyPr wrap="square">
+            <a:spAutoFit/>
+          </a:bodyPr>
+          <a:lstStyle/>
+          <a:p>
+            <a:pPr algn="l">
+              <a:defRPr sz="1000" b="1" a:spc="300">
+                <a:solidFill>
+                  <a:srgbClr val="787878"/>
+                </a:solidFill>
+                <a:latin typeface="Open Sauce Sans"/>
+              </a:defRPr>
+            </a:pPr>
+            <a:r>
+              <a:t>INTERMEDIATE LEVEL</a:t>
+            </a:r>
+          </a:p>
+        </p:txBody>
+      </p:sp>
+      <p:sp>
+        <p:nvSpPr>
+          <p:cNvPr id="6" name="TextBox 5"/>
+          <p:cNvSpPr txBox="1"/>
+          <p:nvPr/>
+        </p:nvSpPr>
+        <p:spPr>
+          <a:xfrm>
+            <a:off x="731520" y="822960"/>
             <a:ext cx="9144000" cy="731520"/>
           </a:xfrm>
           <a:prstGeom prst="rect">
@@ -8155,21 +11209,21 @@
               </a:defRPr>
             </a:pPr>
             <a:r>
-              <a:t>Architecture</a:t>
-            </a:r>
-          </a:p>
-        </p:txBody>
-      </p:sp>
-      <p:sp>
-        <p:nvSpPr>
-          <p:cNvPr id="6" name="Rectangle 5"/>
+              <a:t>Document Q&amp;A (RAG)</a:t>
+            </a:r>
+          </a:p>
+        </p:txBody>
+      </p:sp>
+      <p:sp>
+        <p:nvSpPr>
+          <p:cNvPr id="7" name="Rectangle 6"/>
           <p:cNvSpPr/>
           <p:nvPr/>
         </p:nvSpPr>
         <p:spPr>
           <a:xfrm>
-            <a:off x="731520" y="1417320"/>
-            <a:ext cx="1645920" cy="9525"/>
+            <a:off x="731520" y="1508760"/>
+            <a:ext cx="2743200" cy="9525"/>
           </a:xfrm>
           <a:prstGeom prst="rect">
             <a:avLst/>
@@ -8205,13 +11259,13 @@
       </p:sp>
       <p:sp>
         <p:nvSpPr>
-          <p:cNvPr id="7" name="TextBox 6"/>
-          <p:cNvSpPr txBox="1"/>
-          <p:nvPr/>
-        </p:nvSpPr>
-        <p:spPr>
-          <a:xfrm>
-            <a:off x="731520" y="1828800"/>
+          <p:cNvPr id="8" name="TextBox 7"/>
+          <p:cNvSpPr txBox="1"/>
+          <p:nvPr/>
+        </p:nvSpPr>
+        <p:spPr>
+          <a:xfrm>
+            <a:off x="731520" y="1920240"/>
             <a:ext cx="7315200" cy="457200"/>
           </a:xfrm>
           <a:prstGeom prst="rect">
@@ -8226,7 +11280,7 @@
           <a:lstStyle/>
           <a:p>
             <a:pPr algn="l">
-              <a:defRPr sz="1400" b="0">
+              <a:defRPr sz="1500" b="0">
                 <a:solidFill>
                   <a:srgbClr val="787878"/>
                 </a:solidFill>
@@ -8234,14 +11288,14 @@
               </a:defRPr>
             </a:pPr>
             <a:r>
-              <a:t>What happens when a student clicks a button:</a:t>
-            </a:r>
-          </a:p>
-        </p:txBody>
-      </p:sp>
-      <p:sp>
-        <p:nvSpPr>
-          <p:cNvPr id="8" name="TextBox 7"/>
+              <a:t>Retrieval-Augmented Generation — answering questions from uploaded documents.</a:t>
+            </a:r>
+          </a:p>
+        </p:txBody>
+      </p:sp>
+      <p:sp>
+        <p:nvSpPr>
+          <p:cNvPr id="9" name="TextBox 8"/>
           <p:cNvSpPr txBox="1"/>
           <p:nvPr/>
         </p:nvSpPr>
@@ -8277,7 +11331,7 @@
       </p:sp>
       <p:sp>
         <p:nvSpPr>
-          <p:cNvPr id="9" name="TextBox 8"/>
+          <p:cNvPr id="10" name="TextBox 9"/>
           <p:cNvSpPr txBox="1"/>
           <p:nvPr/>
         </p:nvSpPr>
@@ -8306,14 +11360,14 @@
               </a:defRPr>
             </a:pPr>
             <a:r>
-              <a:t>INPUT</a:t>
-            </a:r>
-          </a:p>
-        </p:txBody>
-      </p:sp>
-      <p:sp>
-        <p:nvSpPr>
-          <p:cNvPr id="10" name="TextBox 9"/>
+              <a:t>UPLOAD</a:t>
+            </a:r>
+          </a:p>
+        </p:txBody>
+      </p:sp>
+      <p:sp>
+        <p:nvSpPr>
+          <p:cNvPr id="11" name="TextBox 10"/>
           <p:cNvSpPr txBox="1"/>
           <p:nvPr/>
         </p:nvSpPr>
@@ -8342,18 +11396,18 @@
               </a:defRPr>
             </a:pPr>
             <a:r>
-              <a:t>Student enters text</a:t>
+              <a:t>Student uploads</a:t>
             </a:r>
             <a:br/>
             <a:r>
-              <a:t>via Streamlit UI</a:t>
-            </a:r>
-          </a:p>
-        </p:txBody>
-      </p:sp>
-      <p:sp>
-        <p:nvSpPr>
-          <p:cNvPr id="11" name="TextBox 10"/>
+              <a:t>a PDF document</a:t>
+            </a:r>
+          </a:p>
+        </p:txBody>
+      </p:sp>
+      <p:sp>
+        <p:nvSpPr>
+          <p:cNvPr id="12" name="TextBox 11"/>
           <p:cNvSpPr txBox="1"/>
           <p:nvPr/>
         </p:nvSpPr>
@@ -8389,7 +11443,7 @@
       </p:sp>
       <p:sp>
         <p:nvSpPr>
-          <p:cNvPr id="12" name="TextBox 11"/>
+          <p:cNvPr id="13" name="TextBox 12"/>
           <p:cNvSpPr txBox="1"/>
           <p:nvPr/>
         </p:nvSpPr>
@@ -8425,7 +11479,7 @@
       </p:sp>
       <p:sp>
         <p:nvSpPr>
-          <p:cNvPr id="13" name="TextBox 12"/>
+          <p:cNvPr id="14" name="TextBox 13"/>
           <p:cNvSpPr txBox="1"/>
           <p:nvPr/>
         </p:nvSpPr>
@@ -8454,14 +11508,14 @@
               </a:defRPr>
             </a:pPr>
             <a:r>
-              <a:t>VALIDATE</a:t>
-            </a:r>
-          </a:p>
-        </p:txBody>
-      </p:sp>
-      <p:sp>
-        <p:nvSpPr>
-          <p:cNvPr id="14" name="TextBox 13"/>
+              <a:t>EXTRACT</a:t>
+            </a:r>
+          </a:p>
+        </p:txBody>
+      </p:sp>
+      <p:sp>
+        <p:nvSpPr>
+          <p:cNvPr id="15" name="TextBox 14"/>
           <p:cNvSpPr txBox="1"/>
           <p:nvPr/>
         </p:nvSpPr>
@@ -8490,18 +11544,18 @@
               </a:defRPr>
             </a:pPr>
             <a:r>
-              <a:t>Reject empty or</a:t>
+              <a:t>PyPDF2 reads all</a:t>
             </a:r>
             <a:br/>
             <a:r>
-              <a:t>too-short inputs</a:t>
-            </a:r>
-          </a:p>
-        </p:txBody>
-      </p:sp>
-      <p:sp>
-        <p:nvSpPr>
-          <p:cNvPr id="15" name="TextBox 14"/>
+              <a:t>text from pages</a:t>
+            </a:r>
+          </a:p>
+        </p:txBody>
+      </p:sp>
+      <p:sp>
+        <p:nvSpPr>
+          <p:cNvPr id="16" name="TextBox 15"/>
           <p:cNvSpPr txBox="1"/>
           <p:nvPr/>
         </p:nvSpPr>
@@ -8537,7 +11591,7 @@
       </p:sp>
       <p:sp>
         <p:nvSpPr>
-          <p:cNvPr id="16" name="TextBox 15"/>
+          <p:cNvPr id="17" name="TextBox 16"/>
           <p:cNvSpPr txBox="1"/>
           <p:nvPr/>
         </p:nvSpPr>
@@ -8573,7 +11627,7 @@
       </p:sp>
       <p:sp>
         <p:nvSpPr>
-          <p:cNvPr id="17" name="TextBox 16"/>
+          <p:cNvPr id="18" name="TextBox 17"/>
           <p:cNvSpPr txBox="1"/>
           <p:nvPr/>
         </p:nvSpPr>
@@ -8602,14 +11656,14 @@
               </a:defRPr>
             </a:pPr>
             <a:r>
-              <a:t>BUILD PROMPT</a:t>
-            </a:r>
-          </a:p>
-        </p:txBody>
-      </p:sp>
-      <p:sp>
-        <p:nvSpPr>
-          <p:cNvPr id="18" name="TextBox 17"/>
+              <a:t>CHUNK</a:t>
+            </a:r>
+          </a:p>
+        </p:txBody>
+      </p:sp>
+      <p:sp>
+        <p:nvSpPr>
+          <p:cNvPr id="19" name="TextBox 18"/>
           <p:cNvSpPr txBox="1"/>
           <p:nvPr/>
         </p:nvSpPr>
@@ -8638,18 +11692,18 @@
               </a:defRPr>
             </a:pPr>
             <a:r>
-              <a:t>Wrap text in a</a:t>
+              <a:t>Split into 1000-char</a:t>
             </a:r>
             <a:br/>
             <a:r>
-              <a:t>structured template</a:t>
-            </a:r>
-          </a:p>
-        </p:txBody>
-      </p:sp>
-      <p:sp>
-        <p:nvSpPr>
-          <p:cNvPr id="19" name="TextBox 18"/>
+              <a:t>overlapping segments</a:t>
+            </a:r>
+          </a:p>
+        </p:txBody>
+      </p:sp>
+      <p:sp>
+        <p:nvSpPr>
+          <p:cNvPr id="20" name="TextBox 19"/>
           <p:cNvSpPr txBox="1"/>
           <p:nvPr/>
         </p:nvSpPr>
@@ -8685,7 +11739,7 @@
       </p:sp>
       <p:sp>
         <p:nvSpPr>
-          <p:cNvPr id="20" name="TextBox 19"/>
+          <p:cNvPr id="21" name="TextBox 20"/>
           <p:cNvSpPr txBox="1"/>
           <p:nvPr/>
         </p:nvSpPr>
@@ -8721,7 +11775,7 @@
       </p:sp>
       <p:sp>
         <p:nvSpPr>
-          <p:cNvPr id="21" name="TextBox 20"/>
+          <p:cNvPr id="22" name="TextBox 21"/>
           <p:cNvSpPr txBox="1"/>
           <p:nvPr/>
         </p:nvSpPr>
@@ -8750,14 +11804,14 @@
               </a:defRPr>
             </a:pPr>
             <a:r>
-              <a:t>CALL GEMINI</a:t>
-            </a:r>
-          </a:p>
-        </p:txBody>
-      </p:sp>
-      <p:sp>
-        <p:nvSpPr>
-          <p:cNvPr id="22" name="TextBox 21"/>
+              <a:t>EMBED</a:t>
+            </a:r>
+          </a:p>
+        </p:txBody>
+      </p:sp>
+      <p:sp>
+        <p:nvSpPr>
+          <p:cNvPr id="23" name="TextBox 22"/>
           <p:cNvSpPr txBox="1"/>
           <p:nvPr/>
         </p:nvSpPr>
@@ -8786,18 +11840,18 @@
               </a:defRPr>
             </a:pPr>
             <a:r>
-              <a:t>Send to Google API</a:t>
+              <a:t>Gemini Embedding</a:t>
             </a:r>
             <a:br/>
             <a:r>
-              <a:t>with auto-retry</a:t>
-            </a:r>
-          </a:p>
-        </p:txBody>
-      </p:sp>
-      <p:sp>
-        <p:nvSpPr>
-          <p:cNvPr id="23" name="TextBox 22"/>
+              <a:t>converts to vectors</a:t>
+            </a:r>
+          </a:p>
+        </p:txBody>
+      </p:sp>
+      <p:sp>
+        <p:nvSpPr>
+          <p:cNvPr id="24" name="TextBox 23"/>
           <p:cNvSpPr txBox="1"/>
           <p:nvPr/>
         </p:nvSpPr>
@@ -8833,7 +11887,7 @@
       </p:sp>
       <p:sp>
         <p:nvSpPr>
-          <p:cNvPr id="24" name="TextBox 23"/>
+          <p:cNvPr id="25" name="TextBox 24"/>
           <p:cNvSpPr txBox="1"/>
           <p:nvPr/>
         </p:nvSpPr>
@@ -8869,7 +11923,7 @@
       </p:sp>
       <p:sp>
         <p:nvSpPr>
-          <p:cNvPr id="25" name="TextBox 24"/>
+          <p:cNvPr id="26" name="TextBox 25"/>
           <p:cNvSpPr txBox="1"/>
           <p:nvPr/>
         </p:nvSpPr>
@@ -8898,14 +11952,14 @@
               </a:defRPr>
             </a:pPr>
             <a:r>
-              <a:t>DISPLAY</a:t>
-            </a:r>
-          </a:p>
-        </p:txBody>
-      </p:sp>
-      <p:sp>
-        <p:nvSpPr>
-          <p:cNvPr id="26" name="TextBox 25"/>
+              <a:t>INDEX</a:t>
+            </a:r>
+          </a:p>
+        </p:txBody>
+      </p:sp>
+      <p:sp>
+        <p:nvSpPr>
+          <p:cNvPr id="27" name="TextBox 26"/>
           <p:cNvSpPr txBox="1"/>
           <p:nvPr/>
         </p:nvSpPr>
@@ -8934,25 +11988,25 @@
               </a:defRPr>
             </a:pPr>
             <a:r>
-              <a:t>Render markdown</a:t>
+              <a:t>FAISS stores vectors</a:t>
             </a:r>
             <a:br/>
             <a:r>
-              <a:t>with copy + download</a:t>
-            </a:r>
-          </a:p>
-        </p:txBody>
-      </p:sp>
-      <p:sp>
-        <p:nvSpPr>
-          <p:cNvPr id="27" name="TextBox 26"/>
+              <a:t>for fast search</a:t>
+            </a:r>
+          </a:p>
+        </p:txBody>
+      </p:sp>
+      <p:sp>
+        <p:nvSpPr>
+          <p:cNvPr id="28" name="TextBox 27"/>
           <p:cNvSpPr txBox="1"/>
           <p:nvPr/>
         </p:nvSpPr>
         <p:spPr>
           <a:xfrm>
             <a:off x="731520" y="5120640"/>
-            <a:ext cx="10058400" cy="274320"/>
+            <a:ext cx="10058400" cy="731520"/>
           </a:xfrm>
           <a:prstGeom prst="rect">
             <a:avLst/>
@@ -8966,43 +12020,7 @@
           <a:lstStyle/>
           <a:p>
             <a:pPr algn="l">
-              <a:defRPr sz="900" b="1" a:spc="300">
-                <a:solidFill>
-                  <a:srgbClr val="141414"/>
-                </a:solidFill>
-                <a:latin typeface="Open Sauce Sans"/>
-              </a:defRPr>
-            </a:pPr>
-            <a:r>
-              <a:t>FILE STRUCTURE</a:t>
-            </a:r>
-          </a:p>
-        </p:txBody>
-      </p:sp>
-      <p:sp>
-        <p:nvSpPr>
-          <p:cNvPr id="28" name="TextBox 27"/>
-          <p:cNvSpPr txBox="1"/>
-          <p:nvPr/>
-        </p:nvSpPr>
-        <p:spPr>
-          <a:xfrm>
-            <a:off x="731520" y="5440680"/>
-            <a:ext cx="10058400" cy="365760"/>
-          </a:xfrm>
-          <a:prstGeom prst="rect">
-            <a:avLst/>
-          </a:prstGeom>
-          <a:noFill/>
-        </p:spPr>
-        <p:txBody>
-          <a:bodyPr wrap="square">
-            <a:spAutoFit/>
-          </a:bodyPr>
-          <a:lstStyle/>
-          <a:p>
-            <a:pPr algn="l">
-              <a:defRPr sz="1200" b="0">
+              <a:defRPr sz="1300" b="0">
                 <a:solidFill>
                   <a:srgbClr val="787878"/>
                 </a:solidFill>
@@ -9010,7 +12028,7 @@
               </a:defRPr>
             </a:pPr>
             <a:r>
-              <a:t>app.py  →  prompts/prompts.py  →  utils/llm.py  →  utils/validation.py  →  config.py</a:t>
+              <a:t>When a student asks a question, the system embeds the query, searches the FAISS index for the top 3 most relevant chunks, and feeds them as context to the LLM. The AI answers strictly from the document — no hallucination.</a:t>
             </a:r>
           </a:p>
         </p:txBody>
@@ -9164,7 +12182,43 @@
         </p:nvSpPr>
         <p:spPr>
           <a:xfrm>
-            <a:off x="731520" y="731520"/>
+            <a:off x="731520" y="457200"/>
+            <a:ext cx="2743200" cy="274320"/>
+          </a:xfrm>
+          <a:prstGeom prst="rect">
+            <a:avLst/>
+          </a:prstGeom>
+          <a:noFill/>
+        </p:spPr>
+        <p:txBody>
+          <a:bodyPr wrap="square">
+            <a:spAutoFit/>
+          </a:bodyPr>
+          <a:lstStyle/>
+          <a:p>
+            <a:pPr algn="l">
+              <a:defRPr sz="1000" b="1" a:spc="300">
+                <a:solidFill>
+                  <a:srgbClr val="787878"/>
+                </a:solidFill>
+                <a:latin typeface="Open Sauce Sans"/>
+              </a:defRPr>
+            </a:pPr>
+            <a:r>
+              <a:t>ADVANCED LEVEL</a:t>
+            </a:r>
+          </a:p>
+        </p:txBody>
+      </p:sp>
+      <p:sp>
+        <p:nvSpPr>
+          <p:cNvPr id="6" name="TextBox 5"/>
+          <p:cNvSpPr txBox="1"/>
+          <p:nvPr/>
+        </p:nvSpPr>
+        <p:spPr>
+          <a:xfrm>
+            <a:off x="731520" y="822960"/>
             <a:ext cx="9144000" cy="731520"/>
           </a:xfrm>
           <a:prstGeom prst="rect">
@@ -9187,21 +12241,21 @@
               </a:defRPr>
             </a:pPr>
             <a:r>
-              <a:t>Tech Stack</a:t>
-            </a:r>
-          </a:p>
-        </p:txBody>
-      </p:sp>
-      <p:sp>
-        <p:nvSpPr>
-          <p:cNvPr id="6" name="Rectangle 5"/>
+              <a:t>Microservices Architecture</a:t>
+            </a:r>
+          </a:p>
+        </p:txBody>
+      </p:sp>
+      <p:sp>
+        <p:nvSpPr>
+          <p:cNvPr id="7" name="Rectangle 6"/>
           <p:cNvSpPr/>
           <p:nvPr/>
         </p:nvSpPr>
         <p:spPr>
           <a:xfrm>
-            <a:off x="731520" y="1417320"/>
-            <a:ext cx="1371600" cy="9525"/>
+            <a:off x="731520" y="1508760"/>
+            <a:ext cx="3200400" cy="9525"/>
           </a:xfrm>
           <a:prstGeom prst="rect">
             <a:avLst/>
@@ -9237,14 +12291,50 @@
       </p:sp>
       <p:sp>
         <p:nvSpPr>
-          <p:cNvPr id="7" name="Rectangle 6"/>
+          <p:cNvPr id="8" name="TextBox 7"/>
+          <p:cNvSpPr txBox="1"/>
+          <p:nvPr/>
+        </p:nvSpPr>
+        <p:spPr>
+          <a:xfrm>
+            <a:off x="731520" y="2103120"/>
+            <a:ext cx="3657600" cy="365760"/>
+          </a:xfrm>
+          <a:prstGeom prst="rect">
+            <a:avLst/>
+          </a:prstGeom>
+          <a:noFill/>
+        </p:spPr>
+        <p:txBody>
+          <a:bodyPr wrap="square">
+            <a:spAutoFit/>
+          </a:bodyPr>
+          <a:lstStyle/>
+          <a:p>
+            <a:pPr algn="l">
+              <a:defRPr sz="1100" b="1" a:spc="300">
+                <a:solidFill>
+                  <a:srgbClr val="141414"/>
+                </a:solidFill>
+                <a:latin typeface="Open Sauce Sans"/>
+              </a:defRPr>
+            </a:pPr>
+            <a:r>
+              <a:t>FRONTEND</a:t>
+            </a:r>
+          </a:p>
+        </p:txBody>
+      </p:sp>
+      <p:sp>
+        <p:nvSpPr>
+          <p:cNvPr id="9" name="Rectangle 8"/>
           <p:cNvSpPr/>
           <p:nvPr/>
         </p:nvSpPr>
         <p:spPr>
           <a:xfrm>
-            <a:off x="731520" y="2011680"/>
-            <a:ext cx="8229600" cy="6350"/>
+            <a:off x="731520" y="2468880"/>
+            <a:ext cx="3657600" cy="6350"/>
           </a:xfrm>
           <a:prstGeom prst="rect">
             <a:avLst/>
@@ -9280,14 +12370,105 @@
       </p:sp>
       <p:sp>
         <p:nvSpPr>
-          <p:cNvPr id="8" name="TextBox 7"/>
-          <p:cNvSpPr txBox="1"/>
-          <p:nvPr/>
-        </p:nvSpPr>
-        <p:spPr>
-          <a:xfrm>
-            <a:off x="731520" y="2084832"/>
-            <a:ext cx="2743200" cy="365760"/>
+          <p:cNvPr id="10" name="TextBox 9"/>
+          <p:cNvSpPr txBox="1"/>
+          <p:nvPr/>
+        </p:nvSpPr>
+        <p:spPr>
+          <a:xfrm>
+            <a:off x="731520" y="2651760"/>
+            <a:ext cx="3657600" cy="1371600"/>
+          </a:xfrm>
+          <a:prstGeom prst="rect">
+            <a:avLst/>
+          </a:prstGeom>
+          <a:noFill/>
+        </p:spPr>
+        <p:txBody>
+          <a:bodyPr wrap="square">
+            <a:spAutoFit/>
+          </a:bodyPr>
+          <a:lstStyle/>
+          <a:p>
+            <a:pPr>
+              <a:spcAft>
+                <a:spcPts val="1600"/>
+              </a:spcAft>
+              <a:defRPr sz="1300">
+                <a:solidFill>
+                  <a:srgbClr val="787878"/>
+                </a:solidFill>
+                <a:latin typeface="Open Sauce Sans"/>
+              </a:defRPr>
+            </a:pPr>
+            <a:r>
+              <a:t>Streamlit UI sends HTTP requests to the backend API. No AI logic lives in the frontend.</a:t>
+            </a:r>
+          </a:p>
+          <a:p>
+            <a:pPr>
+              <a:spcAft>
+                <a:spcPts val="1600"/>
+              </a:spcAft>
+              <a:defRPr sz="1300">
+                <a:solidFill>
+                  <a:srgbClr val="787878"/>
+                </a:solidFill>
+                <a:latin typeface="Open Sauce Sans"/>
+              </a:defRPr>
+            </a:pPr>
+            <a:r>
+              <a:t>Handles file upload, user input, and result rendering.</a:t>
+            </a:r>
+          </a:p>
+        </p:txBody>
+      </p:sp>
+      <p:sp>
+        <p:nvSpPr>
+          <p:cNvPr id="11" name="TextBox 10"/>
+          <p:cNvSpPr txBox="1"/>
+          <p:nvPr/>
+        </p:nvSpPr>
+        <p:spPr>
+          <a:xfrm>
+            <a:off x="4754880" y="2926080"/>
+            <a:ext cx="914400" cy="457200"/>
+          </a:xfrm>
+          <a:prstGeom prst="rect">
+            <a:avLst/>
+          </a:prstGeom>
+          <a:noFill/>
+        </p:spPr>
+        <p:txBody>
+          <a:bodyPr wrap="square">
+            <a:spAutoFit/>
+          </a:bodyPr>
+          <a:lstStyle/>
+          <a:p>
+            <a:pPr algn="ctr">
+              <a:defRPr sz="1400" b="0">
+                <a:solidFill>
+                  <a:srgbClr val="D2D2D2"/>
+                </a:solidFill>
+                <a:latin typeface="Open Sauce Sans"/>
+              </a:defRPr>
+            </a:pPr>
+            <a:r>
+              <a:t>→ HTTP →</a:t>
+            </a:r>
+          </a:p>
+        </p:txBody>
+      </p:sp>
+      <p:sp>
+        <p:nvSpPr>
+          <p:cNvPr id="12" name="TextBox 11"/>
+          <p:cNvSpPr txBox="1"/>
+          <p:nvPr/>
+        </p:nvSpPr>
+        <p:spPr>
+          <a:xfrm>
+            <a:off x="5943600" y="2103120"/>
+            <a:ext cx="5029200" cy="365760"/>
           </a:xfrm>
           <a:prstGeom prst="rect">
             <a:avLst/>
@@ -9301,43 +12482,7 @@
           <a:lstStyle/>
           <a:p>
             <a:pPr algn="l">
-              <a:defRPr sz="1000" b="1" a:spc="200">
-                <a:solidFill>
-                  <a:srgbClr val="787878"/>
-                </a:solidFill>
-                <a:latin typeface="Open Sauce Sans"/>
-              </a:defRPr>
-            </a:pPr>
-            <a:r>
-              <a:t>LANGUAGE</a:t>
-            </a:r>
-          </a:p>
-        </p:txBody>
-      </p:sp>
-      <p:sp>
-        <p:nvSpPr>
-          <p:cNvPr id="9" name="TextBox 8"/>
-          <p:cNvSpPr txBox="1"/>
-          <p:nvPr/>
-        </p:nvSpPr>
-        <p:spPr>
-          <a:xfrm>
-            <a:off x="4114800" y="2084832"/>
-            <a:ext cx="4572000" cy="365760"/>
-          </a:xfrm>
-          <a:prstGeom prst="rect">
-            <a:avLst/>
-          </a:prstGeom>
-          <a:noFill/>
-        </p:spPr>
-        <p:txBody>
-          <a:bodyPr wrap="square">
-            <a:spAutoFit/>
-          </a:bodyPr>
-          <a:lstStyle/>
-          <a:p>
-            <a:pPr algn="l">
-              <a:defRPr sz="1300" b="0">
+              <a:defRPr sz="1100" b="1" a:spc="300">
                 <a:solidFill>
                   <a:srgbClr val="141414"/>
                 </a:solidFill>
@@ -9345,21 +12490,21 @@
               </a:defRPr>
             </a:pPr>
             <a:r>
-              <a:t>Python 3.10+</a:t>
-            </a:r>
-          </a:p>
-        </p:txBody>
-      </p:sp>
-      <p:sp>
-        <p:nvSpPr>
-          <p:cNvPr id="10" name="Rectangle 9"/>
+              <a:t>FASTAPI BACKEND</a:t>
+            </a:r>
+          </a:p>
+        </p:txBody>
+      </p:sp>
+      <p:sp>
+        <p:nvSpPr>
+          <p:cNvPr id="13" name="Rectangle 12"/>
           <p:cNvSpPr/>
           <p:nvPr/>
         </p:nvSpPr>
         <p:spPr>
           <a:xfrm>
-            <a:off x="731520" y="2468880"/>
-            <a:ext cx="8229600" cy="6350"/>
+            <a:off x="5943600" y="2468880"/>
+            <a:ext cx="5029200" cy="6350"/>
           </a:xfrm>
           <a:prstGeom prst="rect">
             <a:avLst/>
@@ -9395,28 +12540,31 @@
       </p:sp>
       <p:sp>
         <p:nvSpPr>
-          <p:cNvPr id="11" name="TextBox 10"/>
-          <p:cNvSpPr txBox="1"/>
-          <p:nvPr/>
-        </p:nvSpPr>
-        <p:spPr>
-          <a:xfrm>
-            <a:off x="731520" y="2542032"/>
-            <a:ext cx="2743200" cy="365760"/>
-          </a:xfrm>
-          <a:prstGeom prst="rect">
-            <a:avLst/>
-          </a:prstGeom>
-          <a:noFill/>
-        </p:spPr>
-        <p:txBody>
-          <a:bodyPr wrap="square">
-            <a:spAutoFit/>
-          </a:bodyPr>
-          <a:lstStyle/>
-          <a:p>
-            <a:pPr algn="l">
-              <a:defRPr sz="1000" b="1" a:spc="200">
+          <p:cNvPr id="14" name="TextBox 13"/>
+          <p:cNvSpPr txBox="1"/>
+          <p:nvPr/>
+        </p:nvSpPr>
+        <p:spPr>
+          <a:xfrm>
+            <a:off x="5943600" y="2651760"/>
+            <a:ext cx="5029200" cy="1371600"/>
+          </a:xfrm>
+          <a:prstGeom prst="rect">
+            <a:avLst/>
+          </a:prstGeom>
+          <a:noFill/>
+        </p:spPr>
+        <p:txBody>
+          <a:bodyPr wrap="square">
+            <a:spAutoFit/>
+          </a:bodyPr>
+          <a:lstStyle/>
+          <a:p>
+            <a:pPr>
+              <a:spcAft>
+                <a:spcPts val="1600"/>
+              </a:spcAft>
+              <a:defRPr sz="1300">
                 <a:solidFill>
                   <a:srgbClr val="787878"/>
                 </a:solidFill>
@@ -9424,57 +12572,37 @@
               </a:defRPr>
             </a:pPr>
             <a:r>
-              <a:t>UI FRAMEWORK</a:t>
-            </a:r>
-          </a:p>
-        </p:txBody>
-      </p:sp>
-      <p:sp>
-        <p:nvSpPr>
-          <p:cNvPr id="12" name="TextBox 11"/>
-          <p:cNvSpPr txBox="1"/>
-          <p:nvPr/>
-        </p:nvSpPr>
-        <p:spPr>
-          <a:xfrm>
-            <a:off x="4114800" y="2542032"/>
-            <a:ext cx="4572000" cy="365760"/>
-          </a:xfrm>
-          <a:prstGeom prst="rect">
-            <a:avLst/>
-          </a:prstGeom>
-          <a:noFill/>
-        </p:spPr>
-        <p:txBody>
-          <a:bodyPr wrap="square">
-            <a:spAutoFit/>
-          </a:bodyPr>
-          <a:lstStyle/>
-          <a:p>
-            <a:pPr algn="l">
-              <a:defRPr sz="1300" b="0">
-                <a:solidFill>
-                  <a:srgbClr val="141414"/>
-                </a:solidFill>
-                <a:latin typeface="Open Sauce Sans"/>
-              </a:defRPr>
-            </a:pPr>
-            <a:r>
-              <a:t>Streamlit</a:t>
-            </a:r>
-          </a:p>
-        </p:txBody>
-      </p:sp>
-      <p:sp>
-        <p:nvSpPr>
-          <p:cNvPr id="13" name="Rectangle 12"/>
+              <a:t>Pydantic validates all requests. FastAPI routes them to the LangGraph agentic workflow.</a:t>
+            </a:r>
+          </a:p>
+          <a:p>
+            <a:pPr>
+              <a:spcAft>
+                <a:spcPts val="1600"/>
+              </a:spcAft>
+              <a:defRPr sz="1300">
+                <a:solidFill>
+                  <a:srgbClr val="787878"/>
+                </a:solidFill>
+                <a:latin typeface="Open Sauce Sans"/>
+              </a:defRPr>
+            </a:pPr>
+            <a:r>
+              <a:t>REST endpoints: /api/v1/upload and /api/v1/query</a:t>
+            </a:r>
+          </a:p>
+        </p:txBody>
+      </p:sp>
+      <p:sp>
+        <p:nvSpPr>
+          <p:cNvPr id="15" name="Rectangle 14"/>
           <p:cNvSpPr/>
           <p:nvPr/>
         </p:nvSpPr>
         <p:spPr>
           <a:xfrm>
-            <a:off x="731520" y="2926080"/>
-            <a:ext cx="8229600" cy="6350"/>
+            <a:off x="731520" y="4297680"/>
+            <a:ext cx="10515600" cy="6350"/>
           </a:xfrm>
           <a:prstGeom prst="rect">
             <a:avLst/>
@@ -9510,14 +12638,14 @@
       </p:sp>
       <p:sp>
         <p:nvSpPr>
-          <p:cNvPr id="14" name="TextBox 13"/>
-          <p:cNvSpPr txBox="1"/>
-          <p:nvPr/>
-        </p:nvSpPr>
-        <p:spPr>
-          <a:xfrm>
-            <a:off x="731520" y="2999232"/>
-            <a:ext cx="2743200" cy="365760"/>
+          <p:cNvPr id="16" name="TextBox 15"/>
+          <p:cNvSpPr txBox="1"/>
+          <p:nvPr/>
+        </p:nvSpPr>
+        <p:spPr>
+          <a:xfrm>
+            <a:off x="731520" y="4434840"/>
+            <a:ext cx="10058400" cy="365760"/>
           </a:xfrm>
           <a:prstGeom prst="rect">
             <a:avLst/>
@@ -9531,7 +12659,79 @@
           <a:lstStyle/>
           <a:p>
             <a:pPr algn="l">
-              <a:defRPr sz="1000" b="1" a:spc="200">
+              <a:defRPr sz="1100" b="1" a:spc="300">
+                <a:solidFill>
+                  <a:srgbClr val="141414"/>
+                </a:solidFill>
+                <a:latin typeface="Open Sauce Sans"/>
+              </a:defRPr>
+            </a:pPr>
+            <a:r>
+              <a:t>LANGGRAPH AGENTIC WORKFLOW</a:t>
+            </a:r>
+          </a:p>
+        </p:txBody>
+      </p:sp>
+      <p:sp>
+        <p:nvSpPr>
+          <p:cNvPr id="17" name="TextBox 16"/>
+          <p:cNvSpPr txBox="1"/>
+          <p:nvPr/>
+        </p:nvSpPr>
+        <p:spPr>
+          <a:xfrm>
+            <a:off x="731520" y="4846320"/>
+            <a:ext cx="2286000" cy="365760"/>
+          </a:xfrm>
+          <a:prstGeom prst="rect">
+            <a:avLst/>
+          </a:prstGeom>
+          <a:noFill/>
+        </p:spPr>
+        <p:txBody>
+          <a:bodyPr wrap="square">
+            <a:spAutoFit/>
+          </a:bodyPr>
+          <a:lstStyle/>
+          <a:p>
+            <a:pPr algn="ctr">
+              <a:defRPr sz="1100" b="1" a:spc="200">
+                <a:solidFill>
+                  <a:srgbClr val="141414"/>
+                </a:solidFill>
+                <a:latin typeface="Open Sauce Sans"/>
+              </a:defRPr>
+            </a:pPr>
+            <a:r>
+              <a:t>REFINE QUERY</a:t>
+            </a:r>
+          </a:p>
+        </p:txBody>
+      </p:sp>
+      <p:sp>
+        <p:nvSpPr>
+          <p:cNvPr id="18" name="TextBox 17"/>
+          <p:cNvSpPr txBox="1"/>
+          <p:nvPr/>
+        </p:nvSpPr>
+        <p:spPr>
+          <a:xfrm>
+            <a:off x="731520" y="5212080"/>
+            <a:ext cx="2286000" cy="640080"/>
+          </a:xfrm>
+          <a:prstGeom prst="rect">
+            <a:avLst/>
+          </a:prstGeom>
+          <a:noFill/>
+        </p:spPr>
+        <p:txBody>
+          <a:bodyPr wrap="square">
+            <a:spAutoFit/>
+          </a:bodyPr>
+          <a:lstStyle/>
+          <a:p>
+            <a:pPr algn="ctr">
+              <a:defRPr sz="1200" b="0">
                 <a:solidFill>
                   <a:srgbClr val="787878"/>
                 </a:solidFill>
@@ -9539,35 +12739,75 @@
               </a:defRPr>
             </a:pPr>
             <a:r>
-              <a:t>AI ENGINE</a:t>
-            </a:r>
-          </a:p>
-        </p:txBody>
-      </p:sp>
-      <p:sp>
-        <p:nvSpPr>
-          <p:cNvPr id="15" name="TextBox 14"/>
-          <p:cNvSpPr txBox="1"/>
-          <p:nvPr/>
-        </p:nvSpPr>
-        <p:spPr>
-          <a:xfrm>
-            <a:off x="4114800" y="2999232"/>
-            <a:ext cx="4572000" cy="365760"/>
-          </a:xfrm>
-          <a:prstGeom prst="rect">
-            <a:avLst/>
-          </a:prstGeom>
-          <a:noFill/>
-        </p:spPr>
-        <p:txBody>
-          <a:bodyPr wrap="square">
-            <a:spAutoFit/>
-          </a:bodyPr>
-          <a:lstStyle/>
-          <a:p>
-            <a:pPr algn="l">
-              <a:defRPr sz="1300" b="0">
+              <a:t>Optimizes vague</a:t>
+            </a:r>
+            <a:br/>
+            <a:r>
+              <a:t>questions</a:t>
+            </a:r>
+          </a:p>
+        </p:txBody>
+      </p:sp>
+      <p:sp>
+        <p:nvSpPr>
+          <p:cNvPr id="19" name="TextBox 18"/>
+          <p:cNvSpPr txBox="1"/>
+          <p:nvPr/>
+        </p:nvSpPr>
+        <p:spPr>
+          <a:xfrm>
+            <a:off x="3017520" y="4937760"/>
+            <a:ext cx="457200" cy="365760"/>
+          </a:xfrm>
+          <a:prstGeom prst="rect">
+            <a:avLst/>
+          </a:prstGeom>
+          <a:noFill/>
+        </p:spPr>
+        <p:txBody>
+          <a:bodyPr wrap="square">
+            <a:spAutoFit/>
+          </a:bodyPr>
+          <a:lstStyle/>
+          <a:p>
+            <a:pPr algn="ctr">
+              <a:defRPr sz="1400" b="0">
+                <a:solidFill>
+                  <a:srgbClr val="D2D2D2"/>
+                </a:solidFill>
+                <a:latin typeface="Open Sauce Sans"/>
+              </a:defRPr>
+            </a:pPr>
+            <a:r>
+              <a:t>→</a:t>
+            </a:r>
+          </a:p>
+        </p:txBody>
+      </p:sp>
+      <p:sp>
+        <p:nvSpPr>
+          <p:cNvPr id="20" name="TextBox 19"/>
+          <p:cNvSpPr txBox="1"/>
+          <p:nvPr/>
+        </p:nvSpPr>
+        <p:spPr>
+          <a:xfrm>
+            <a:off x="3474720" y="4846320"/>
+            <a:ext cx="2286000" cy="365760"/>
+          </a:xfrm>
+          <a:prstGeom prst="rect">
+            <a:avLst/>
+          </a:prstGeom>
+          <a:noFill/>
+        </p:spPr>
+        <p:txBody>
+          <a:bodyPr wrap="square">
+            <a:spAutoFit/>
+          </a:bodyPr>
+          <a:lstStyle/>
+          <a:p>
+            <a:pPr algn="ctr">
+              <a:defRPr sz="1100" b="1" a:spc="200">
                 <a:solidFill>
                   <a:srgbClr val="141414"/>
                 </a:solidFill>
@@ -9575,78 +12815,35 @@
               </a:defRPr>
             </a:pPr>
             <a:r>
-              <a:t>Google Gemini 2.0 Flash</a:t>
-            </a:r>
-          </a:p>
-        </p:txBody>
-      </p:sp>
-      <p:sp>
-        <p:nvSpPr>
-          <p:cNvPr id="16" name="Rectangle 15"/>
-          <p:cNvSpPr/>
-          <p:nvPr/>
-        </p:nvSpPr>
-        <p:spPr>
-          <a:xfrm>
-            <a:off x="731520" y="3383280"/>
-            <a:ext cx="8229600" cy="6350"/>
-          </a:xfrm>
-          <a:prstGeom prst="rect">
-            <a:avLst/>
-          </a:prstGeom>
-          <a:solidFill>
-            <a:srgbClr val="D2D2D2"/>
-          </a:solidFill>
-          <a:ln>
-            <a:noFill/>
-          </a:ln>
-        </p:spPr>
-        <p:style>
-          <a:lnRef idx="1">
-            <a:schemeClr val="accent1"/>
-          </a:lnRef>
-          <a:fillRef idx="3">
-            <a:schemeClr val="accent1"/>
-          </a:fillRef>
-          <a:effectRef idx="2">
-            <a:schemeClr val="accent1"/>
-          </a:effectRef>
-          <a:fontRef idx="minor">
-            <a:schemeClr val="lt1"/>
-          </a:fontRef>
-        </p:style>
-        <p:txBody>
-          <a:bodyPr rtlCol="0" anchor="ctr"/>
-          <a:lstStyle/>
-          <a:p>
-            <a:pPr algn="ctr"/>
-          </a:p>
-        </p:txBody>
-      </p:sp>
-      <p:sp>
-        <p:nvSpPr>
-          <p:cNvPr id="17" name="TextBox 16"/>
-          <p:cNvSpPr txBox="1"/>
-          <p:nvPr/>
-        </p:nvSpPr>
-        <p:spPr>
-          <a:xfrm>
-            <a:off x="731520" y="3456432"/>
-            <a:ext cx="2743200" cy="365760"/>
-          </a:xfrm>
-          <a:prstGeom prst="rect">
-            <a:avLst/>
-          </a:prstGeom>
-          <a:noFill/>
-        </p:spPr>
-        <p:txBody>
-          <a:bodyPr wrap="square">
-            <a:spAutoFit/>
-          </a:bodyPr>
-          <a:lstStyle/>
-          <a:p>
-            <a:pPr algn="l">
-              <a:defRPr sz="1000" b="1" a:spc="200">
+              <a:t>RETRIEVE</a:t>
+            </a:r>
+          </a:p>
+        </p:txBody>
+      </p:sp>
+      <p:sp>
+        <p:nvSpPr>
+          <p:cNvPr id="21" name="TextBox 20"/>
+          <p:cNvSpPr txBox="1"/>
+          <p:nvPr/>
+        </p:nvSpPr>
+        <p:spPr>
+          <a:xfrm>
+            <a:off x="3474720" y="5212080"/>
+            <a:ext cx="2286000" cy="640080"/>
+          </a:xfrm>
+          <a:prstGeom prst="rect">
+            <a:avLst/>
+          </a:prstGeom>
+          <a:noFill/>
+        </p:spPr>
+        <p:txBody>
+          <a:bodyPr wrap="square">
+            <a:spAutoFit/>
+          </a:bodyPr>
+          <a:lstStyle/>
+          <a:p>
+            <a:pPr algn="ctr">
+              <a:defRPr sz="1200" b="0">
                 <a:solidFill>
                   <a:srgbClr val="787878"/>
                 </a:solidFill>
@@ -9654,35 +12851,75 @@
               </a:defRPr>
             </a:pPr>
             <a:r>
-              <a:t>API SDK</a:t>
-            </a:r>
-          </a:p>
-        </p:txBody>
-      </p:sp>
-      <p:sp>
-        <p:nvSpPr>
-          <p:cNvPr id="18" name="TextBox 17"/>
-          <p:cNvSpPr txBox="1"/>
-          <p:nvPr/>
-        </p:nvSpPr>
-        <p:spPr>
-          <a:xfrm>
-            <a:off x="4114800" y="3456432"/>
-            <a:ext cx="4572000" cy="365760"/>
-          </a:xfrm>
-          <a:prstGeom prst="rect">
-            <a:avLst/>
-          </a:prstGeom>
-          <a:noFill/>
-        </p:spPr>
-        <p:txBody>
-          <a:bodyPr wrap="square">
-            <a:spAutoFit/>
-          </a:bodyPr>
-          <a:lstStyle/>
-          <a:p>
-            <a:pPr algn="l">
-              <a:defRPr sz="1300" b="0">
+              <a:t>Searches FAISS</a:t>
+            </a:r>
+            <a:br/>
+            <a:r>
+              <a:t>vector index</a:t>
+            </a:r>
+          </a:p>
+        </p:txBody>
+      </p:sp>
+      <p:sp>
+        <p:nvSpPr>
+          <p:cNvPr id="22" name="TextBox 21"/>
+          <p:cNvSpPr txBox="1"/>
+          <p:nvPr/>
+        </p:nvSpPr>
+        <p:spPr>
+          <a:xfrm>
+            <a:off x="5760720" y="4937760"/>
+            <a:ext cx="457200" cy="365760"/>
+          </a:xfrm>
+          <a:prstGeom prst="rect">
+            <a:avLst/>
+          </a:prstGeom>
+          <a:noFill/>
+        </p:spPr>
+        <p:txBody>
+          <a:bodyPr wrap="square">
+            <a:spAutoFit/>
+          </a:bodyPr>
+          <a:lstStyle/>
+          <a:p>
+            <a:pPr algn="ctr">
+              <a:defRPr sz="1400" b="0">
+                <a:solidFill>
+                  <a:srgbClr val="D2D2D2"/>
+                </a:solidFill>
+                <a:latin typeface="Open Sauce Sans"/>
+              </a:defRPr>
+            </a:pPr>
+            <a:r>
+              <a:t>→</a:t>
+            </a:r>
+          </a:p>
+        </p:txBody>
+      </p:sp>
+      <p:sp>
+        <p:nvSpPr>
+          <p:cNvPr id="23" name="TextBox 22"/>
+          <p:cNvSpPr txBox="1"/>
+          <p:nvPr/>
+        </p:nvSpPr>
+        <p:spPr>
+          <a:xfrm>
+            <a:off x="6217920" y="4846320"/>
+            <a:ext cx="2286000" cy="365760"/>
+          </a:xfrm>
+          <a:prstGeom prst="rect">
+            <a:avLst/>
+          </a:prstGeom>
+          <a:noFill/>
+        </p:spPr>
+        <p:txBody>
+          <a:bodyPr wrap="square">
+            <a:spAutoFit/>
+          </a:bodyPr>
+          <a:lstStyle/>
+          <a:p>
+            <a:pPr algn="ctr">
+              <a:defRPr sz="1100" b="1" a:spc="200">
                 <a:solidFill>
                   <a:srgbClr val="141414"/>
                 </a:solidFill>
@@ -9690,78 +12927,35 @@
               </a:defRPr>
             </a:pPr>
             <a:r>
-              <a:t>google-genai</a:t>
-            </a:r>
-          </a:p>
-        </p:txBody>
-      </p:sp>
-      <p:sp>
-        <p:nvSpPr>
-          <p:cNvPr id="19" name="Rectangle 18"/>
-          <p:cNvSpPr/>
-          <p:nvPr/>
-        </p:nvSpPr>
-        <p:spPr>
-          <a:xfrm>
-            <a:off x="731520" y="3840480"/>
-            <a:ext cx="8229600" cy="6350"/>
-          </a:xfrm>
-          <a:prstGeom prst="rect">
-            <a:avLst/>
-          </a:prstGeom>
-          <a:solidFill>
-            <a:srgbClr val="D2D2D2"/>
-          </a:solidFill>
-          <a:ln>
-            <a:noFill/>
-          </a:ln>
-        </p:spPr>
-        <p:style>
-          <a:lnRef idx="1">
-            <a:schemeClr val="accent1"/>
-          </a:lnRef>
-          <a:fillRef idx="3">
-            <a:schemeClr val="accent1"/>
-          </a:fillRef>
-          <a:effectRef idx="2">
-            <a:schemeClr val="accent1"/>
-          </a:effectRef>
-          <a:fontRef idx="minor">
-            <a:schemeClr val="lt1"/>
-          </a:fontRef>
-        </p:style>
-        <p:txBody>
-          <a:bodyPr rtlCol="0" anchor="ctr"/>
-          <a:lstStyle/>
-          <a:p>
-            <a:pPr algn="ctr"/>
-          </a:p>
-        </p:txBody>
-      </p:sp>
-      <p:sp>
-        <p:nvSpPr>
-          <p:cNvPr id="20" name="TextBox 19"/>
-          <p:cNvSpPr txBox="1"/>
-          <p:nvPr/>
-        </p:nvSpPr>
-        <p:spPr>
-          <a:xfrm>
-            <a:off x="731520" y="3913632"/>
-            <a:ext cx="2743200" cy="365760"/>
-          </a:xfrm>
-          <a:prstGeom prst="rect">
-            <a:avLst/>
-          </a:prstGeom>
-          <a:noFill/>
-        </p:spPr>
-        <p:txBody>
-          <a:bodyPr wrap="square">
-            <a:spAutoFit/>
-          </a:bodyPr>
-          <a:lstStyle/>
-          <a:p>
-            <a:pPr algn="l">
-              <a:defRPr sz="1000" b="1" a:spc="200">
+              <a:t>GENERATE</a:t>
+            </a:r>
+          </a:p>
+        </p:txBody>
+      </p:sp>
+      <p:sp>
+        <p:nvSpPr>
+          <p:cNvPr id="24" name="TextBox 23"/>
+          <p:cNvSpPr txBox="1"/>
+          <p:nvPr/>
+        </p:nvSpPr>
+        <p:spPr>
+          <a:xfrm>
+            <a:off x="6217920" y="5212080"/>
+            <a:ext cx="2286000" cy="640080"/>
+          </a:xfrm>
+          <a:prstGeom prst="rect">
+            <a:avLst/>
+          </a:prstGeom>
+          <a:noFill/>
+        </p:spPr>
+        <p:txBody>
+          <a:bodyPr wrap="square">
+            <a:spAutoFit/>
+          </a:bodyPr>
+          <a:lstStyle/>
+          <a:p>
+            <a:pPr algn="ctr">
+              <a:defRPr sz="1200" b="0">
                 <a:solidFill>
                   <a:srgbClr val="787878"/>
                 </a:solidFill>
@@ -9769,35 +12963,75 @@
               </a:defRPr>
             </a:pPr>
             <a:r>
-              <a:t>RESILIENCE</a:t>
-            </a:r>
-          </a:p>
-        </p:txBody>
-      </p:sp>
-      <p:sp>
-        <p:nvSpPr>
-          <p:cNvPr id="21" name="TextBox 20"/>
-          <p:cNvSpPr txBox="1"/>
-          <p:nvPr/>
-        </p:nvSpPr>
-        <p:spPr>
-          <a:xfrm>
-            <a:off x="4114800" y="3913632"/>
-            <a:ext cx="4572000" cy="365760"/>
-          </a:xfrm>
-          <a:prstGeom prst="rect">
-            <a:avLst/>
-          </a:prstGeom>
-          <a:noFill/>
-        </p:spPr>
-        <p:txBody>
-          <a:bodyPr wrap="square">
-            <a:spAutoFit/>
-          </a:bodyPr>
-          <a:lstStyle/>
-          <a:p>
-            <a:pPr algn="l">
-              <a:defRPr sz="1300" b="0">
+              <a:t>Gemini answers</a:t>
+            </a:r>
+            <a:br/>
+            <a:r>
+              <a:t>from context</a:t>
+            </a:r>
+          </a:p>
+        </p:txBody>
+      </p:sp>
+      <p:sp>
+        <p:nvSpPr>
+          <p:cNvPr id="25" name="TextBox 24"/>
+          <p:cNvSpPr txBox="1"/>
+          <p:nvPr/>
+        </p:nvSpPr>
+        <p:spPr>
+          <a:xfrm>
+            <a:off x="8503920" y="4937760"/>
+            <a:ext cx="457200" cy="365760"/>
+          </a:xfrm>
+          <a:prstGeom prst="rect">
+            <a:avLst/>
+          </a:prstGeom>
+          <a:noFill/>
+        </p:spPr>
+        <p:txBody>
+          <a:bodyPr wrap="square">
+            <a:spAutoFit/>
+          </a:bodyPr>
+          <a:lstStyle/>
+          <a:p>
+            <a:pPr algn="ctr">
+              <a:defRPr sz="1400" b="0">
+                <a:solidFill>
+                  <a:srgbClr val="D2D2D2"/>
+                </a:solidFill>
+                <a:latin typeface="Open Sauce Sans"/>
+              </a:defRPr>
+            </a:pPr>
+            <a:r>
+              <a:t>→</a:t>
+            </a:r>
+          </a:p>
+        </p:txBody>
+      </p:sp>
+      <p:sp>
+        <p:nvSpPr>
+          <p:cNvPr id="26" name="TextBox 25"/>
+          <p:cNvSpPr txBox="1"/>
+          <p:nvPr/>
+        </p:nvSpPr>
+        <p:spPr>
+          <a:xfrm>
+            <a:off x="8961120" y="4846320"/>
+            <a:ext cx="2286000" cy="365760"/>
+          </a:xfrm>
+          <a:prstGeom prst="rect">
+            <a:avLst/>
+          </a:prstGeom>
+          <a:noFill/>
+        </p:spPr>
+        <p:txBody>
+          <a:bodyPr wrap="square">
+            <a:spAutoFit/>
+          </a:bodyPr>
+          <a:lstStyle/>
+          <a:p>
+            <a:pPr algn="ctr">
+              <a:defRPr sz="1100" b="1" a:spc="200">
                 <a:solidFill>
                   <a:srgbClr val="141414"/>
                 </a:solidFill>
@@ -9805,78 +13039,35 @@
               </a:defRPr>
             </a:pPr>
             <a:r>
-              <a:t>tenacity</a:t>
-            </a:r>
-          </a:p>
-        </p:txBody>
-      </p:sp>
-      <p:sp>
-        <p:nvSpPr>
-          <p:cNvPr id="22" name="Rectangle 21"/>
-          <p:cNvSpPr/>
-          <p:nvPr/>
-        </p:nvSpPr>
-        <p:spPr>
-          <a:xfrm>
-            <a:off x="731520" y="4297680"/>
-            <a:ext cx="8229600" cy="6350"/>
-          </a:xfrm>
-          <a:prstGeom prst="rect">
-            <a:avLst/>
-          </a:prstGeom>
-          <a:solidFill>
-            <a:srgbClr val="D2D2D2"/>
-          </a:solidFill>
-          <a:ln>
-            <a:noFill/>
-          </a:ln>
-        </p:spPr>
-        <p:style>
-          <a:lnRef idx="1">
-            <a:schemeClr val="accent1"/>
-          </a:lnRef>
-          <a:fillRef idx="3">
-            <a:schemeClr val="accent1"/>
-          </a:fillRef>
-          <a:effectRef idx="2">
-            <a:schemeClr val="accent1"/>
-          </a:effectRef>
-          <a:fontRef idx="minor">
-            <a:schemeClr val="lt1"/>
-          </a:fontRef>
-        </p:style>
-        <p:txBody>
-          <a:bodyPr rtlCol="0" anchor="ctr"/>
-          <a:lstStyle/>
-          <a:p>
-            <a:pPr algn="ctr"/>
-          </a:p>
-        </p:txBody>
-      </p:sp>
-      <p:sp>
-        <p:nvSpPr>
-          <p:cNvPr id="23" name="TextBox 22"/>
-          <p:cNvSpPr txBox="1"/>
-          <p:nvPr/>
-        </p:nvSpPr>
-        <p:spPr>
-          <a:xfrm>
-            <a:off x="731520" y="4370832"/>
-            <a:ext cx="2743200" cy="365760"/>
-          </a:xfrm>
-          <a:prstGeom prst="rect">
-            <a:avLst/>
-          </a:prstGeom>
-          <a:noFill/>
-        </p:spPr>
-        <p:txBody>
-          <a:bodyPr wrap="square">
-            <a:spAutoFit/>
-          </a:bodyPr>
-          <a:lstStyle/>
-          <a:p>
-            <a:pPr algn="l">
-              <a:defRPr sz="1000" b="1" a:spc="200">
+              <a:t>CONFIDENCE</a:t>
+            </a:r>
+          </a:p>
+        </p:txBody>
+      </p:sp>
+      <p:sp>
+        <p:nvSpPr>
+          <p:cNvPr id="27" name="TextBox 26"/>
+          <p:cNvSpPr txBox="1"/>
+          <p:nvPr/>
+        </p:nvSpPr>
+        <p:spPr>
+          <a:xfrm>
+            <a:off x="8961120" y="5212080"/>
+            <a:ext cx="2286000" cy="640080"/>
+          </a:xfrm>
+          <a:prstGeom prst="rect">
+            <a:avLst/>
+          </a:prstGeom>
+          <a:noFill/>
+        </p:spPr>
+        <p:txBody>
+          <a:bodyPr wrap="square">
+            <a:spAutoFit/>
+          </a:bodyPr>
+          <a:lstStyle/>
+          <a:p>
+            <a:pPr algn="ctr">
+              <a:defRPr sz="1200" b="0">
                 <a:solidFill>
                   <a:srgbClr val="787878"/>
                 </a:solidFill>
@@ -9884,114 +13075,39 @@
               </a:defRPr>
             </a:pPr>
             <a:r>
-              <a:t>SECURITY</a:t>
-            </a:r>
-          </a:p>
-        </p:txBody>
-      </p:sp>
-      <p:sp>
-        <p:nvSpPr>
-          <p:cNvPr id="24" name="TextBox 23"/>
-          <p:cNvSpPr txBox="1"/>
-          <p:nvPr/>
-        </p:nvSpPr>
-        <p:spPr>
-          <a:xfrm>
-            <a:off x="4114800" y="4370832"/>
-            <a:ext cx="4572000" cy="365760"/>
-          </a:xfrm>
-          <a:prstGeom prst="rect">
-            <a:avLst/>
-          </a:prstGeom>
-          <a:noFill/>
-        </p:spPr>
-        <p:txBody>
-          <a:bodyPr wrap="square">
-            <a:spAutoFit/>
-          </a:bodyPr>
-          <a:lstStyle/>
-          <a:p>
-            <a:pPr algn="l">
-              <a:defRPr sz="1300" b="0">
-                <a:solidFill>
-                  <a:srgbClr val="141414"/>
-                </a:solidFill>
-                <a:latin typeface="Open Sauce Sans"/>
-              </a:defRPr>
-            </a:pPr>
-            <a:r>
-              <a:t>python-dotenv</a:t>
-            </a:r>
-          </a:p>
-        </p:txBody>
-      </p:sp>
-      <p:sp>
-        <p:nvSpPr>
-          <p:cNvPr id="25" name="Rectangle 24"/>
-          <p:cNvSpPr/>
-          <p:nvPr/>
-        </p:nvSpPr>
-        <p:spPr>
-          <a:xfrm>
-            <a:off x="731520" y="4754880"/>
-            <a:ext cx="8229600" cy="6350"/>
-          </a:xfrm>
-          <a:prstGeom prst="rect">
-            <a:avLst/>
-          </a:prstGeom>
-          <a:solidFill>
-            <a:srgbClr val="D2D2D2"/>
-          </a:solidFill>
-          <a:ln>
-            <a:noFill/>
-          </a:ln>
-        </p:spPr>
-        <p:style>
-          <a:lnRef idx="1">
-            <a:schemeClr val="accent1"/>
-          </a:lnRef>
-          <a:fillRef idx="3">
-            <a:schemeClr val="accent1"/>
-          </a:fillRef>
-          <a:effectRef idx="2">
-            <a:schemeClr val="accent1"/>
-          </a:effectRef>
-          <a:fontRef idx="minor">
-            <a:schemeClr val="lt1"/>
-          </a:fontRef>
-        </p:style>
-        <p:txBody>
-          <a:bodyPr rtlCol="0" anchor="ctr"/>
-          <a:lstStyle/>
-          <a:p>
-            <a:pPr algn="ctr"/>
-          </a:p>
-        </p:txBody>
-      </p:sp>
-      <p:sp>
-        <p:nvSpPr>
-          <p:cNvPr id="26" name="TextBox 25"/>
-          <p:cNvSpPr txBox="1"/>
-          <p:nvPr/>
-        </p:nvSpPr>
-        <p:spPr>
-          <a:xfrm>
-            <a:off x="731520" y="4828032"/>
-            <a:ext cx="2743200" cy="365760"/>
-          </a:xfrm>
-          <a:prstGeom prst="rect">
-            <a:avLst/>
-          </a:prstGeom>
-          <a:noFill/>
-        </p:spPr>
-        <p:txBody>
-          <a:bodyPr wrap="square">
-            <a:spAutoFit/>
-          </a:bodyPr>
-          <a:lstStyle/>
-          <a:p>
-            <a:pPr algn="l">
-              <a:defRPr sz="1000" b="1" a:spc="200">
+              <a:t>Self-evaluates</a:t>
+            </a:r>
+            <a:br/>
+            <a:r>
+              <a:t>groundedness</a:t>
+            </a:r>
+          </a:p>
+        </p:txBody>
+      </p:sp>
+      <p:sp>
+        <p:nvSpPr>
+          <p:cNvPr id="28" name="TextBox 27"/>
+          <p:cNvSpPr txBox="1"/>
+          <p:nvPr/>
+        </p:nvSpPr>
+        <p:spPr>
+          <a:xfrm>
+            <a:off x="731520" y="5852160"/>
+            <a:ext cx="10058400" cy="274320"/>
+          </a:xfrm>
+          <a:prstGeom prst="rect">
+            <a:avLst/>
+          </a:prstGeom>
+          <a:noFill/>
+        </p:spPr>
+        <p:txBody>
+          <a:bodyPr wrap="square">
+            <a:spAutoFit/>
+          </a:bodyPr>
+          <a:lstStyle/>
+          <a:p>
+            <a:pPr algn="ctr">
+              <a:defRPr sz="900" b="1" a:spc="200">
                 <a:solidFill>
                   <a:srgbClr val="787878"/>
                 </a:solidFill>
@@ -9999,317 +13115,8 @@
               </a:defRPr>
             </a:pPr>
             <a:r>
-              <a:t>CONFIG</a:t>
-            </a:r>
-          </a:p>
-        </p:txBody>
-      </p:sp>
-      <p:sp>
-        <p:nvSpPr>
-          <p:cNvPr id="27" name="TextBox 26"/>
-          <p:cNvSpPr txBox="1"/>
-          <p:nvPr/>
-        </p:nvSpPr>
-        <p:spPr>
-          <a:xfrm>
-            <a:off x="4114800" y="4828032"/>
-            <a:ext cx="4572000" cy="365760"/>
-          </a:xfrm>
-          <a:prstGeom prst="rect">
-            <a:avLst/>
-          </a:prstGeom>
-          <a:noFill/>
-        </p:spPr>
-        <p:txBody>
-          <a:bodyPr wrap="square">
-            <a:spAutoFit/>
-          </a:bodyPr>
-          <a:lstStyle/>
-          <a:p>
-            <a:pPr algn="l">
-              <a:defRPr sz="1300" b="0">
-                <a:solidFill>
-                  <a:srgbClr val="141414"/>
-                </a:solidFill>
-                <a:latin typeface="Open Sauce Sans"/>
-              </a:defRPr>
-            </a:pPr>
-            <a:r>
-              <a:t>config.py</a:t>
-            </a:r>
-          </a:p>
-        </p:txBody>
-      </p:sp>
-      <p:sp>
-        <p:nvSpPr>
-          <p:cNvPr id="28" name="Rectangle 27"/>
-          <p:cNvSpPr/>
-          <p:nvPr/>
-        </p:nvSpPr>
-        <p:spPr>
-          <a:xfrm>
-            <a:off x="731520" y="5212080"/>
-            <a:ext cx="8229600" cy="6350"/>
-          </a:xfrm>
-          <a:prstGeom prst="rect">
-            <a:avLst/>
-          </a:prstGeom>
-          <a:solidFill>
-            <a:srgbClr val="D2D2D2"/>
-          </a:solidFill>
-          <a:ln>
-            <a:noFill/>
-          </a:ln>
-        </p:spPr>
-        <p:style>
-          <a:lnRef idx="1">
-            <a:schemeClr val="accent1"/>
-          </a:lnRef>
-          <a:fillRef idx="3">
-            <a:schemeClr val="accent1"/>
-          </a:fillRef>
-          <a:effectRef idx="2">
-            <a:schemeClr val="accent1"/>
-          </a:effectRef>
-          <a:fontRef idx="minor">
-            <a:schemeClr val="lt1"/>
-          </a:fontRef>
-        </p:style>
-        <p:txBody>
-          <a:bodyPr rtlCol="0" anchor="ctr"/>
-          <a:lstStyle/>
-          <a:p>
-            <a:pPr algn="ctr"/>
-          </a:p>
-        </p:txBody>
-      </p:sp>
-      <p:sp>
-        <p:nvSpPr>
-          <p:cNvPr id="29" name="TextBox 28"/>
-          <p:cNvSpPr txBox="1"/>
-          <p:nvPr/>
-        </p:nvSpPr>
-        <p:spPr>
-          <a:xfrm>
-            <a:off x="731520" y="5285232"/>
-            <a:ext cx="2743200" cy="365760"/>
-          </a:xfrm>
-          <a:prstGeom prst="rect">
-            <a:avLst/>
-          </a:prstGeom>
-          <a:noFill/>
-        </p:spPr>
-        <p:txBody>
-          <a:bodyPr wrap="square">
-            <a:spAutoFit/>
-          </a:bodyPr>
-          <a:lstStyle/>
-          <a:p>
-            <a:pPr algn="l">
-              <a:defRPr sz="1000" b="1" a:spc="200">
-                <a:solidFill>
-                  <a:srgbClr val="787878"/>
-                </a:solidFill>
-                <a:latin typeface="Open Sauce Sans"/>
-              </a:defRPr>
-            </a:pPr>
-            <a:r>
-              <a:t>TESTING</a:t>
-            </a:r>
-          </a:p>
-        </p:txBody>
-      </p:sp>
-      <p:sp>
-        <p:nvSpPr>
-          <p:cNvPr id="30" name="TextBox 29"/>
-          <p:cNvSpPr txBox="1"/>
-          <p:nvPr/>
-        </p:nvSpPr>
-        <p:spPr>
-          <a:xfrm>
-            <a:off x="4114800" y="5285232"/>
-            <a:ext cx="4572000" cy="365760"/>
-          </a:xfrm>
-          <a:prstGeom prst="rect">
-            <a:avLst/>
-          </a:prstGeom>
-          <a:noFill/>
-        </p:spPr>
-        <p:txBody>
-          <a:bodyPr wrap="square">
-            <a:spAutoFit/>
-          </a:bodyPr>
-          <a:lstStyle/>
-          <a:p>
-            <a:pPr algn="l">
-              <a:defRPr sz="1300" b="0">
-                <a:solidFill>
-                  <a:srgbClr val="141414"/>
-                </a:solidFill>
-                <a:latin typeface="Open Sauce Sans"/>
-              </a:defRPr>
-            </a:pPr>
-            <a:r>
-              <a:t>pytest + unittest.mock</a:t>
-            </a:r>
-          </a:p>
-        </p:txBody>
-      </p:sp>
-      <p:sp>
-        <p:nvSpPr>
-          <p:cNvPr id="31" name="Rectangle 30"/>
-          <p:cNvSpPr/>
-          <p:nvPr/>
-        </p:nvSpPr>
-        <p:spPr>
-          <a:xfrm>
-            <a:off x="731520" y="5669280"/>
-            <a:ext cx="8229600" cy="6350"/>
-          </a:xfrm>
-          <a:prstGeom prst="rect">
-            <a:avLst/>
-          </a:prstGeom>
-          <a:solidFill>
-            <a:srgbClr val="D2D2D2"/>
-          </a:solidFill>
-          <a:ln>
-            <a:noFill/>
-          </a:ln>
-        </p:spPr>
-        <p:style>
-          <a:lnRef idx="1">
-            <a:schemeClr val="accent1"/>
-          </a:lnRef>
-          <a:fillRef idx="3">
-            <a:schemeClr val="accent1"/>
-          </a:fillRef>
-          <a:effectRef idx="2">
-            <a:schemeClr val="accent1"/>
-          </a:effectRef>
-          <a:fontRef idx="minor">
-            <a:schemeClr val="lt1"/>
-          </a:fontRef>
-        </p:style>
-        <p:txBody>
-          <a:bodyPr rtlCol="0" anchor="ctr"/>
-          <a:lstStyle/>
-          <a:p>
-            <a:pPr algn="ctr"/>
-          </a:p>
-        </p:txBody>
-      </p:sp>
-      <p:sp>
-        <p:nvSpPr>
-          <p:cNvPr id="32" name="TextBox 31"/>
-          <p:cNvSpPr txBox="1"/>
-          <p:nvPr/>
-        </p:nvSpPr>
-        <p:spPr>
-          <a:xfrm>
-            <a:off x="731520" y="5742432"/>
-            <a:ext cx="2743200" cy="365760"/>
-          </a:xfrm>
-          <a:prstGeom prst="rect">
-            <a:avLst/>
-          </a:prstGeom>
-          <a:noFill/>
-        </p:spPr>
-        <p:txBody>
-          <a:bodyPr wrap="square">
-            <a:spAutoFit/>
-          </a:bodyPr>
-          <a:lstStyle/>
-          <a:p>
-            <a:pPr algn="l">
-              <a:defRPr sz="1000" b="1" a:spc="200">
-                <a:solidFill>
-                  <a:srgbClr val="787878"/>
-                </a:solidFill>
-                <a:latin typeface="Open Sauce Sans"/>
-              </a:defRPr>
-            </a:pPr>
-            <a:r>
-              <a:t>VERSION CONTROL</a:t>
-            </a:r>
-          </a:p>
-        </p:txBody>
-      </p:sp>
-      <p:sp>
-        <p:nvSpPr>
-          <p:cNvPr id="33" name="TextBox 32"/>
-          <p:cNvSpPr txBox="1"/>
-          <p:nvPr/>
-        </p:nvSpPr>
-        <p:spPr>
-          <a:xfrm>
-            <a:off x="4114800" y="5742432"/>
-            <a:ext cx="4572000" cy="365760"/>
-          </a:xfrm>
-          <a:prstGeom prst="rect">
-            <a:avLst/>
-          </a:prstGeom>
-          <a:noFill/>
-        </p:spPr>
-        <p:txBody>
-          <a:bodyPr wrap="square">
-            <a:spAutoFit/>
-          </a:bodyPr>
-          <a:lstStyle/>
-          <a:p>
-            <a:pPr algn="l">
-              <a:defRPr sz="1300" b="0">
-                <a:solidFill>
-                  <a:srgbClr val="141414"/>
-                </a:solidFill>
-                <a:latin typeface="Open Sauce Sans"/>
-              </a:defRPr>
-            </a:pPr>
-            <a:r>
-              <a:t>Git</a:t>
-            </a:r>
-          </a:p>
-        </p:txBody>
-      </p:sp>
-      <p:sp>
-        <p:nvSpPr>
-          <p:cNvPr id="34" name="Rectangle 33"/>
-          <p:cNvSpPr/>
-          <p:nvPr/>
-        </p:nvSpPr>
-        <p:spPr>
-          <a:xfrm>
-            <a:off x="731520" y="6126480"/>
-            <a:ext cx="8229600" cy="6350"/>
-          </a:xfrm>
-          <a:prstGeom prst="rect">
-            <a:avLst/>
-          </a:prstGeom>
-          <a:solidFill>
-            <a:srgbClr val="D2D2D2"/>
-          </a:solidFill>
-          <a:ln>
-            <a:noFill/>
-          </a:ln>
-        </p:spPr>
-        <p:style>
-          <a:lnRef idx="1">
-            <a:schemeClr val="accent1"/>
-          </a:lnRef>
-          <a:fillRef idx="3">
-            <a:schemeClr val="accent1"/>
-          </a:fillRef>
-          <a:effectRef idx="2">
-            <a:schemeClr val="accent1"/>
-          </a:effectRef>
-          <a:fontRef idx="minor">
-            <a:schemeClr val="lt1"/>
-          </a:fontRef>
-        </p:style>
-        <p:txBody>
-          <a:bodyPr rtlCol="0" anchor="ctr"/>
-          <a:lstStyle/>
-          <a:p>
-            <a:pPr algn="ctr"/>
+              <a:t>CONTAINERIZED  WITH  DOCKER  COMPOSE  •  ONE  COMMAND  DEPLOYMENT</a:t>
+            </a:r>
           </a:p>
         </p:txBody>
       </p:sp>
@@ -10485,7 +13292,7 @@
               </a:defRPr>
             </a:pPr>
             <a:r>
-              <a:t>Testing</a:t>
+              <a:t>Full Architecture</a:t>
             </a:r>
           </a:p>
         </p:txBody>
@@ -10499,7 +13306,7 @@
         <p:spPr>
           <a:xfrm>
             <a:off x="731520" y="1417320"/>
-            <a:ext cx="914400" cy="9525"/>
+            <a:ext cx="2286000" cy="9525"/>
           </a:xfrm>
           <a:prstGeom prst="rect">
             <a:avLst/>
@@ -10541,8 +13348,8 @@
         </p:nvSpPr>
         <p:spPr>
           <a:xfrm>
-            <a:off x="731520" y="2011680"/>
-            <a:ext cx="3657600" cy="914400"/>
+            <a:off x="731520" y="1828800"/>
+            <a:ext cx="10058400" cy="274320"/>
           </a:xfrm>
           <a:prstGeom prst="rect">
             <a:avLst/>
@@ -10556,7 +13363,7 @@
           <a:lstStyle/>
           <a:p>
             <a:pPr algn="l">
-              <a:defRPr sz="8000" b="0">
+              <a:defRPr sz="900" b="1" a:spc="300">
                 <a:solidFill>
                   <a:srgbClr val="141414"/>
                 </a:solidFill>
@@ -10564,93 +13371,21 @@
               </a:defRPr>
             </a:pPr>
             <a:r>
-              <a:t>44</a:t>
-            </a:r>
-          </a:p>
-        </p:txBody>
-      </p:sp>
-      <p:sp>
-        <p:nvSpPr>
-          <p:cNvPr id="8" name="TextBox 7"/>
-          <p:cNvSpPr txBox="1"/>
-          <p:nvPr/>
-        </p:nvSpPr>
-        <p:spPr>
-          <a:xfrm>
-            <a:off x="731520" y="3291840"/>
-            <a:ext cx="3657600" cy="365760"/>
-          </a:xfrm>
-          <a:prstGeom prst="rect">
-            <a:avLst/>
-          </a:prstGeom>
-          <a:noFill/>
-        </p:spPr>
-        <p:txBody>
-          <a:bodyPr wrap="square">
-            <a:spAutoFit/>
-          </a:bodyPr>
-          <a:lstStyle/>
-          <a:p>
-            <a:pPr algn="l">
-              <a:defRPr sz="1100" b="1" a:spc="300">
-                <a:solidFill>
-                  <a:srgbClr val="141414"/>
-                </a:solidFill>
-                <a:latin typeface="Open Sauce Sans"/>
-              </a:defRPr>
-            </a:pPr>
-            <a:r>
-              <a:t>AUTOMATED UNIT TESTS</a:t>
-            </a:r>
-          </a:p>
-        </p:txBody>
-      </p:sp>
-      <p:sp>
-        <p:nvSpPr>
-          <p:cNvPr id="9" name="TextBox 8"/>
-          <p:cNvSpPr txBox="1"/>
-          <p:nvPr/>
-        </p:nvSpPr>
-        <p:spPr>
-          <a:xfrm>
-            <a:off x="731520" y="3749039"/>
-            <a:ext cx="3657600" cy="365760"/>
-          </a:xfrm>
-          <a:prstGeom prst="rect">
-            <a:avLst/>
-          </a:prstGeom>
-          <a:noFill/>
-        </p:spPr>
-        <p:txBody>
-          <a:bodyPr wrap="square">
-            <a:spAutoFit/>
-          </a:bodyPr>
-          <a:lstStyle/>
-          <a:p>
-            <a:pPr algn="l">
-              <a:defRPr sz="1000" b="0" a:spc="200">
-                <a:solidFill>
-                  <a:srgbClr val="787878"/>
-                </a:solidFill>
-                <a:latin typeface="Open Sauce Sans"/>
-              </a:defRPr>
-            </a:pPr>
-            <a:r>
-              <a:t>ALL PASSING  •  UNDER 1 SECOND</a:t>
-            </a:r>
-          </a:p>
-        </p:txBody>
-      </p:sp>
-      <p:sp>
-        <p:nvSpPr>
-          <p:cNvPr id="10" name="Rectangle 9"/>
+              <a:t>FILE STRUCTURE</a:t>
+            </a:r>
+          </a:p>
+        </p:txBody>
+      </p:sp>
+      <p:sp>
+        <p:nvSpPr>
+          <p:cNvPr id="8" name="Rectangle 7"/>
           <p:cNvSpPr/>
           <p:nvPr/>
         </p:nvSpPr>
         <p:spPr>
           <a:xfrm>
-            <a:off x="5486400" y="2103120"/>
-            <a:ext cx="5486400" cy="6350"/>
+            <a:off x="731520" y="2286000"/>
+            <a:ext cx="10058400" cy="6350"/>
           </a:xfrm>
           <a:prstGeom prst="rect">
             <a:avLst/>
@@ -10686,14 +13421,14 @@
       </p:sp>
       <p:sp>
         <p:nvSpPr>
-          <p:cNvPr id="11" name="TextBox 10"/>
-          <p:cNvSpPr txBox="1"/>
-          <p:nvPr/>
-        </p:nvSpPr>
-        <p:spPr>
-          <a:xfrm>
-            <a:off x="5486400" y="2377440"/>
-            <a:ext cx="3200400" cy="365760"/>
+          <p:cNvPr id="9" name="TextBox 8"/>
+          <p:cNvSpPr txBox="1"/>
+          <p:nvPr/>
+        </p:nvSpPr>
+        <p:spPr>
+          <a:xfrm>
+            <a:off x="731520" y="2340864"/>
+            <a:ext cx="3657600" cy="320040"/>
           </a:xfrm>
           <a:prstGeom prst="rect">
             <a:avLst/>
@@ -10707,7 +13442,7 @@
           <a:lstStyle/>
           <a:p>
             <a:pPr algn="l">
-              <a:defRPr sz="1400" b="1">
+              <a:defRPr sz="1200" b="1">
                 <a:solidFill>
                   <a:srgbClr val="141414"/>
                 </a:solidFill>
@@ -10715,57 +13450,21 @@
               </a:defRPr>
             </a:pPr>
             <a:r>
-              <a:t>test_validation.py</a:t>
-            </a:r>
-          </a:p>
-        </p:txBody>
-      </p:sp>
-      <p:sp>
-        <p:nvSpPr>
-          <p:cNvPr id="12" name="TextBox 11"/>
-          <p:cNvSpPr txBox="1"/>
-          <p:nvPr/>
-        </p:nvSpPr>
-        <p:spPr>
-          <a:xfrm>
-            <a:off x="9144000" y="2377440"/>
-            <a:ext cx="2286000" cy="365760"/>
-          </a:xfrm>
-          <a:prstGeom prst="rect">
-            <a:avLst/>
-          </a:prstGeom>
-          <a:noFill/>
-        </p:spPr>
-        <p:txBody>
-          <a:bodyPr wrap="square">
-            <a:spAutoFit/>
-          </a:bodyPr>
-          <a:lstStyle/>
-          <a:p>
-            <a:pPr algn="r">
-              <a:defRPr sz="1300" b="0">
-                <a:solidFill>
-                  <a:srgbClr val="787878"/>
-                </a:solidFill>
-                <a:latin typeface="Open Sauce Sans"/>
-              </a:defRPr>
-            </a:pPr>
-            <a:r>
-              <a:t>14 tests</a:t>
-            </a:r>
-          </a:p>
-        </p:txBody>
-      </p:sp>
-      <p:sp>
-        <p:nvSpPr>
-          <p:cNvPr id="13" name="TextBox 12"/>
-          <p:cNvSpPr txBox="1"/>
-          <p:nvPr/>
-        </p:nvSpPr>
-        <p:spPr>
-          <a:xfrm>
-            <a:off x="5486400" y="2788920"/>
-            <a:ext cx="5486400" cy="457200"/>
+              <a:t>app.py</a:t>
+            </a:r>
+          </a:p>
+        </p:txBody>
+      </p:sp>
+      <p:sp>
+        <p:nvSpPr>
+          <p:cNvPr id="10" name="TextBox 9"/>
+          <p:cNvSpPr txBox="1"/>
+          <p:nvPr/>
+        </p:nvSpPr>
+        <p:spPr>
+          <a:xfrm>
+            <a:off x="5029200" y="2340864"/>
+            <a:ext cx="5943600" cy="320040"/>
           </a:xfrm>
           <a:prstGeom prst="rect">
             <a:avLst/>
@@ -10787,21 +13486,21 @@
               </a:defRPr>
             </a:pPr>
             <a:r>
-              <a:t>Empty inputs, whitespace, length boundaries, return types</a:t>
-            </a:r>
-          </a:p>
-        </p:txBody>
-      </p:sp>
-      <p:sp>
-        <p:nvSpPr>
-          <p:cNvPr id="14" name="Rectangle 13"/>
+              <a:t>Streamlit frontend (UI + HTTP client)</a:t>
+            </a:r>
+          </a:p>
+        </p:txBody>
+      </p:sp>
+      <p:sp>
+        <p:nvSpPr>
+          <p:cNvPr id="11" name="Rectangle 10"/>
           <p:cNvSpPr/>
           <p:nvPr/>
         </p:nvSpPr>
         <p:spPr>
           <a:xfrm>
-            <a:off x="5486400" y="3337560"/>
-            <a:ext cx="5486400" cy="6350"/>
+            <a:off x="731520" y="2670048"/>
+            <a:ext cx="10058400" cy="6350"/>
           </a:xfrm>
           <a:prstGeom prst="rect">
             <a:avLst/>
@@ -10837,14 +13536,14 @@
       </p:sp>
       <p:sp>
         <p:nvSpPr>
-          <p:cNvPr id="15" name="TextBox 14"/>
-          <p:cNvSpPr txBox="1"/>
-          <p:nvPr/>
-        </p:nvSpPr>
-        <p:spPr>
-          <a:xfrm>
-            <a:off x="5486400" y="3566160"/>
-            <a:ext cx="3200400" cy="365760"/>
+          <p:cNvPr id="12" name="TextBox 11"/>
+          <p:cNvSpPr txBox="1"/>
+          <p:nvPr/>
+        </p:nvSpPr>
+        <p:spPr>
+          <a:xfrm>
+            <a:off x="731520" y="2724912"/>
+            <a:ext cx="3657600" cy="320040"/>
           </a:xfrm>
           <a:prstGeom prst="rect">
             <a:avLst/>
@@ -10858,7 +13557,7 @@
           <a:lstStyle/>
           <a:p>
             <a:pPr algn="l">
-              <a:defRPr sz="1400" b="1">
+              <a:defRPr sz="1200" b="1">
                 <a:solidFill>
                   <a:srgbClr val="141414"/>
                 </a:solidFill>
@@ -10866,57 +13565,21 @@
               </a:defRPr>
             </a:pPr>
             <a:r>
-              <a:t>test_prompts.py</a:t>
-            </a:r>
-          </a:p>
-        </p:txBody>
-      </p:sp>
-      <p:sp>
-        <p:nvSpPr>
-          <p:cNvPr id="16" name="TextBox 15"/>
-          <p:cNvSpPr txBox="1"/>
-          <p:nvPr/>
-        </p:nvSpPr>
-        <p:spPr>
-          <a:xfrm>
-            <a:off x="9144000" y="3566160"/>
-            <a:ext cx="2286000" cy="365760"/>
-          </a:xfrm>
-          <a:prstGeom prst="rect">
-            <a:avLst/>
-          </a:prstGeom>
-          <a:noFill/>
-        </p:spPr>
-        <p:txBody>
-          <a:bodyPr wrap="square">
-            <a:spAutoFit/>
-          </a:bodyPr>
-          <a:lstStyle/>
-          <a:p>
-            <a:pPr algn="r">
-              <a:defRPr sz="1300" b="0">
-                <a:solidFill>
-                  <a:srgbClr val="787878"/>
-                </a:solidFill>
-                <a:latin typeface="Open Sauce Sans"/>
-              </a:defRPr>
-            </a:pPr>
-            <a:r>
-              <a:t>23 tests</a:t>
-            </a:r>
-          </a:p>
-        </p:txBody>
-      </p:sp>
-      <p:sp>
-        <p:nvSpPr>
-          <p:cNvPr id="17" name="TextBox 16"/>
-          <p:cNvSpPr txBox="1"/>
-          <p:nvPr/>
-        </p:nvSpPr>
-        <p:spPr>
-          <a:xfrm>
-            <a:off x="5486400" y="3977640"/>
-            <a:ext cx="5486400" cy="457200"/>
+              <a:t>backend/main.py</a:t>
+            </a:r>
+          </a:p>
+        </p:txBody>
+      </p:sp>
+      <p:sp>
+        <p:nvSpPr>
+          <p:cNvPr id="13" name="TextBox 12"/>
+          <p:cNvSpPr txBox="1"/>
+          <p:nvPr/>
+        </p:nvSpPr>
+        <p:spPr>
+          <a:xfrm>
+            <a:off x="5029200" y="2724912"/>
+            <a:ext cx="5943600" cy="320040"/>
           </a:xfrm>
           <a:prstGeom prst="rect">
             <a:avLst/>
@@ -10938,21 +13601,21 @@
               </a:defRPr>
             </a:pPr>
             <a:r>
-              <a:t>All 4 prompt templates — content, format, instructions</a:t>
-            </a:r>
-          </a:p>
-        </p:txBody>
-      </p:sp>
-      <p:sp>
-        <p:nvSpPr>
-          <p:cNvPr id="18" name="Rectangle 17"/>
+              <a:t>FastAPI app with CORS + health check</a:t>
+            </a:r>
+          </a:p>
+        </p:txBody>
+      </p:sp>
+      <p:sp>
+        <p:nvSpPr>
+          <p:cNvPr id="14" name="Rectangle 13"/>
           <p:cNvSpPr/>
           <p:nvPr/>
         </p:nvSpPr>
         <p:spPr>
           <a:xfrm>
-            <a:off x="5486400" y="4526280"/>
-            <a:ext cx="5486400" cy="6350"/>
+            <a:off x="731520" y="3054096"/>
+            <a:ext cx="10058400" cy="6350"/>
           </a:xfrm>
           <a:prstGeom prst="rect">
             <a:avLst/>
@@ -10988,14 +13651,14 @@
       </p:sp>
       <p:sp>
         <p:nvSpPr>
-          <p:cNvPr id="19" name="TextBox 18"/>
-          <p:cNvSpPr txBox="1"/>
-          <p:nvPr/>
-        </p:nvSpPr>
-        <p:spPr>
-          <a:xfrm>
-            <a:off x="5486400" y="4754880"/>
-            <a:ext cx="3200400" cy="365760"/>
+          <p:cNvPr id="15" name="TextBox 14"/>
+          <p:cNvSpPr txBox="1"/>
+          <p:nvPr/>
+        </p:nvSpPr>
+        <p:spPr>
+          <a:xfrm>
+            <a:off x="731520" y="3108960"/>
+            <a:ext cx="3657600" cy="320040"/>
           </a:xfrm>
           <a:prstGeom prst="rect">
             <a:avLst/>
@@ -11009,7 +13672,7 @@
           <a:lstStyle/>
           <a:p>
             <a:pPr algn="l">
-              <a:defRPr sz="1400" b="1">
+              <a:defRPr sz="1200" b="1">
                 <a:solidFill>
                   <a:srgbClr val="141414"/>
                 </a:solidFill>
@@ -11017,57 +13680,21 @@
               </a:defRPr>
             </a:pPr>
             <a:r>
-              <a:t>test_llm.py</a:t>
-            </a:r>
-          </a:p>
-        </p:txBody>
-      </p:sp>
-      <p:sp>
-        <p:nvSpPr>
-          <p:cNvPr id="20" name="TextBox 19"/>
-          <p:cNvSpPr txBox="1"/>
-          <p:nvPr/>
-        </p:nvSpPr>
-        <p:spPr>
-          <a:xfrm>
-            <a:off x="9144000" y="4754880"/>
-            <a:ext cx="2286000" cy="365760"/>
-          </a:xfrm>
-          <a:prstGeom prst="rect">
-            <a:avLst/>
-          </a:prstGeom>
-          <a:noFill/>
-        </p:spPr>
-        <p:txBody>
-          <a:bodyPr wrap="square">
-            <a:spAutoFit/>
-          </a:bodyPr>
-          <a:lstStyle/>
-          <a:p>
-            <a:pPr algn="r">
-              <a:defRPr sz="1300" b="0">
-                <a:solidFill>
-                  <a:srgbClr val="787878"/>
-                </a:solidFill>
-                <a:latin typeface="Open Sauce Sans"/>
-              </a:defRPr>
-            </a:pPr>
-            <a:r>
-              <a:t>7 tests</a:t>
-            </a:r>
-          </a:p>
-        </p:txBody>
-      </p:sp>
-      <p:sp>
-        <p:nvSpPr>
-          <p:cNvPr id="21" name="TextBox 20"/>
-          <p:cNvSpPr txBox="1"/>
-          <p:nvPr/>
-        </p:nvSpPr>
-        <p:spPr>
-          <a:xfrm>
-            <a:off x="5486400" y="5166360"/>
-            <a:ext cx="5486400" cy="457200"/>
+              <a:t>backend/routers/rag.py</a:t>
+            </a:r>
+          </a:p>
+        </p:txBody>
+      </p:sp>
+      <p:sp>
+        <p:nvSpPr>
+          <p:cNvPr id="16" name="TextBox 15"/>
+          <p:cNvSpPr txBox="1"/>
+          <p:nvPr/>
+        </p:nvSpPr>
+        <p:spPr>
+          <a:xfrm>
+            <a:off x="5029200" y="3108960"/>
+            <a:ext cx="5943600" cy="320040"/>
           </a:xfrm>
           <a:prstGeom prst="rect">
             <a:avLst/>
@@ -11089,21 +13716,21 @@
               </a:defRPr>
             </a:pPr>
             <a:r>
-              <a:t>API key validation, mocked Gemini calls, error handling</a:t>
-            </a:r>
-          </a:p>
-        </p:txBody>
-      </p:sp>
-      <p:sp>
-        <p:nvSpPr>
-          <p:cNvPr id="22" name="Rectangle 21"/>
+              <a:t>REST endpoints: /upload, /query</a:t>
+            </a:r>
+          </a:p>
+        </p:txBody>
+      </p:sp>
+      <p:sp>
+        <p:nvSpPr>
+          <p:cNvPr id="17" name="Rectangle 16"/>
           <p:cNvSpPr/>
           <p:nvPr/>
         </p:nvSpPr>
         <p:spPr>
           <a:xfrm>
-            <a:off x="5486400" y="5715000"/>
-            <a:ext cx="5486400" cy="6350"/>
+            <a:off x="731520" y="3438144"/>
+            <a:ext cx="10058400" cy="6350"/>
           </a:xfrm>
           <a:prstGeom prst="rect">
             <a:avLst/>
@@ -11139,14 +13766,14 @@
       </p:sp>
       <p:sp>
         <p:nvSpPr>
-          <p:cNvPr id="23" name="TextBox 22"/>
-          <p:cNvSpPr txBox="1"/>
-          <p:nvPr/>
-        </p:nvSpPr>
-        <p:spPr>
-          <a:xfrm>
-            <a:off x="731520" y="4572000"/>
-            <a:ext cx="4114800" cy="1097280"/>
+          <p:cNvPr id="18" name="TextBox 17"/>
+          <p:cNvSpPr txBox="1"/>
+          <p:nvPr/>
+        </p:nvSpPr>
+        <p:spPr>
+          <a:xfrm>
+            <a:off x="731520" y="3493008"/>
+            <a:ext cx="3657600" cy="320040"/>
           </a:xfrm>
           <a:prstGeom prst="rect">
             <a:avLst/>
@@ -11160,7 +13787,43 @@
           <a:lstStyle/>
           <a:p>
             <a:pPr algn="l">
-              <a:defRPr sz="1300" b="0">
+              <a:defRPr sz="1200" b="1">
+                <a:solidFill>
+                  <a:srgbClr val="141414"/>
+                </a:solidFill>
+                <a:latin typeface="Open Sauce Sans"/>
+              </a:defRPr>
+            </a:pPr>
+            <a:r>
+              <a:t>backend/models/schemas.py</a:t>
+            </a:r>
+          </a:p>
+        </p:txBody>
+      </p:sp>
+      <p:sp>
+        <p:nvSpPr>
+          <p:cNvPr id="19" name="TextBox 18"/>
+          <p:cNvSpPr txBox="1"/>
+          <p:nvPr/>
+        </p:nvSpPr>
+        <p:spPr>
+          <a:xfrm>
+            <a:off x="5029200" y="3493008"/>
+            <a:ext cx="5943600" cy="320040"/>
+          </a:xfrm>
+          <a:prstGeom prst="rect">
+            <a:avLst/>
+          </a:prstGeom>
+          <a:noFill/>
+        </p:spPr>
+        <p:txBody>
+          <a:bodyPr wrap="square">
+            <a:spAutoFit/>
+          </a:bodyPr>
+          <a:lstStyle/>
+          <a:p>
+            <a:pPr algn="l">
+              <a:defRPr sz="1200" b="0">
                 <a:solidFill>
                   <a:srgbClr val="787878"/>
                 </a:solidFill>
@@ -11168,16 +13831,741 @@
               </a:defRPr>
             </a:pPr>
             <a:r>
-              <a:t>All tests use unittest.mock to simulate</a:t>
-            </a:r>
-            <a:br/>
-            <a:r>
-              <a:t>the Gemini API. No real API calls.</a:t>
-            </a:r>
-            <a:br/>
-            <a:r>
-              <a:t>No cost. Instant feedback.</a:t>
-            </a:r>
+              <a:t>Pydantic request/response models</a:t>
+            </a:r>
+          </a:p>
+        </p:txBody>
+      </p:sp>
+      <p:sp>
+        <p:nvSpPr>
+          <p:cNvPr id="20" name="Rectangle 19"/>
+          <p:cNvSpPr/>
+          <p:nvPr/>
+        </p:nvSpPr>
+        <p:spPr>
+          <a:xfrm>
+            <a:off x="731520" y="3822192"/>
+            <a:ext cx="10058400" cy="6350"/>
+          </a:xfrm>
+          <a:prstGeom prst="rect">
+            <a:avLst/>
+          </a:prstGeom>
+          <a:solidFill>
+            <a:srgbClr val="D2D2D2"/>
+          </a:solidFill>
+          <a:ln>
+            <a:noFill/>
+          </a:ln>
+        </p:spPr>
+        <p:style>
+          <a:lnRef idx="1">
+            <a:schemeClr val="accent1"/>
+          </a:lnRef>
+          <a:fillRef idx="3">
+            <a:schemeClr val="accent1"/>
+          </a:fillRef>
+          <a:effectRef idx="2">
+            <a:schemeClr val="accent1"/>
+          </a:effectRef>
+          <a:fontRef idx="minor">
+            <a:schemeClr val="lt1"/>
+          </a:fontRef>
+        </p:style>
+        <p:txBody>
+          <a:bodyPr rtlCol="0" anchor="ctr"/>
+          <a:lstStyle/>
+          <a:p>
+            <a:pPr algn="ctr"/>
+          </a:p>
+        </p:txBody>
+      </p:sp>
+      <p:sp>
+        <p:nvSpPr>
+          <p:cNvPr id="21" name="TextBox 20"/>
+          <p:cNvSpPr txBox="1"/>
+          <p:nvPr/>
+        </p:nvSpPr>
+        <p:spPr>
+          <a:xfrm>
+            <a:off x="731520" y="3877056"/>
+            <a:ext cx="3657600" cy="320040"/>
+          </a:xfrm>
+          <a:prstGeom prst="rect">
+            <a:avLst/>
+          </a:prstGeom>
+          <a:noFill/>
+        </p:spPr>
+        <p:txBody>
+          <a:bodyPr wrap="square">
+            <a:spAutoFit/>
+          </a:bodyPr>
+          <a:lstStyle/>
+          <a:p>
+            <a:pPr algn="l">
+              <a:defRPr sz="1200" b="1">
+                <a:solidFill>
+                  <a:srgbClr val="141414"/>
+                </a:solidFill>
+                <a:latin typeface="Open Sauce Sans"/>
+              </a:defRPr>
+            </a:pPr>
+            <a:r>
+              <a:t>backend/services/embedding.py</a:t>
+            </a:r>
+          </a:p>
+        </p:txBody>
+      </p:sp>
+      <p:sp>
+        <p:nvSpPr>
+          <p:cNvPr id="22" name="TextBox 21"/>
+          <p:cNvSpPr txBox="1"/>
+          <p:nvPr/>
+        </p:nvSpPr>
+        <p:spPr>
+          <a:xfrm>
+            <a:off x="5029200" y="3877056"/>
+            <a:ext cx="5943600" cy="320040"/>
+          </a:xfrm>
+          <a:prstGeom prst="rect">
+            <a:avLst/>
+          </a:prstGeom>
+          <a:noFill/>
+        </p:spPr>
+        <p:txBody>
+          <a:bodyPr wrap="square">
+            <a:spAutoFit/>
+          </a:bodyPr>
+          <a:lstStyle/>
+          <a:p>
+            <a:pPr algn="l">
+              <a:defRPr sz="1200" b="0">
+                <a:solidFill>
+                  <a:srgbClr val="787878"/>
+                </a:solidFill>
+                <a:latin typeface="Open Sauce Sans"/>
+              </a:defRPr>
+            </a:pPr>
+            <a:r>
+              <a:t>PDF extraction + FAISS indexing</a:t>
+            </a:r>
+          </a:p>
+        </p:txBody>
+      </p:sp>
+      <p:sp>
+        <p:nvSpPr>
+          <p:cNvPr id="23" name="Rectangle 22"/>
+          <p:cNvSpPr/>
+          <p:nvPr/>
+        </p:nvSpPr>
+        <p:spPr>
+          <a:xfrm>
+            <a:off x="731520" y="4206240"/>
+            <a:ext cx="10058400" cy="6350"/>
+          </a:xfrm>
+          <a:prstGeom prst="rect">
+            <a:avLst/>
+          </a:prstGeom>
+          <a:solidFill>
+            <a:srgbClr val="D2D2D2"/>
+          </a:solidFill>
+          <a:ln>
+            <a:noFill/>
+          </a:ln>
+        </p:spPr>
+        <p:style>
+          <a:lnRef idx="1">
+            <a:schemeClr val="accent1"/>
+          </a:lnRef>
+          <a:fillRef idx="3">
+            <a:schemeClr val="accent1"/>
+          </a:fillRef>
+          <a:effectRef idx="2">
+            <a:schemeClr val="accent1"/>
+          </a:effectRef>
+          <a:fontRef idx="minor">
+            <a:schemeClr val="lt1"/>
+          </a:fontRef>
+        </p:style>
+        <p:txBody>
+          <a:bodyPr rtlCol="0" anchor="ctr"/>
+          <a:lstStyle/>
+          <a:p>
+            <a:pPr algn="ctr"/>
+          </a:p>
+        </p:txBody>
+      </p:sp>
+      <p:sp>
+        <p:nvSpPr>
+          <p:cNvPr id="24" name="TextBox 23"/>
+          <p:cNvSpPr txBox="1"/>
+          <p:nvPr/>
+        </p:nvSpPr>
+        <p:spPr>
+          <a:xfrm>
+            <a:off x="731520" y="4261104"/>
+            <a:ext cx="3657600" cy="320040"/>
+          </a:xfrm>
+          <a:prstGeom prst="rect">
+            <a:avLst/>
+          </a:prstGeom>
+          <a:noFill/>
+        </p:spPr>
+        <p:txBody>
+          <a:bodyPr wrap="square">
+            <a:spAutoFit/>
+          </a:bodyPr>
+          <a:lstStyle/>
+          <a:p>
+            <a:pPr algn="l">
+              <a:defRPr sz="1200" b="1">
+                <a:solidFill>
+                  <a:srgbClr val="141414"/>
+                </a:solidFill>
+                <a:latin typeface="Open Sauce Sans"/>
+              </a:defRPr>
+            </a:pPr>
+            <a:r>
+              <a:t>backend/services/agent.py</a:t>
+            </a:r>
+          </a:p>
+        </p:txBody>
+      </p:sp>
+      <p:sp>
+        <p:nvSpPr>
+          <p:cNvPr id="25" name="TextBox 24"/>
+          <p:cNvSpPr txBox="1"/>
+          <p:nvPr/>
+        </p:nvSpPr>
+        <p:spPr>
+          <a:xfrm>
+            <a:off x="5029200" y="4261104"/>
+            <a:ext cx="5943600" cy="320040"/>
+          </a:xfrm>
+          <a:prstGeom prst="rect">
+            <a:avLst/>
+          </a:prstGeom>
+          <a:noFill/>
+        </p:spPr>
+        <p:txBody>
+          <a:bodyPr wrap="square">
+            <a:spAutoFit/>
+          </a:bodyPr>
+          <a:lstStyle/>
+          <a:p>
+            <a:pPr algn="l">
+              <a:defRPr sz="1200" b="0">
+                <a:solidFill>
+                  <a:srgbClr val="787878"/>
+                </a:solidFill>
+                <a:latin typeface="Open Sauce Sans"/>
+              </a:defRPr>
+            </a:pPr>
+            <a:r>
+              <a:t>LangGraph multi-step RAG workflow</a:t>
+            </a:r>
+          </a:p>
+        </p:txBody>
+      </p:sp>
+      <p:sp>
+        <p:nvSpPr>
+          <p:cNvPr id="26" name="Rectangle 25"/>
+          <p:cNvSpPr/>
+          <p:nvPr/>
+        </p:nvSpPr>
+        <p:spPr>
+          <a:xfrm>
+            <a:off x="731520" y="4590288"/>
+            <a:ext cx="10058400" cy="6350"/>
+          </a:xfrm>
+          <a:prstGeom prst="rect">
+            <a:avLst/>
+          </a:prstGeom>
+          <a:solidFill>
+            <a:srgbClr val="D2D2D2"/>
+          </a:solidFill>
+          <a:ln>
+            <a:noFill/>
+          </a:ln>
+        </p:spPr>
+        <p:style>
+          <a:lnRef idx="1">
+            <a:schemeClr val="accent1"/>
+          </a:lnRef>
+          <a:fillRef idx="3">
+            <a:schemeClr val="accent1"/>
+          </a:fillRef>
+          <a:effectRef idx="2">
+            <a:schemeClr val="accent1"/>
+          </a:effectRef>
+          <a:fontRef idx="minor">
+            <a:schemeClr val="lt1"/>
+          </a:fontRef>
+        </p:style>
+        <p:txBody>
+          <a:bodyPr rtlCol="0" anchor="ctr"/>
+          <a:lstStyle/>
+          <a:p>
+            <a:pPr algn="ctr"/>
+          </a:p>
+        </p:txBody>
+      </p:sp>
+      <p:sp>
+        <p:nvSpPr>
+          <p:cNvPr id="27" name="TextBox 26"/>
+          <p:cNvSpPr txBox="1"/>
+          <p:nvPr/>
+        </p:nvSpPr>
+        <p:spPr>
+          <a:xfrm>
+            <a:off x="731520" y="4645152"/>
+            <a:ext cx="3657600" cy="320040"/>
+          </a:xfrm>
+          <a:prstGeom prst="rect">
+            <a:avLst/>
+          </a:prstGeom>
+          <a:noFill/>
+        </p:spPr>
+        <p:txBody>
+          <a:bodyPr wrap="square">
+            <a:spAutoFit/>
+          </a:bodyPr>
+          <a:lstStyle/>
+          <a:p>
+            <a:pPr algn="l">
+              <a:defRPr sz="1200" b="1">
+                <a:solidFill>
+                  <a:srgbClr val="141414"/>
+                </a:solidFill>
+                <a:latin typeface="Open Sauce Sans"/>
+              </a:defRPr>
+            </a:pPr>
+            <a:r>
+              <a:t>docker-compose.yml</a:t>
+            </a:r>
+          </a:p>
+        </p:txBody>
+      </p:sp>
+      <p:sp>
+        <p:nvSpPr>
+          <p:cNvPr id="28" name="TextBox 27"/>
+          <p:cNvSpPr txBox="1"/>
+          <p:nvPr/>
+        </p:nvSpPr>
+        <p:spPr>
+          <a:xfrm>
+            <a:off x="5029200" y="4645152"/>
+            <a:ext cx="5943600" cy="320040"/>
+          </a:xfrm>
+          <a:prstGeom prst="rect">
+            <a:avLst/>
+          </a:prstGeom>
+          <a:noFill/>
+        </p:spPr>
+        <p:txBody>
+          <a:bodyPr wrap="square">
+            <a:spAutoFit/>
+          </a:bodyPr>
+          <a:lstStyle/>
+          <a:p>
+            <a:pPr algn="l">
+              <a:defRPr sz="1200" b="0">
+                <a:solidFill>
+                  <a:srgbClr val="787878"/>
+                </a:solidFill>
+                <a:latin typeface="Open Sauce Sans"/>
+              </a:defRPr>
+            </a:pPr>
+            <a:r>
+              <a:t>Orchestrates frontend + backend containers</a:t>
+            </a:r>
+          </a:p>
+        </p:txBody>
+      </p:sp>
+      <p:sp>
+        <p:nvSpPr>
+          <p:cNvPr id="29" name="Rectangle 28"/>
+          <p:cNvSpPr/>
+          <p:nvPr/>
+        </p:nvSpPr>
+        <p:spPr>
+          <a:xfrm>
+            <a:off x="731520" y="4974336"/>
+            <a:ext cx="10058400" cy="6350"/>
+          </a:xfrm>
+          <a:prstGeom prst="rect">
+            <a:avLst/>
+          </a:prstGeom>
+          <a:solidFill>
+            <a:srgbClr val="D2D2D2"/>
+          </a:solidFill>
+          <a:ln>
+            <a:noFill/>
+          </a:ln>
+        </p:spPr>
+        <p:style>
+          <a:lnRef idx="1">
+            <a:schemeClr val="accent1"/>
+          </a:lnRef>
+          <a:fillRef idx="3">
+            <a:schemeClr val="accent1"/>
+          </a:fillRef>
+          <a:effectRef idx="2">
+            <a:schemeClr val="accent1"/>
+          </a:effectRef>
+          <a:fontRef idx="minor">
+            <a:schemeClr val="lt1"/>
+          </a:fontRef>
+        </p:style>
+        <p:txBody>
+          <a:bodyPr rtlCol="0" anchor="ctr"/>
+          <a:lstStyle/>
+          <a:p>
+            <a:pPr algn="ctr"/>
+          </a:p>
+        </p:txBody>
+      </p:sp>
+      <p:sp>
+        <p:nvSpPr>
+          <p:cNvPr id="30" name="TextBox 29"/>
+          <p:cNvSpPr txBox="1"/>
+          <p:nvPr/>
+        </p:nvSpPr>
+        <p:spPr>
+          <a:xfrm>
+            <a:off x="731520" y="5029200"/>
+            <a:ext cx="3657600" cy="320040"/>
+          </a:xfrm>
+          <a:prstGeom prst="rect">
+            <a:avLst/>
+          </a:prstGeom>
+          <a:noFill/>
+        </p:spPr>
+        <p:txBody>
+          <a:bodyPr wrap="square">
+            <a:spAutoFit/>
+          </a:bodyPr>
+          <a:lstStyle/>
+          <a:p>
+            <a:pPr algn="l">
+              <a:defRPr sz="1200" b="1">
+                <a:solidFill>
+                  <a:srgbClr val="141414"/>
+                </a:solidFill>
+                <a:latin typeface="Open Sauce Sans"/>
+              </a:defRPr>
+            </a:pPr>
+            <a:r>
+              <a:t>config.py</a:t>
+            </a:r>
+          </a:p>
+        </p:txBody>
+      </p:sp>
+      <p:sp>
+        <p:nvSpPr>
+          <p:cNvPr id="31" name="TextBox 30"/>
+          <p:cNvSpPr txBox="1"/>
+          <p:nvPr/>
+        </p:nvSpPr>
+        <p:spPr>
+          <a:xfrm>
+            <a:off x="5029200" y="5029200"/>
+            <a:ext cx="5943600" cy="320040"/>
+          </a:xfrm>
+          <a:prstGeom prst="rect">
+            <a:avLst/>
+          </a:prstGeom>
+          <a:noFill/>
+        </p:spPr>
+        <p:txBody>
+          <a:bodyPr wrap="square">
+            <a:spAutoFit/>
+          </a:bodyPr>
+          <a:lstStyle/>
+          <a:p>
+            <a:pPr algn="l">
+              <a:defRPr sz="1200" b="0">
+                <a:solidFill>
+                  <a:srgbClr val="787878"/>
+                </a:solidFill>
+                <a:latin typeface="Open Sauce Sans"/>
+              </a:defRPr>
+            </a:pPr>
+            <a:r>
+              <a:t>Central configuration (no hardcoded values)</a:t>
+            </a:r>
+          </a:p>
+        </p:txBody>
+      </p:sp>
+      <p:sp>
+        <p:nvSpPr>
+          <p:cNvPr id="32" name="Rectangle 31"/>
+          <p:cNvSpPr/>
+          <p:nvPr/>
+        </p:nvSpPr>
+        <p:spPr>
+          <a:xfrm>
+            <a:off x="731520" y="5358384"/>
+            <a:ext cx="10058400" cy="6350"/>
+          </a:xfrm>
+          <a:prstGeom prst="rect">
+            <a:avLst/>
+          </a:prstGeom>
+          <a:solidFill>
+            <a:srgbClr val="D2D2D2"/>
+          </a:solidFill>
+          <a:ln>
+            <a:noFill/>
+          </a:ln>
+        </p:spPr>
+        <p:style>
+          <a:lnRef idx="1">
+            <a:schemeClr val="accent1"/>
+          </a:lnRef>
+          <a:fillRef idx="3">
+            <a:schemeClr val="accent1"/>
+          </a:fillRef>
+          <a:effectRef idx="2">
+            <a:schemeClr val="accent1"/>
+          </a:effectRef>
+          <a:fontRef idx="minor">
+            <a:schemeClr val="lt1"/>
+          </a:fontRef>
+        </p:style>
+        <p:txBody>
+          <a:bodyPr rtlCol="0" anchor="ctr"/>
+          <a:lstStyle/>
+          <a:p>
+            <a:pPr algn="ctr"/>
+          </a:p>
+        </p:txBody>
+      </p:sp>
+      <p:sp>
+        <p:nvSpPr>
+          <p:cNvPr id="33" name="TextBox 32"/>
+          <p:cNvSpPr txBox="1"/>
+          <p:nvPr/>
+        </p:nvSpPr>
+        <p:spPr>
+          <a:xfrm>
+            <a:off x="731520" y="5413248"/>
+            <a:ext cx="3657600" cy="320040"/>
+          </a:xfrm>
+          <a:prstGeom prst="rect">
+            <a:avLst/>
+          </a:prstGeom>
+          <a:noFill/>
+        </p:spPr>
+        <p:txBody>
+          <a:bodyPr wrap="square">
+            <a:spAutoFit/>
+          </a:bodyPr>
+          <a:lstStyle/>
+          <a:p>
+            <a:pPr algn="l">
+              <a:defRPr sz="1200" b="1">
+                <a:solidFill>
+                  <a:srgbClr val="141414"/>
+                </a:solidFill>
+                <a:latin typeface="Open Sauce Sans"/>
+              </a:defRPr>
+            </a:pPr>
+            <a:r>
+              <a:t>prompts/prompts.py</a:t>
+            </a:r>
+          </a:p>
+        </p:txBody>
+      </p:sp>
+      <p:sp>
+        <p:nvSpPr>
+          <p:cNvPr id="34" name="TextBox 33"/>
+          <p:cNvSpPr txBox="1"/>
+          <p:nvPr/>
+        </p:nvSpPr>
+        <p:spPr>
+          <a:xfrm>
+            <a:off x="5029200" y="5413248"/>
+            <a:ext cx="5943600" cy="320040"/>
+          </a:xfrm>
+          <a:prstGeom prst="rect">
+            <a:avLst/>
+          </a:prstGeom>
+          <a:noFill/>
+        </p:spPr>
+        <p:txBody>
+          <a:bodyPr wrap="square">
+            <a:spAutoFit/>
+          </a:bodyPr>
+          <a:lstStyle/>
+          <a:p>
+            <a:pPr algn="l">
+              <a:defRPr sz="1200" b="0">
+                <a:solidFill>
+                  <a:srgbClr val="787878"/>
+                </a:solidFill>
+                <a:latin typeface="Open Sauce Sans"/>
+              </a:defRPr>
+            </a:pPr>
+            <a:r>
+              <a:t>Structured prompt templates for all features</a:t>
+            </a:r>
+          </a:p>
+        </p:txBody>
+      </p:sp>
+      <p:sp>
+        <p:nvSpPr>
+          <p:cNvPr id="35" name="Rectangle 34"/>
+          <p:cNvSpPr/>
+          <p:nvPr/>
+        </p:nvSpPr>
+        <p:spPr>
+          <a:xfrm>
+            <a:off x="731520" y="5742432"/>
+            <a:ext cx="10058400" cy="6350"/>
+          </a:xfrm>
+          <a:prstGeom prst="rect">
+            <a:avLst/>
+          </a:prstGeom>
+          <a:solidFill>
+            <a:srgbClr val="D2D2D2"/>
+          </a:solidFill>
+          <a:ln>
+            <a:noFill/>
+          </a:ln>
+        </p:spPr>
+        <p:style>
+          <a:lnRef idx="1">
+            <a:schemeClr val="accent1"/>
+          </a:lnRef>
+          <a:fillRef idx="3">
+            <a:schemeClr val="accent1"/>
+          </a:fillRef>
+          <a:effectRef idx="2">
+            <a:schemeClr val="accent1"/>
+          </a:effectRef>
+          <a:fontRef idx="minor">
+            <a:schemeClr val="lt1"/>
+          </a:fontRef>
+        </p:style>
+        <p:txBody>
+          <a:bodyPr rtlCol="0" anchor="ctr"/>
+          <a:lstStyle/>
+          <a:p>
+            <a:pPr algn="ctr"/>
+          </a:p>
+        </p:txBody>
+      </p:sp>
+      <p:sp>
+        <p:nvSpPr>
+          <p:cNvPr id="36" name="TextBox 35"/>
+          <p:cNvSpPr txBox="1"/>
+          <p:nvPr/>
+        </p:nvSpPr>
+        <p:spPr>
+          <a:xfrm>
+            <a:off x="731520" y="5797296"/>
+            <a:ext cx="3657600" cy="320040"/>
+          </a:xfrm>
+          <a:prstGeom prst="rect">
+            <a:avLst/>
+          </a:prstGeom>
+          <a:noFill/>
+        </p:spPr>
+        <p:txBody>
+          <a:bodyPr wrap="square">
+            <a:spAutoFit/>
+          </a:bodyPr>
+          <a:lstStyle/>
+          <a:p>
+            <a:pPr algn="l">
+              <a:defRPr sz="1200" b="1">
+                <a:solidFill>
+                  <a:srgbClr val="141414"/>
+                </a:solidFill>
+                <a:latin typeface="Open Sauce Sans"/>
+              </a:defRPr>
+            </a:pPr>
+            <a:r>
+              <a:t>tests/</a:t>
+            </a:r>
+          </a:p>
+        </p:txBody>
+      </p:sp>
+      <p:sp>
+        <p:nvSpPr>
+          <p:cNvPr id="37" name="TextBox 36"/>
+          <p:cNvSpPr txBox="1"/>
+          <p:nvPr/>
+        </p:nvSpPr>
+        <p:spPr>
+          <a:xfrm>
+            <a:off x="5029200" y="5797296"/>
+            <a:ext cx="5943600" cy="320040"/>
+          </a:xfrm>
+          <a:prstGeom prst="rect">
+            <a:avLst/>
+          </a:prstGeom>
+          <a:noFill/>
+        </p:spPr>
+        <p:txBody>
+          <a:bodyPr wrap="square">
+            <a:spAutoFit/>
+          </a:bodyPr>
+          <a:lstStyle/>
+          <a:p>
+            <a:pPr algn="l">
+              <a:defRPr sz="1200" b="0">
+                <a:solidFill>
+                  <a:srgbClr val="787878"/>
+                </a:solidFill>
+                <a:latin typeface="Open Sauce Sans"/>
+              </a:defRPr>
+            </a:pPr>
+            <a:r>
+              <a:t>44 automated unit tests (pytest)</a:t>
+            </a:r>
+          </a:p>
+        </p:txBody>
+      </p:sp>
+      <p:sp>
+        <p:nvSpPr>
+          <p:cNvPr id="38" name="Rectangle 37"/>
+          <p:cNvSpPr/>
+          <p:nvPr/>
+        </p:nvSpPr>
+        <p:spPr>
+          <a:xfrm>
+            <a:off x="731520" y="6126480"/>
+            <a:ext cx="10058400" cy="6350"/>
+          </a:xfrm>
+          <a:prstGeom prst="rect">
+            <a:avLst/>
+          </a:prstGeom>
+          <a:solidFill>
+            <a:srgbClr val="D2D2D2"/>
+          </a:solidFill>
+          <a:ln>
+            <a:noFill/>
+          </a:ln>
+        </p:spPr>
+        <p:style>
+          <a:lnRef idx="1">
+            <a:schemeClr val="accent1"/>
+          </a:lnRef>
+          <a:fillRef idx="3">
+            <a:schemeClr val="accent1"/>
+          </a:fillRef>
+          <a:effectRef idx="2">
+            <a:schemeClr val="accent1"/>
+          </a:effectRef>
+          <a:fontRef idx="minor">
+            <a:schemeClr val="lt1"/>
+          </a:fontRef>
+        </p:style>
+        <p:txBody>
+          <a:bodyPr rtlCol="0" anchor="ctr"/>
+          <a:lstStyle/>
+          <a:p>
+            <a:pPr algn="ctr"/>
           </a:p>
         </p:txBody>
       </p:sp>
